--- a/CSO_BCA_Syariah_Scheduler_v6_PPT.pptx
+++ b/CSO_BCA_Syariah_Scheduler_v6_PPT.pptx
@@ -24,9 +24,10 @@
     <p:sldId id="272" r:id="rId18"/>
     <p:sldId id="273" r:id="rId19"/>
     <p:sldId id="274" r:id="rId20"/>
+    <p:sldId id="275" r:id="rId21"/>
   </p:sldIdLst>
   <p:notesMasterIdLst>
-    <p:notesMasterId r:id="rId21"/>
+    <p:notesMasterId r:id="rId22"/>
   </p:notesMasterIdLst>
   <p:sldSz cx="9144000" cy="5143500"/>
   <p:notesSz cx="5143500" cy="9144000"/>
@@ -1512,6 +1513,94 @@
             <a:fld id="{F7021451-1387-4CA6-816F-3879F97B5CBC}" type="slidenum">
               <a:rPr lang="en-US"/>
               <a:t>2</a:t>
+            </a:fld>
+            <a:endParaRPr lang="en-US"/>
+          </a:p>
+        </p:txBody>
+      </p:sp>
+    </p:spTree>
+    <p:extLst>
+      <p:ext uri="{BB962C8B-B14F-4D97-AF65-F5344CB8AC3E}">
+        <p14:creationId xmlns:p14="http://schemas.microsoft.com/office/powerpoint/2010/main" val="1024086991"/>
+      </p:ext>
+    </p:extLst>
+  </p:cSld>
+  <p:clrMapOvr>
+    <a:masterClrMapping/>
+  </p:clrMapOvr>
+</p:notes>
+</file>
+
+<file path=ppt/notesSlides/notesSlide20.xml><?xml version="1.0" encoding="utf-8"?>
+<p:notes xmlns:a="http://schemas.openxmlformats.org/drawingml/2006/main" xmlns:r="http://schemas.openxmlformats.org/officeDocument/2006/relationships" xmlns:p="http://schemas.openxmlformats.org/presentationml/2006/main">
+  <p:cSld>
+    <p:spTree>
+      <p:nvGrpSpPr>
+        <p:cNvPr id="1" name=""/>
+        <p:cNvGrpSpPr/>
+        <p:nvPr/>
+      </p:nvGrpSpPr>
+      <p:grpSpPr>
+        <a:xfrm>
+          <a:off x="0" y="0"/>
+          <a:ext cx="0" cy="0"/>
+          <a:chOff x="0" y="0"/>
+          <a:chExt cx="0" cy="0"/>
+        </a:xfrm>
+      </p:grpSpPr>
+      <p:sp>
+        <p:nvSpPr>
+          <p:cNvPr id="2" name="Slide Image Placeholder 1"/>
+          <p:cNvSpPr>
+            <a:spLocks noGrp="1" noRot="1" noChangeAspect="1"/>
+          </p:cNvSpPr>
+          <p:nvPr>
+            <p:ph type="sldImg"/>
+          </p:nvPr>
+        </p:nvSpPr>
+        <p:spPr/>
+      </p:sp>
+      <p:sp>
+        <p:nvSpPr>
+          <p:cNvPr id="3" name="Notes Placeholder 2"/>
+          <p:cNvSpPr>
+            <a:spLocks noGrp="1"/>
+          </p:cNvSpPr>
+          <p:nvPr>
+            <p:ph type="body" idx="1"/>
+          </p:nvPr>
+        </p:nvSpPr>
+        <p:spPr/>
+        <p:txBody>
+          <a:bodyPr/>
+          <a:lstStyle/>
+          <a:p>
+            <a:r>
+              <a:rPr lang="en-US" dirty="0"/>
+              <a:t/>
+            </a:r>
+            <a:endParaRPr lang="en-US" dirty="0"/>
+          </a:p>
+        </p:txBody>
+      </p:sp>
+      <p:sp>
+        <p:nvSpPr>
+          <p:cNvPr id="4" name="Slide Number Placeholder 3"/>
+          <p:cNvSpPr>
+            <a:spLocks noGrp="1"/>
+          </p:cNvSpPr>
+          <p:nvPr>
+            <p:ph type="sldNum" sz="quarter" idx="10"/>
+          </p:nvPr>
+        </p:nvSpPr>
+        <p:spPr/>
+        <p:txBody>
+          <a:bodyPr/>
+          <a:lstStyle/>
+          <a:p>
+            <a:fld id="{F7021451-1387-4CA6-816F-3879F97B5CBC}" type="slidenum">
+              <a:rPr lang="en-US"/>
+              <a:t>20</a:t>
             </a:fld>
             <a:endParaRPr lang="en-US"/>
           </a:p>
@@ -8639,7 +8728,7 @@
                 <a:ea typeface="Cambria" pitchFamily="34" charset="-122"/>
                 <a:cs typeface="Cambria" pitchFamily="34" charset="-120"/>
               </a:rPr>
-              <a:t>Cross-Month Carry-Over Analysis (NEW v6)</a:t>
+              <a:t>Export Excel — Formatted Output (NEW v6)</a:t>
             </a:r>
             <a:endParaRPr lang="en-US" sz="3000" dirty="0"/>
           </a:p>
@@ -8677,19 +8766,19 @@
         <p:spPr>
           <a:xfrm>
             <a:off x="365760" y="1005840"/>
-            <a:ext cx="4023360" cy="1645920"/>
+            <a:ext cx="4023360" cy="3703320"/>
           </a:xfrm>
           <a:prstGeom prst="roundRect">
             <a:avLst>
-              <a:gd name="adj" fmla="val 4444"/>
+              <a:gd name="adj" fmla="val 1975"/>
             </a:avLst>
           </a:prstGeom>
           <a:solidFill>
-            <a:srgbClr val="FEE2E2"/>
+            <a:srgbClr val="F1F5F9"/>
           </a:solidFill>
           <a:ln w="12700">
             <a:solidFill>
-              <a:srgbClr val="FEE2E2"/>
+              <a:srgbClr val="F1F5F9"/>
             </a:solidFill>
             <a:prstDash val="solid"/>
           </a:ln>
@@ -8711,33 +8800,33 @@
         <p:spPr>
           <a:xfrm>
             <a:off x="502920" y="1078992"/>
-            <a:ext cx="3749040" cy="320040"/>
-          </a:xfrm>
-          <a:prstGeom prst="rect">
-            <a:avLst/>
-          </a:prstGeom>
-          <a:noFill/>
-          <a:ln/>
-        </p:spPr>
-        <p:txBody>
-          <a:bodyPr wrap="square" lIns="0" tIns="0" rIns="0" bIns="0" rtlCol="0" anchor="ctr"/>
-          <a:lstStyle/>
-          <a:p>
-            <a:pPr indent="0" marL="0">
-              <a:buNone/>
-            </a:pPr>
-            <a:r>
-              <a:rPr lang="en-US" sz="1100" b="1" dirty="0">
-                <a:solidFill>
-                  <a:srgbClr val="DC2626"/>
-                </a:solidFill>
-                <a:latin typeface="Calibri" pitchFamily="34" charset="0"/>
-                <a:ea typeface="Calibri" pitchFamily="34" charset="-122"/>
-                <a:cs typeface="Calibri" pitchFamily="34" charset="-120"/>
-              </a:rPr>
-              <a:t>MASALAH yang Selama Ini Ada:</a:t>
-            </a:r>
-            <a:endParaRPr lang="en-US" sz="1100" dirty="0"/>
+            <a:ext cx="3749040" cy="365760"/>
+          </a:xfrm>
+          <a:prstGeom prst="rect">
+            <a:avLst/>
+          </a:prstGeom>
+          <a:noFill/>
+          <a:ln/>
+        </p:spPr>
+        <p:txBody>
+          <a:bodyPr wrap="square" lIns="0" tIns="0" rIns="0" bIns="0" rtlCol="0" anchor="ctr"/>
+          <a:lstStyle/>
+          <a:p>
+            <a:pPr indent="0" marL="0">
+              <a:buNone/>
+            </a:pPr>
+            <a:r>
+              <a:rPr lang="en-US" sz="1300" b="1" dirty="0">
+                <a:solidFill>
+                  <a:srgbClr val="1B4332"/>
+                </a:solidFill>
+                <a:latin typeface="Cambria" pitchFamily="34" charset="0"/>
+                <a:ea typeface="Cambria" pitchFamily="34" charset="-122"/>
+                <a:cs typeface="Cambria" pitchFamily="34" charset="-120"/>
+              </a:rPr>
+              <a:t>📊 1 Klik → File .xlsx Siap Pakai</a:t>
+            </a:r>
+            <a:endParaRPr lang="en-US" sz="1300" dirty="0"/>
           </a:p>
         </p:txBody>
       </p:sp>
@@ -8749,24 +8838,24 @@
         </p:nvSpPr>
         <p:spPr>
           <a:xfrm>
-            <a:off x="502920" y="1444752"/>
-            <a:ext cx="3749040" cy="1097280"/>
-          </a:xfrm>
-          <a:prstGeom prst="rect">
-            <a:avLst/>
-          </a:prstGeom>
-          <a:noFill/>
-          <a:ln/>
-        </p:spPr>
-        <p:txBody>
-          <a:bodyPr wrap="square" lIns="0" tIns="0" rIns="0" bIns="0" rtlCol="0" anchor="ctr"/>
-          <a:lstStyle/>
-          <a:p>
-            <a:pPr indent="0" marL="0">
-              <a:buNone/>
-            </a:pPr>
-            <a:r>
-              <a:rPr lang="en-US" sz="1000" dirty="0">
+            <a:off x="502920" y="1508760"/>
+            <a:ext cx="3749040" cy="457200"/>
+          </a:xfrm>
+          <a:prstGeom prst="rect">
+            <a:avLst/>
+          </a:prstGeom>
+          <a:noFill/>
+          <a:ln/>
+        </p:spPr>
+        <p:txBody>
+          <a:bodyPr wrap="square" lIns="0" tIns="0" rIns="0" bIns="0" rtlCol="0" anchor="t"/>
+          <a:lstStyle/>
+          <a:p>
+            <a:pPr indent="0" marL="0">
+              <a:buNone/>
+            </a:pPr>
+            <a:r>
+              <a:rPr lang="en-US" sz="1050" dirty="0">
                 <a:solidFill>
                   <a:srgbClr val="1A1A2E"/>
                 </a:solidFill>
@@ -8774,16 +8863,38 @@
                 <a:ea typeface="Calibri" pitchFamily="34" charset="-122"/>
                 <a:cs typeface="Calibri" pitchFamily="34" charset="-120"/>
               </a:rPr>
-              <a:t>Rule 1B cuma dicek DALAM 1 bulan.</a:t>
-            </a:r>
-            <a:endParaRPr lang="en-US" sz="1000" dirty="0"/>
-          </a:p>
-          <a:p>
-            <a:pPr indent="0" marL="0">
-              <a:buNone/>
-            </a:pPr>
-            <a:r>
-              <a:rPr lang="en-US" sz="1000" dirty="0">
+              <a:t>✓ Header berwarna (hijau / oranye weekend / merah TM / biru CB)</a:t>
+            </a:r>
+            <a:endParaRPr lang="en-US" sz="1050" dirty="0"/>
+          </a:p>
+        </p:txBody>
+      </p:sp>
+      <p:sp>
+        <p:nvSpPr>
+          <p:cNvPr id="7" name="Text 5"/>
+          <p:cNvSpPr/>
+          <p:nvPr/>
+        </p:nvSpPr>
+        <p:spPr>
+          <a:xfrm>
+            <a:off x="502920" y="2011680"/>
+            <a:ext cx="3749040" cy="457200"/>
+          </a:xfrm>
+          <a:prstGeom prst="rect">
+            <a:avLst/>
+          </a:prstGeom>
+          <a:noFill/>
+          <a:ln/>
+        </p:spPr>
+        <p:txBody>
+          <a:bodyPr wrap="square" lIns="0" tIns="0" rIns="0" bIns="0" rtlCol="0" anchor="t"/>
+          <a:lstStyle/>
+          <a:p>
+            <a:pPr indent="0" marL="0">
+              <a:buNone/>
+            </a:pPr>
+            <a:r>
+              <a:rPr lang="en-US" sz="1050" dirty="0">
                 <a:solidFill>
                   <a:srgbClr val="1A1A2E"/>
                 </a:solidFill>
@@ -8791,16 +8902,38 @@
                 <a:ea typeface="Calibri" pitchFamily="34" charset="-122"/>
                 <a:cs typeface="Calibri" pitchFamily="34" charset="-120"/>
               </a:rPr>
-              <a:t>Reset di tgl 1 tanpa cek bulan lalu.</a:t>
-            </a:r>
-            <a:endParaRPr lang="en-US" sz="1000" dirty="0"/>
-          </a:p>
-          <a:p>
-            <a:pPr indent="0" marL="0">
-              <a:buNone/>
-            </a:pPr>
-            <a:r>
-              <a:rPr lang="en-US" sz="1000" dirty="0">
+              <a:t>✓ Cell shift berwarna per jenis: S6 biru, S8 ungu, S9 hijau, S11 oranye, S13 pink</a:t>
+            </a:r>
+            <a:endParaRPr lang="en-US" sz="1050" dirty="0"/>
+          </a:p>
+        </p:txBody>
+      </p:sp>
+      <p:sp>
+        <p:nvSpPr>
+          <p:cNvPr id="8" name="Text 6"/>
+          <p:cNvSpPr/>
+          <p:nvPr/>
+        </p:nvSpPr>
+        <p:spPr>
+          <a:xfrm>
+            <a:off x="502920" y="2514600"/>
+            <a:ext cx="3749040" cy="457200"/>
+          </a:xfrm>
+          <a:prstGeom prst="rect">
+            <a:avLst/>
+          </a:prstGeom>
+          <a:noFill/>
+          <a:ln/>
+        </p:spPr>
+        <p:txBody>
+          <a:bodyPr wrap="square" lIns="0" tIns="0" rIns="0" bIns="0" rtlCol="0" anchor="t"/>
+          <a:lstStyle/>
+          <a:p>
+            <a:pPr indent="0" marL="0">
+              <a:buNone/>
+            </a:pPr>
+            <a:r>
+              <a:rPr lang="en-US" sz="1050" dirty="0">
                 <a:solidFill>
                   <a:srgbClr val="1A1A2E"/>
                 </a:solidFill>
@@ -8808,34 +8941,151 @@
                 <a:ea typeface="Calibri" pitchFamily="34" charset="-122"/>
                 <a:cs typeface="Calibri" pitchFamily="34" charset="-120"/>
               </a:rPr>
-              <a:t>CSO A kerja 5 hari di akhir bulan lalu → tgl 1 baru auto-assign kerja → 6 hari berturut = PELANGGARAN</a:t>
-            </a:r>
-            <a:endParaRPr lang="en-US" sz="1000" dirty="0"/>
-          </a:p>
-        </p:txBody>
-      </p:sp>
-      <p:sp>
-        <p:nvSpPr>
-          <p:cNvPr id="7" name="Shape 5"/>
-          <p:cNvSpPr/>
-          <p:nvPr/>
-        </p:nvSpPr>
-        <p:spPr>
-          <a:xfrm>
-            <a:off x="4572000" y="1005840"/>
-            <a:ext cx="4206240" cy="1645920"/>
+              <a:t>✓ OFF = abu italic · CUTI = kuning bold</a:t>
+            </a:r>
+            <a:endParaRPr lang="en-US" sz="1050" dirty="0"/>
+          </a:p>
+        </p:txBody>
+      </p:sp>
+      <p:sp>
+        <p:nvSpPr>
+          <p:cNvPr id="9" name="Text 7"/>
+          <p:cNvSpPr/>
+          <p:nvPr/>
+        </p:nvSpPr>
+        <p:spPr>
+          <a:xfrm>
+            <a:off x="502920" y="3017520"/>
+            <a:ext cx="3749040" cy="457200"/>
+          </a:xfrm>
+          <a:prstGeom prst="rect">
+            <a:avLst/>
+          </a:prstGeom>
+          <a:noFill/>
+          <a:ln/>
+        </p:spPr>
+        <p:txBody>
+          <a:bodyPr wrap="square" lIns="0" tIns="0" rIns="0" bIns="0" rtlCol="0" anchor="t"/>
+          <a:lstStyle/>
+          <a:p>
+            <a:pPr indent="0" marL="0">
+              <a:buNone/>
+            </a:pPr>
+            <a:r>
+              <a:rPr lang="en-US" sz="1050" dirty="0">
+                <a:solidFill>
+                  <a:srgbClr val="1A1A2E"/>
+                </a:solidFill>
+                <a:latin typeface="Calibri" pitchFamily="34" charset="0"/>
+                <a:ea typeface="Calibri" pitchFamily="34" charset="-122"/>
+                <a:cs typeface="Calibri" pitchFamily="34" charset="-120"/>
+              </a:rPr>
+              <a:t>✓ Border tipis di setiap cell</a:t>
+            </a:r>
+            <a:endParaRPr lang="en-US" sz="1050" dirty="0"/>
+          </a:p>
+        </p:txBody>
+      </p:sp>
+      <p:sp>
+        <p:nvSpPr>
+          <p:cNvPr id="10" name="Text 8"/>
+          <p:cNvSpPr/>
+          <p:nvPr/>
+        </p:nvSpPr>
+        <p:spPr>
+          <a:xfrm>
+            <a:off x="502920" y="3520440"/>
+            <a:ext cx="3749040" cy="457200"/>
+          </a:xfrm>
+          <a:prstGeom prst="rect">
+            <a:avLst/>
+          </a:prstGeom>
+          <a:noFill/>
+          <a:ln/>
+        </p:spPr>
+        <p:txBody>
+          <a:bodyPr wrap="square" lIns="0" tIns="0" rIns="0" bIns="0" rtlCol="0" anchor="t"/>
+          <a:lstStyle/>
+          <a:p>
+            <a:pPr indent="0" marL="0">
+              <a:buNone/>
+            </a:pPr>
+            <a:r>
+              <a:rPr lang="en-US" sz="1050" dirty="0">
+                <a:solidFill>
+                  <a:srgbClr val="1A1A2E"/>
+                </a:solidFill>
+                <a:latin typeface="Calibri" pitchFamily="34" charset="0"/>
+                <a:ea typeface="Calibri" pitchFamily="34" charset="-122"/>
+                <a:cs typeface="Calibri" pitchFamily="34" charset="-120"/>
+              </a:rPr>
+              <a:t>✓ Freeze panes — kolom nama &amp; header tanggal tetap terlihat saat scroll</a:t>
+            </a:r>
+            <a:endParaRPr lang="en-US" sz="1050" dirty="0"/>
+          </a:p>
+        </p:txBody>
+      </p:sp>
+      <p:sp>
+        <p:nvSpPr>
+          <p:cNvPr id="11" name="Text 9"/>
+          <p:cNvSpPr/>
+          <p:nvPr/>
+        </p:nvSpPr>
+        <p:spPr>
+          <a:xfrm>
+            <a:off x="502920" y="4023360"/>
+            <a:ext cx="3749040" cy="457200"/>
+          </a:xfrm>
+          <a:prstGeom prst="rect">
+            <a:avLst/>
+          </a:prstGeom>
+          <a:noFill/>
+          <a:ln/>
+        </p:spPr>
+        <p:txBody>
+          <a:bodyPr wrap="square" lIns="0" tIns="0" rIns="0" bIns="0" rtlCol="0" anchor="t"/>
+          <a:lstStyle/>
+          <a:p>
+            <a:pPr indent="0" marL="0">
+              <a:buNone/>
+            </a:pPr>
+            <a:r>
+              <a:rPr lang="en-US" sz="1050" dirty="0">
+                <a:solidFill>
+                  <a:srgbClr val="1A1A2E"/>
+                </a:solidFill>
+                <a:latin typeface="Calibri" pitchFamily="34" charset="0"/>
+                <a:ea typeface="Calibri" pitchFamily="34" charset="-122"/>
+                <a:cs typeface="Calibri" pitchFamily="34" charset="-120"/>
+              </a:rPr>
+              <a:t>✓ Kolom auto-width (tidak perlu resize manual)</a:t>
+            </a:r>
+            <a:endParaRPr lang="en-US" sz="1050" dirty="0"/>
+          </a:p>
+        </p:txBody>
+      </p:sp>
+      <p:sp>
+        <p:nvSpPr>
+          <p:cNvPr id="12" name="Shape 10"/>
+          <p:cNvSpPr/>
+          <p:nvPr/>
+        </p:nvSpPr>
+        <p:spPr>
+          <a:xfrm>
+            <a:off x="4754880" y="1005840"/>
+            <a:ext cx="4023360" cy="1115568"/>
           </a:xfrm>
           <a:prstGeom prst="roundRect">
             <a:avLst>
-              <a:gd name="adj" fmla="val 4444"/>
+              <a:gd name="adj" fmla="val 6557"/>
             </a:avLst>
           </a:prstGeom>
           <a:solidFill>
-            <a:srgbClr val="DCFCE7"/>
+            <a:srgbClr val="DBEAFE"/>
           </a:solidFill>
           <a:ln w="12700">
             <a:solidFill>
-              <a:srgbClr val="DCFCE7"/>
+              <a:srgbClr val="DBEAFE"/>
             </a:solidFill>
             <a:prstDash val="solid"/>
           </a:ln>
@@ -8850,69 +9100,69 @@
       </p:sp>
       <p:sp>
         <p:nvSpPr>
-          <p:cNvPr id="8" name="Text 6"/>
-          <p:cNvSpPr/>
-          <p:nvPr/>
-        </p:nvSpPr>
-        <p:spPr>
-          <a:xfrm>
-            <a:off x="4709160" y="1078992"/>
-            <a:ext cx="3931920" cy="320040"/>
-          </a:xfrm>
-          <a:prstGeom prst="rect">
-            <a:avLst/>
-          </a:prstGeom>
-          <a:noFill/>
-          <a:ln/>
-        </p:spPr>
-        <p:txBody>
-          <a:bodyPr wrap="square" lIns="0" tIns="0" rIns="0" bIns="0" rtlCol="0" anchor="ctr"/>
-          <a:lstStyle/>
-          <a:p>
-            <a:pPr indent="0" marL="0">
-              <a:buNone/>
-            </a:pPr>
-            <a:r>
-              <a:rPr lang="en-US" sz="1100" b="1" dirty="0">
-                <a:solidFill>
-                  <a:srgbClr val="2D6A4F"/>
-                </a:solidFill>
-                <a:latin typeface="Calibri" pitchFamily="34" charset="0"/>
-                <a:ea typeface="Calibri" pitchFamily="34" charset="-122"/>
-                <a:cs typeface="Calibri" pitchFamily="34" charset="-120"/>
-              </a:rPr>
-              <a:t>SOLUSI (Load Analisis Config):</a:t>
-            </a:r>
-            <a:endParaRPr lang="en-US" sz="1100" dirty="0"/>
-          </a:p>
-        </p:txBody>
-      </p:sp>
-      <p:sp>
-        <p:nvSpPr>
-          <p:cNvPr id="9" name="Text 7"/>
-          <p:cNvSpPr/>
-          <p:nvPr/>
-        </p:nvSpPr>
-        <p:spPr>
-          <a:xfrm>
-            <a:off x="4709160" y="1444752"/>
-            <a:ext cx="3931920" cy="1097280"/>
-          </a:xfrm>
-          <a:prstGeom prst="rect">
-            <a:avLst/>
-          </a:prstGeom>
-          <a:noFill/>
-          <a:ln/>
-        </p:spPr>
-        <p:txBody>
-          <a:bodyPr wrap="square" lIns="0" tIns="0" rIns="0" bIns="0" rtlCol="0" anchor="ctr"/>
-          <a:lstStyle/>
-          <a:p>
-            <a:pPr indent="0" marL="0">
-              <a:buNone/>
-            </a:pPr>
-            <a:r>
-              <a:rPr lang="en-US" sz="1000" dirty="0">
+          <p:cNvPr id="13" name="Text 11"/>
+          <p:cNvSpPr/>
+          <p:nvPr/>
+        </p:nvSpPr>
+        <p:spPr>
+          <a:xfrm>
+            <a:off x="4892040" y="1097280"/>
+            <a:ext cx="3749040" cy="320040"/>
+          </a:xfrm>
+          <a:prstGeom prst="rect">
+            <a:avLst/>
+          </a:prstGeom>
+          <a:noFill/>
+          <a:ln/>
+        </p:spPr>
+        <p:txBody>
+          <a:bodyPr wrap="square" lIns="0" tIns="0" rIns="0" bIns="0" rtlCol="0" anchor="ctr"/>
+          <a:lstStyle/>
+          <a:p>
+            <a:pPr indent="0" marL="0">
+              <a:buNone/>
+            </a:pPr>
+            <a:r>
+              <a:rPr lang="en-US" sz="1200" b="1" dirty="0">
+                <a:solidFill>
+                  <a:srgbClr val="2563EB"/>
+                </a:solidFill>
+                <a:latin typeface="Calibri" pitchFamily="34" charset="0"/>
+                <a:ea typeface="Calibri" pitchFamily="34" charset="-122"/>
+                <a:cs typeface="Calibri" pitchFamily="34" charset="-120"/>
+              </a:rPr>
+              <a:t>Sheet 1: Jadwal</a:t>
+            </a:r>
+            <a:endParaRPr lang="en-US" sz="1200" dirty="0"/>
+          </a:p>
+        </p:txBody>
+      </p:sp>
+      <p:sp>
+        <p:nvSpPr>
+          <p:cNvPr id="14" name="Text 12"/>
+          <p:cNvSpPr/>
+          <p:nvPr/>
+        </p:nvSpPr>
+        <p:spPr>
+          <a:xfrm>
+            <a:off x="4892040" y="1426464"/>
+            <a:ext cx="3749040" cy="621792"/>
+          </a:xfrm>
+          <a:prstGeom prst="rect">
+            <a:avLst/>
+          </a:prstGeom>
+          <a:noFill/>
+          <a:ln/>
+        </p:spPr>
+        <p:txBody>
+          <a:bodyPr wrap="square" lIns="0" tIns="0" rIns="0" bIns="0" rtlCol="0" anchor="t"/>
+          <a:lstStyle/>
+          <a:p>
+            <a:pPr indent="0" marL="0">
+              <a:buNone/>
+            </a:pPr>
+            <a:r>
+              <a:rPr lang="en-US" sz="1050" dirty="0">
                 <a:solidFill>
                   <a:srgbClr val="1A1A2E"/>
                 </a:solidFill>
@@ -8920,68 +9170,34 @@
                 <a:ea typeface="Calibri" pitchFamily="34" charset="-122"/>
                 <a:cs typeface="Calibri" pitchFamily="34" charset="-120"/>
               </a:rPr>
-              <a:t>Upload JSON bulan lalu → sistem hitung carry-over streak tiap CSO dari ujung bulan.</a:t>
-            </a:r>
-            <a:endParaRPr lang="en-US" sz="1000" dirty="0"/>
-          </a:p>
-          <a:p>
-            <a:pPr indent="0" marL="0">
-              <a:buNone/>
-            </a:pPr>
-            <a:r>
-              <a:rPr lang="en-US" sz="1000" dirty="0">
-                <a:solidFill>
-                  <a:srgbClr val="1A1A2E"/>
-                </a:solidFill>
-                <a:latin typeface="Calibri" pitchFamily="34" charset="0"/>
-                <a:ea typeface="Calibri" pitchFamily="34" charset="-122"/>
-                <a:cs typeface="Calibri" pitchFamily="34" charset="-120"/>
-              </a:rPr>
-              <a:t>Jika streak = 5 → tgl 1 wajib OFF.</a:t>
-            </a:r>
-            <a:endParaRPr lang="en-US" sz="1000" dirty="0"/>
-          </a:p>
-          <a:p>
-            <a:pPr indent="0" marL="0">
-              <a:buNone/>
-            </a:pPr>
-            <a:r>
-              <a:rPr lang="en-US" sz="1000" dirty="0">
-                <a:solidFill>
-                  <a:srgbClr val="1A1A2E"/>
-                </a:solidFill>
-                <a:latin typeface="Calibri" pitchFamily="34" charset="0"/>
-                <a:ea typeface="Calibri" pitchFamily="34" charset="-122"/>
-                <a:cs typeface="Calibri" pitchFamily="34" charset="-120"/>
-              </a:rPr>
-              <a:t>Jika streak &lt; 5 → boleh kerja tgl 1.</a:t>
-            </a:r>
-            <a:endParaRPr lang="en-US" sz="1000" dirty="0"/>
-          </a:p>
-        </p:txBody>
-      </p:sp>
-      <p:sp>
-        <p:nvSpPr>
-          <p:cNvPr id="10" name="Shape 8"/>
-          <p:cNvSpPr/>
-          <p:nvPr/>
-        </p:nvSpPr>
-        <p:spPr>
-          <a:xfrm>
-            <a:off x="365760" y="2834640"/>
-            <a:ext cx="8412480" cy="1417320"/>
+              <a:t>Per CSO × tanggal. Freeze 4 kolom + 2 baris header. Total Kerja/OFF/CUTI di kanan.</a:t>
+            </a:r>
+            <a:endParaRPr lang="en-US" sz="1050" dirty="0"/>
+          </a:p>
+        </p:txBody>
+      </p:sp>
+      <p:sp>
+        <p:nvSpPr>
+          <p:cNvPr id="15" name="Shape 13"/>
+          <p:cNvSpPr/>
+          <p:nvPr/>
+        </p:nvSpPr>
+        <p:spPr>
+          <a:xfrm>
+            <a:off x="4754880" y="2258568"/>
+            <a:ext cx="4023360" cy="1115568"/>
           </a:xfrm>
           <a:prstGeom prst="roundRect">
             <a:avLst>
-              <a:gd name="adj" fmla="val 5161"/>
+              <a:gd name="adj" fmla="val 6557"/>
             </a:avLst>
           </a:prstGeom>
           <a:solidFill>
-            <a:srgbClr val="FEF9C3"/>
+            <a:srgbClr val="CCFBF1"/>
           </a:solidFill>
           <a:ln w="12700">
             <a:solidFill>
-              <a:srgbClr val="FEF9C3"/>
+              <a:srgbClr val="CCFBF1"/>
             </a:solidFill>
             <a:prstDash val="solid"/>
           </a:ln>
@@ -8996,62 +9212,62 @@
       </p:sp>
       <p:sp>
         <p:nvSpPr>
-          <p:cNvPr id="11" name="Text 9"/>
-          <p:cNvSpPr/>
-          <p:nvPr/>
-        </p:nvSpPr>
-        <p:spPr>
-          <a:xfrm>
-            <a:off x="502920" y="2907792"/>
-            <a:ext cx="8046720" cy="320040"/>
-          </a:xfrm>
-          <a:prstGeom prst="rect">
-            <a:avLst/>
-          </a:prstGeom>
-          <a:noFill/>
-          <a:ln/>
-        </p:spPr>
-        <p:txBody>
-          <a:bodyPr wrap="square" lIns="0" tIns="0" rIns="0" bIns="0" rtlCol="0" anchor="ctr"/>
-          <a:lstStyle/>
-          <a:p>
-            <a:pPr indent="0" marL="0">
-              <a:buNone/>
-            </a:pPr>
-            <a:r>
-              <a:rPr lang="en-US" sz="1100" b="1" dirty="0">
-                <a:solidFill>
-                  <a:srgbClr val="CA8A04"/>
-                </a:solidFill>
-                <a:latin typeface="Calibri" pitchFamily="34" charset="0"/>
-                <a:ea typeface="Calibri" pitchFamily="34" charset="-122"/>
-                <a:cs typeface="Calibri" pitchFamily="34" charset="-120"/>
-              </a:rPr>
-              <a:t>Potensi Violations yang Terdeteksi Lintas Bulan:</a:t>
-            </a:r>
-            <a:endParaRPr lang="en-US" sz="1100" dirty="0"/>
-          </a:p>
-        </p:txBody>
-      </p:sp>
-      <p:sp>
-        <p:nvSpPr>
-          <p:cNvPr id="12" name="Text 10"/>
-          <p:cNvSpPr/>
-          <p:nvPr/>
-        </p:nvSpPr>
-        <p:spPr>
-          <a:xfrm>
-            <a:off x="502920" y="3273552"/>
-            <a:ext cx="8046720" cy="274320"/>
-          </a:xfrm>
-          <a:prstGeom prst="rect">
-            <a:avLst/>
-          </a:prstGeom>
-          <a:noFill/>
-          <a:ln/>
-        </p:spPr>
-        <p:txBody>
-          <a:bodyPr wrap="square" lIns="0" tIns="0" rIns="0" bIns="0" rtlCol="0" anchor="ctr"/>
+          <p:cNvPr id="16" name="Text 14"/>
+          <p:cNvSpPr/>
+          <p:nvPr/>
+        </p:nvSpPr>
+        <p:spPr>
+          <a:xfrm>
+            <a:off x="4892040" y="2350008"/>
+            <a:ext cx="3749040" cy="320040"/>
+          </a:xfrm>
+          <a:prstGeom prst="rect">
+            <a:avLst/>
+          </a:prstGeom>
+          <a:noFill/>
+          <a:ln/>
+        </p:spPr>
+        <p:txBody>
+          <a:bodyPr wrap="square" lIns="0" tIns="0" rIns="0" bIns="0" rtlCol="0" anchor="ctr"/>
+          <a:lstStyle/>
+          <a:p>
+            <a:pPr indent="0" marL="0">
+              <a:buNone/>
+            </a:pPr>
+            <a:r>
+              <a:rPr lang="en-US" sz="1200" b="1" dirty="0">
+                <a:solidFill>
+                  <a:srgbClr val="0D9488"/>
+                </a:solidFill>
+                <a:latin typeface="Calibri" pitchFamily="34" charset="0"/>
+                <a:ea typeface="Calibri" pitchFamily="34" charset="-122"/>
+                <a:cs typeface="Calibri" pitchFamily="34" charset="-120"/>
+              </a:rPr>
+              <a:t>Sheet 2: Shift Report</a:t>
+            </a:r>
+            <a:endParaRPr lang="en-US" sz="1200" dirty="0"/>
+          </a:p>
+        </p:txBody>
+      </p:sp>
+      <p:sp>
+        <p:nvSpPr>
+          <p:cNvPr id="17" name="Text 15"/>
+          <p:cNvSpPr/>
+          <p:nvPr/>
+        </p:nvSpPr>
+        <p:spPr>
+          <a:xfrm>
+            <a:off x="4892040" y="2679192"/>
+            <a:ext cx="3749040" cy="621792"/>
+          </a:xfrm>
+          <a:prstGeom prst="rect">
+            <a:avLst/>
+          </a:prstGeom>
+          <a:noFill/>
+          <a:ln/>
+        </p:spPr>
+        <p:txBody>
+          <a:bodyPr wrap="square" lIns="0" tIns="0" rIns="0" bIns="0" rtlCol="0" anchor="t"/>
           <a:lstStyle/>
           <a:p>
             <a:pPr indent="0" marL="0">
@@ -9066,7 +9282,7 @@
                 <a:ea typeface="Calibri" pitchFamily="34" charset="-122"/>
                 <a:cs typeface="Calibri" pitchFamily="34" charset="-120"/>
               </a:rPr>
-              <a:t>⚠ 5+ hari kerja berturut (R1B) — carry-over + tgl 1 baru</a:t>
+              <a:t>Rekap S6/S8/S9/S11/S13 per tanggal. Baris weekend/TM/CB di-highlight.</a:t>
             </a:r>
             <a:endParaRPr lang="en-US" sz="1050" dirty="0"/>
           </a:p>
@@ -9074,104 +9290,26 @@
       </p:sp>
       <p:sp>
         <p:nvSpPr>
-          <p:cNvPr id="13" name="Text 11"/>
-          <p:cNvSpPr/>
-          <p:nvPr/>
-        </p:nvSpPr>
-        <p:spPr>
-          <a:xfrm>
-            <a:off x="502920" y="3566160"/>
-            <a:ext cx="8046720" cy="274320"/>
-          </a:xfrm>
-          <a:prstGeom prst="rect">
-            <a:avLst/>
-          </a:prstGeom>
-          <a:noFill/>
-          <a:ln/>
-        </p:spPr>
-        <p:txBody>
-          <a:bodyPr wrap="square" lIns="0" tIns="0" rIns="0" bIns="0" rtlCol="0" anchor="ctr"/>
-          <a:lstStyle/>
-          <a:p>
-            <a:pPr indent="0" marL="0">
-              <a:buNone/>
-            </a:pPr>
-            <a:r>
-              <a:rPr lang="en-US" sz="1050" dirty="0">
-                <a:solidFill>
-                  <a:srgbClr val="1A1A2E"/>
-                </a:solidFill>
-                <a:latin typeface="Calibri" pitchFamily="34" charset="0"/>
-                <a:ea typeface="Calibri" pitchFamily="34" charset="-122"/>
-                <a:cs typeface="Calibri" pitchFamily="34" charset="-120"/>
-              </a:rPr>
-              <a:t>⚠ 3+ OFF berturut (R3) — ujung bulan lalu + awal bulan baru</a:t>
-            </a:r>
-            <a:endParaRPr lang="en-US" sz="1050" dirty="0"/>
-          </a:p>
-        </p:txBody>
-      </p:sp>
-      <p:sp>
-        <p:nvSpPr>
-          <p:cNvPr id="14" name="Text 12"/>
-          <p:cNvSpPr/>
-          <p:nvPr/>
-        </p:nvSpPr>
-        <p:spPr>
-          <a:xfrm>
-            <a:off x="502920" y="3858768"/>
-            <a:ext cx="8046720" cy="274320"/>
-          </a:xfrm>
-          <a:prstGeom prst="rect">
-            <a:avLst/>
-          </a:prstGeom>
-          <a:noFill/>
-          <a:ln/>
-        </p:spPr>
-        <p:txBody>
-          <a:bodyPr wrap="square" lIns="0" tIns="0" rIns="0" bIns="0" rtlCol="0" anchor="ctr"/>
-          <a:lstStyle/>
-          <a:p>
-            <a:pPr indent="0" marL="0">
-              <a:buNone/>
-            </a:pPr>
-            <a:r>
-              <a:rPr lang="en-US" sz="1050" dirty="0">
-                <a:solidFill>
-                  <a:srgbClr val="1A1A2E"/>
-                </a:solidFill>
-                <a:latin typeface="Calibri" pitchFamily="34" charset="0"/>
-                <a:ea typeface="Calibri" pitchFamily="34" charset="-122"/>
-                <a:cs typeface="Calibri" pitchFamily="34" charset="-120"/>
-              </a:rPr>
-              <a:t>⚠ Violations bulan lalu — ditampilkan untuk referensi operator</a:t>
-            </a:r>
-            <a:endParaRPr lang="en-US" sz="1050" dirty="0"/>
-          </a:p>
-        </p:txBody>
-      </p:sp>
-      <p:sp>
-        <p:nvSpPr>
-          <p:cNvPr id="15" name="Shape 13"/>
-          <p:cNvSpPr/>
-          <p:nvPr/>
-        </p:nvSpPr>
-        <p:spPr>
-          <a:xfrm>
-            <a:off x="365760" y="4389120"/>
-            <a:ext cx="8412480" cy="658368"/>
+          <p:cNvPr id="18" name="Shape 16"/>
+          <p:cNvSpPr/>
+          <p:nvPr/>
+        </p:nvSpPr>
+        <p:spPr>
+          <a:xfrm>
+            <a:off x="4754880" y="3511296"/>
+            <a:ext cx="4023360" cy="1115568"/>
           </a:xfrm>
           <a:prstGeom prst="roundRect">
             <a:avLst>
-              <a:gd name="adj" fmla="val 11111"/>
+              <a:gd name="adj" fmla="val 6557"/>
             </a:avLst>
           </a:prstGeom>
           <a:solidFill>
-            <a:srgbClr val="1B4332"/>
+            <a:srgbClr val="FED7AA"/>
           </a:solidFill>
           <a:ln w="12700">
             <a:solidFill>
-              <a:srgbClr val="1B4332"/>
+              <a:srgbClr val="FED7AA"/>
             </a:solidFill>
             <a:prstDash val="solid"/>
           </a:ln>
@@ -9186,23 +9324,62 @@
       </p:sp>
       <p:sp>
         <p:nvSpPr>
-          <p:cNvPr id="16" name="Text 14"/>
-          <p:cNvSpPr/>
-          <p:nvPr/>
-        </p:nvSpPr>
-        <p:spPr>
-          <a:xfrm>
-            <a:off x="502920" y="4407408"/>
-            <a:ext cx="8138160" cy="603504"/>
-          </a:xfrm>
-          <a:prstGeom prst="rect">
-            <a:avLst/>
-          </a:prstGeom>
-          <a:noFill/>
-          <a:ln/>
-        </p:spPr>
-        <p:txBody>
-          <a:bodyPr wrap="square" lIns="0" tIns="0" rIns="0" bIns="0" rtlCol="0" anchor="ctr"/>
+          <p:cNvPr id="19" name="Text 17"/>
+          <p:cNvSpPr/>
+          <p:nvPr/>
+        </p:nvSpPr>
+        <p:spPr>
+          <a:xfrm>
+            <a:off x="4892040" y="3602736"/>
+            <a:ext cx="3749040" cy="320040"/>
+          </a:xfrm>
+          <a:prstGeom prst="rect">
+            <a:avLst/>
+          </a:prstGeom>
+          <a:noFill/>
+          <a:ln/>
+        </p:spPr>
+        <p:txBody>
+          <a:bodyPr wrap="square" lIns="0" tIns="0" rIns="0" bIns="0" rtlCol="0" anchor="ctr"/>
+          <a:lstStyle/>
+          <a:p>
+            <a:pPr indent="0" marL="0">
+              <a:buNone/>
+            </a:pPr>
+            <a:r>
+              <a:rPr lang="en-US" sz="1200" b="1" dirty="0">
+                <a:solidFill>
+                  <a:srgbClr val="EA580C"/>
+                </a:solidFill>
+                <a:latin typeface="Calibri" pitchFamily="34" charset="0"/>
+                <a:ea typeface="Calibri" pitchFamily="34" charset="-122"/>
+                <a:cs typeface="Calibri" pitchFamily="34" charset="-120"/>
+              </a:rPr>
+              <a:t>Sheet 3: Istirahat</a:t>
+            </a:r>
+            <a:endParaRPr lang="en-US" sz="1200" dirty="0"/>
+          </a:p>
+        </p:txBody>
+      </p:sp>
+      <p:sp>
+        <p:nvSpPr>
+          <p:cNvPr id="20" name="Text 18"/>
+          <p:cNvSpPr/>
+          <p:nvPr/>
+        </p:nvSpPr>
+        <p:spPr>
+          <a:xfrm>
+            <a:off x="4892040" y="3931920"/>
+            <a:ext cx="3749040" cy="621792"/>
+          </a:xfrm>
+          <a:prstGeom prst="rect">
+            <a:avLst/>
+          </a:prstGeom>
+          <a:noFill/>
+          <a:ln/>
+        </p:spPr>
+        <p:txBody>
+          <a:bodyPr wrap="square" lIns="0" tIns="0" rIns="0" bIns="0" rtlCol="0" anchor="t"/>
           <a:lstStyle/>
           <a:p>
             <a:pPr indent="0" marL="0">
@@ -9211,15 +9388,88 @@
             <a:r>
               <a:rPr lang="en-US" sz="1050" dirty="0">
                 <a:solidFill>
-                  <a:srgbClr val="D1FAE5"/>
-                </a:solidFill>
-                <a:latin typeface="Calibri" pitchFamily="34" charset="0"/>
-                <a:ea typeface="Calibri" pitchFamily="34" charset="-122"/>
-                <a:cs typeface="Calibri" pitchFamily="34" charset="-120"/>
-              </a:rPr>
-              <a:t>FLOW: Upload JSON lama → Analisa panel muncul di Step 1 → CSO list di-load → Operator adjust → Generate bulan baru dengan constraint carry-over</a:t>
+                  <a:srgbClr val="1A1A2E"/>
+                </a:solidFill>
+                <a:latin typeface="Calibri" pitchFamily="34" charset="0"/>
+                <a:ea typeface="Calibri" pitchFamily="34" charset="-122"/>
+                <a:cs typeface="Calibri" pitchFamily="34" charset="-120"/>
+              </a:rPr>
+              <a:t>Jam istirahat per CSO × tanggal. Style sama dengan Sheet 1.</a:t>
             </a:r>
             <a:endParaRPr lang="en-US" sz="1050" dirty="0"/>
+          </a:p>
+        </p:txBody>
+      </p:sp>
+      <p:sp>
+        <p:nvSpPr>
+          <p:cNvPr id="21" name="Shape 19"/>
+          <p:cNvSpPr/>
+          <p:nvPr/>
+        </p:nvSpPr>
+        <p:spPr>
+          <a:xfrm>
+            <a:off x="365760" y="4773168"/>
+            <a:ext cx="8412480" cy="256032"/>
+          </a:xfrm>
+          <a:prstGeom prst="roundRect">
+            <a:avLst>
+              <a:gd name="adj" fmla="val 28571"/>
+            </a:avLst>
+          </a:prstGeom>
+          <a:solidFill>
+            <a:srgbClr val="2D6A4F"/>
+          </a:solidFill>
+          <a:ln w="12700">
+            <a:solidFill>
+              <a:srgbClr val="2D6A4F"/>
+            </a:solidFill>
+            <a:prstDash val="solid"/>
+          </a:ln>
+          <a:effectLst>
+            <a:outerShdw sx="100000" sy="100000" kx="0" ky="0" algn="bl" rotWithShape="0" blurRad="101600" dist="38100" dir="2700000">
+              <a:srgbClr val="000000">
+                <a:alpha val="12000"/>
+              </a:srgbClr>
+            </a:outerShdw>
+          </a:effectLst>
+        </p:spPr>
+      </p:sp>
+      <p:sp>
+        <p:nvSpPr>
+          <p:cNvPr id="22" name="Text 20"/>
+          <p:cNvSpPr/>
+          <p:nvPr/>
+        </p:nvSpPr>
+        <p:spPr>
+          <a:xfrm>
+            <a:off x="502920" y="4773168"/>
+            <a:ext cx="8229600" cy="256032"/>
+          </a:xfrm>
+          <a:prstGeom prst="rect">
+            <a:avLst/>
+          </a:prstGeom>
+          <a:noFill/>
+          <a:ln/>
+        </p:spPr>
+        <p:txBody>
+          <a:bodyPr wrap="square" lIns="0" tIns="0" rIns="0" bIns="0" rtlCol="0" anchor="ctr"/>
+          <a:lstStyle/>
+          <a:p>
+            <a:pPr indent="0" marL="0">
+              <a:buNone/>
+            </a:pPr>
+            <a:r>
+              <a:rPr lang="en-US" sz="950" i="1" dirty="0">
+                <a:solidFill>
+                  <a:srgbClr val="FFFFFF"/>
+                </a:solidFill>
+                <a:latin typeface="Calibri" pitchFamily="34" charset="0"/>
+                <a:ea typeface="Calibri" pitchFamily="34" charset="-122"/>
+                <a:cs typeface="Calibri" pitchFamily="34" charset="-120"/>
+              </a:rPr>
+              <a:t>Tech: xlsx-js-style (SheetJS fork) via CDN — tetap 1 file HTML, no backend</a:t>
+            </a:r>
+            <a:endParaRPr lang="en-US" sz="950" dirty="0"/>
           </a:p>
         </p:txBody>
       </p:sp>
@@ -9288,7 +9538,7 @@
                 <a:ea typeface="Cambria" pitchFamily="34" charset="-122"/>
                 <a:cs typeface="Cambria" pitchFamily="34" charset="-120"/>
               </a:rPr>
-              <a:t>Technology Stack</a:t>
+              <a:t>Cross-Month Carry-Over Analysis (NEW v6)</a:t>
             </a:r>
             <a:endParaRPr lang="en-US" sz="3000" dirty="0"/>
           </a:p>
@@ -9326,19 +9576,19 @@
         <p:spPr>
           <a:xfrm>
             <a:off x="365760" y="1005840"/>
-            <a:ext cx="2651760" cy="3703320"/>
+            <a:ext cx="4023360" cy="1645920"/>
           </a:xfrm>
           <a:prstGeom prst="roundRect">
             <a:avLst>
-              <a:gd name="adj" fmla="val 2759"/>
+              <a:gd name="adj" fmla="val 4444"/>
             </a:avLst>
           </a:prstGeom>
           <a:solidFill>
-            <a:srgbClr val="DBEAFE"/>
+            <a:srgbClr val="FEE2E2"/>
           </a:solidFill>
           <a:ln w="12700">
             <a:solidFill>
-              <a:srgbClr val="DBEAFE"/>
+              <a:srgbClr val="FEE2E2"/>
             </a:solidFill>
             <a:prstDash val="solid"/>
           </a:ln>
@@ -9359,8 +9609,8 @@
         </p:nvSpPr>
         <p:spPr>
           <a:xfrm>
-            <a:off x="475488" y="1078992"/>
-            <a:ext cx="2432304" cy="347472"/>
+            <a:off x="502920" y="1078992"/>
+            <a:ext cx="3749040" cy="320040"/>
           </a:xfrm>
           <a:prstGeom prst="rect">
             <a:avLst/>
@@ -9378,13 +9628,13 @@
             <a:r>
               <a:rPr lang="en-US" sz="1100" b="1" dirty="0">
                 <a:solidFill>
-                  <a:srgbClr val="2563EB"/>
-                </a:solidFill>
-                <a:latin typeface="Calibri" pitchFamily="34" charset="0"/>
-                <a:ea typeface="Calibri" pitchFamily="34" charset="-122"/>
-                <a:cs typeface="Calibri" pitchFamily="34" charset="-120"/>
-              </a:rPr>
-              <a:t>ARCHITECTURE</a:t>
+                  <a:srgbClr val="DC2626"/>
+                </a:solidFill>
+                <a:latin typeface="Calibri" pitchFamily="34" charset="0"/>
+                <a:ea typeface="Calibri" pitchFamily="34" charset="-122"/>
+                <a:cs typeface="Calibri" pitchFamily="34" charset="-120"/>
+              </a:rPr>
+              <a:t>MASALAH yang Selama Ini Ada:</a:t>
             </a:r>
             <a:endParaRPr lang="en-US" sz="1100" dirty="0"/>
           </a:p>
@@ -9398,24 +9648,24 @@
         </p:nvSpPr>
         <p:spPr>
           <a:xfrm>
-            <a:off x="502920" y="1508760"/>
-            <a:ext cx="2395728" cy="594360"/>
-          </a:xfrm>
-          <a:prstGeom prst="rect">
-            <a:avLst/>
-          </a:prstGeom>
-          <a:noFill/>
-          <a:ln/>
-        </p:spPr>
-        <p:txBody>
-          <a:bodyPr wrap="square" lIns="0" tIns="0" rIns="0" bIns="0" rtlCol="0" anchor="ctr"/>
-          <a:lstStyle/>
-          <a:p>
-            <a:pPr indent="0" marL="0">
-              <a:buNone/>
-            </a:pPr>
-            <a:r>
-              <a:rPr lang="en-US" sz="1050" dirty="0">
+            <a:off x="502920" y="1444752"/>
+            <a:ext cx="3749040" cy="1097280"/>
+          </a:xfrm>
+          <a:prstGeom prst="rect">
+            <a:avLst/>
+          </a:prstGeom>
+          <a:noFill/>
+          <a:ln/>
+        </p:spPr>
+        <p:txBody>
+          <a:bodyPr wrap="square" lIns="0" tIns="0" rIns="0" bIns="0" rtlCol="0" anchor="ctr"/>
+          <a:lstStyle/>
+          <a:p>
+            <a:pPr indent="0" marL="0">
+              <a:buNone/>
+            </a:pPr>
+            <a:r>
+              <a:rPr lang="en-US" sz="1000" dirty="0">
                 <a:solidFill>
                   <a:srgbClr val="1A1A2E"/>
                 </a:solidFill>
@@ -9423,38 +9673,16 @@
                 <a:ea typeface="Calibri" pitchFamily="34" charset="-122"/>
                 <a:cs typeface="Calibri" pitchFamily="34" charset="-120"/>
               </a:rPr>
-              <a:t>• UI Layer: HTML5 + CSS3 (custom design)</a:t>
-            </a:r>
-            <a:endParaRPr lang="en-US" sz="1050" dirty="0"/>
-          </a:p>
-        </p:txBody>
-      </p:sp>
-      <p:sp>
-        <p:nvSpPr>
-          <p:cNvPr id="7" name="Text 5"/>
-          <p:cNvSpPr/>
-          <p:nvPr/>
-        </p:nvSpPr>
-        <p:spPr>
-          <a:xfrm>
-            <a:off x="502920" y="2167128"/>
-            <a:ext cx="2395728" cy="594360"/>
-          </a:xfrm>
-          <a:prstGeom prst="rect">
-            <a:avLst/>
-          </a:prstGeom>
-          <a:noFill/>
-          <a:ln/>
-        </p:spPr>
-        <p:txBody>
-          <a:bodyPr wrap="square" lIns="0" tIns="0" rIns="0" bIns="0" rtlCol="0" anchor="ctr"/>
-          <a:lstStyle/>
-          <a:p>
-            <a:pPr indent="0" marL="0">
-              <a:buNone/>
-            </a:pPr>
-            <a:r>
-              <a:rPr lang="en-US" sz="1050" dirty="0">
+              <a:t>Rule 1B cuma dicek DALAM 1 bulan.</a:t>
+            </a:r>
+            <a:endParaRPr lang="en-US" sz="1000" dirty="0"/>
+          </a:p>
+          <a:p>
+            <a:pPr indent="0" marL="0">
+              <a:buNone/>
+            </a:pPr>
+            <a:r>
+              <a:rPr lang="en-US" sz="1000" dirty="0">
                 <a:solidFill>
                   <a:srgbClr val="1A1A2E"/>
                 </a:solidFill>
@@ -9462,38 +9690,16 @@
                 <a:ea typeface="Calibri" pitchFamily="34" charset="-122"/>
                 <a:cs typeface="Calibri" pitchFamily="34" charset="-120"/>
               </a:rPr>
-              <a:t>• Algorithm: Vanilla JavaScript (ES6+)</a:t>
-            </a:r>
-            <a:endParaRPr lang="en-US" sz="1050" dirty="0"/>
-          </a:p>
-        </p:txBody>
-      </p:sp>
-      <p:sp>
-        <p:nvSpPr>
-          <p:cNvPr id="8" name="Text 6"/>
-          <p:cNvSpPr/>
-          <p:nvPr/>
-        </p:nvSpPr>
-        <p:spPr>
-          <a:xfrm>
-            <a:off x="502920" y="2825496"/>
-            <a:ext cx="2395728" cy="594360"/>
-          </a:xfrm>
-          <a:prstGeom prst="rect">
-            <a:avLst/>
-          </a:prstGeom>
-          <a:noFill/>
-          <a:ln/>
-        </p:spPr>
-        <p:txBody>
-          <a:bodyPr wrap="square" lIns="0" tIns="0" rIns="0" bIns="0" rtlCol="0" anchor="ctr"/>
-          <a:lstStyle/>
-          <a:p>
-            <a:pPr indent="0" marL="0">
-              <a:buNone/>
-            </a:pPr>
-            <a:r>
-              <a:rPr lang="en-US" sz="1050" dirty="0">
+              <a:t>Reset di tgl 1 tanpa cek bulan lalu.</a:t>
+            </a:r>
+            <a:endParaRPr lang="en-US" sz="1000" dirty="0"/>
+          </a:p>
+          <a:p>
+            <a:pPr indent="0" marL="0">
+              <a:buNone/>
+            </a:pPr>
+            <a:r>
+              <a:rPr lang="en-US" sz="1000" dirty="0">
                 <a:solidFill>
                   <a:srgbClr val="1A1A2E"/>
                 </a:solidFill>
@@ -9501,73 +9707,34 @@
                 <a:ea typeface="Calibri" pitchFamily="34" charset="-122"/>
                 <a:cs typeface="Calibri" pitchFamily="34" charset="-120"/>
               </a:rPr>
-              <a:t>• Data I/O: JSON config + CSV export</a:t>
-            </a:r>
-            <a:endParaRPr lang="en-US" sz="1050" dirty="0"/>
-          </a:p>
-        </p:txBody>
-      </p:sp>
-      <p:sp>
-        <p:nvSpPr>
-          <p:cNvPr id="9" name="Text 7"/>
-          <p:cNvSpPr/>
-          <p:nvPr/>
-        </p:nvSpPr>
-        <p:spPr>
-          <a:xfrm>
-            <a:off x="502920" y="3483864"/>
-            <a:ext cx="2395728" cy="594360"/>
-          </a:xfrm>
-          <a:prstGeom prst="rect">
-            <a:avLst/>
-          </a:prstGeom>
-          <a:noFill/>
-          <a:ln/>
-        </p:spPr>
-        <p:txBody>
-          <a:bodyPr wrap="square" lIns="0" tIns="0" rIns="0" bIns="0" rtlCol="0" anchor="ctr"/>
-          <a:lstStyle/>
-          <a:p>
-            <a:pPr indent="0" marL="0">
-              <a:buNone/>
-            </a:pPr>
-            <a:r>
-              <a:rPr lang="en-US" sz="1050" dirty="0">
-                <a:solidFill>
-                  <a:srgbClr val="1A1A2E"/>
-                </a:solidFill>
-                <a:latin typeface="Calibri" pitchFamily="34" charset="0"/>
-                <a:ea typeface="Calibri" pitchFamily="34" charset="-122"/>
-                <a:cs typeface="Calibri" pitchFamily="34" charset="-120"/>
-              </a:rPr>
-              <a:t>• Excel: SheetJS (import/export)</a:t>
-            </a:r>
-            <a:endParaRPr lang="en-US" sz="1050" dirty="0"/>
-          </a:p>
-        </p:txBody>
-      </p:sp>
-      <p:sp>
-        <p:nvSpPr>
-          <p:cNvPr id="10" name="Shape 8"/>
-          <p:cNvSpPr/>
-          <p:nvPr/>
-        </p:nvSpPr>
-        <p:spPr>
-          <a:xfrm>
-            <a:off x="3227832" y="1005840"/>
-            <a:ext cx="2651760" cy="3703320"/>
+              <a:t>CSO A kerja 5 hari di akhir bulan lalu → tgl 1 baru auto-assign kerja → 6 hari berturut = PELANGGARAN</a:t>
+            </a:r>
+            <a:endParaRPr lang="en-US" sz="1000" dirty="0"/>
+          </a:p>
+        </p:txBody>
+      </p:sp>
+      <p:sp>
+        <p:nvSpPr>
+          <p:cNvPr id="7" name="Shape 5"/>
+          <p:cNvSpPr/>
+          <p:nvPr/>
+        </p:nvSpPr>
+        <p:spPr>
+          <a:xfrm>
+            <a:off x="4572000" y="1005840"/>
+            <a:ext cx="4206240" cy="1645920"/>
           </a:xfrm>
           <a:prstGeom prst="roundRect">
             <a:avLst>
-              <a:gd name="adj" fmla="val 2759"/>
+              <a:gd name="adj" fmla="val 4444"/>
             </a:avLst>
           </a:prstGeom>
           <a:solidFill>
-            <a:srgbClr val="40916C"/>
+            <a:srgbClr val="DCFCE7"/>
           </a:solidFill>
           <a:ln w="12700">
             <a:solidFill>
-              <a:srgbClr val="40916C"/>
+              <a:srgbClr val="DCFCE7"/>
             </a:solidFill>
             <a:prstDash val="solid"/>
           </a:ln>
@@ -9582,14 +9749,14 @@
       </p:sp>
       <p:sp>
         <p:nvSpPr>
-          <p:cNvPr id="11" name="Text 9"/>
-          <p:cNvSpPr/>
-          <p:nvPr/>
-        </p:nvSpPr>
-        <p:spPr>
-          <a:xfrm>
-            <a:off x="3337560" y="1078992"/>
-            <a:ext cx="2432304" cy="347472"/>
+          <p:cNvPr id="8" name="Text 6"/>
+          <p:cNvSpPr/>
+          <p:nvPr/>
+        </p:nvSpPr>
+        <p:spPr>
+          <a:xfrm>
+            <a:off x="4709160" y="1078992"/>
+            <a:ext cx="3931920" cy="320040"/>
           </a:xfrm>
           <a:prstGeom prst="rect">
             <a:avLst/>
@@ -9607,13 +9774,13 @@
             <a:r>
               <a:rPr lang="en-US" sz="1100" b="1" dirty="0">
                 <a:solidFill>
-                  <a:srgbClr val="1B4332"/>
-                </a:solidFill>
-                <a:latin typeface="Calibri" pitchFamily="34" charset="0"/>
-                <a:ea typeface="Calibri" pitchFamily="34" charset="-122"/>
-                <a:cs typeface="Calibri" pitchFamily="34" charset="-120"/>
-              </a:rPr>
-              <a:t>DEPLOYMENT</a:t>
+                  <a:srgbClr val="2D6A4F"/>
+                </a:solidFill>
+                <a:latin typeface="Calibri" pitchFamily="34" charset="0"/>
+                <a:ea typeface="Calibri" pitchFamily="34" charset="-122"/>
+                <a:cs typeface="Calibri" pitchFamily="34" charset="-120"/>
+              </a:rPr>
+              <a:t>SOLUSI (Load Analisis Config):</a:t>
             </a:r>
             <a:endParaRPr lang="en-US" sz="1100" dirty="0"/>
           </a:p>
@@ -9621,30 +9788,30 @@
       </p:sp>
       <p:sp>
         <p:nvSpPr>
-          <p:cNvPr id="12" name="Text 10"/>
-          <p:cNvSpPr/>
-          <p:nvPr/>
-        </p:nvSpPr>
-        <p:spPr>
-          <a:xfrm>
-            <a:off x="3364992" y="1508760"/>
-            <a:ext cx="2395728" cy="594360"/>
-          </a:xfrm>
-          <a:prstGeom prst="rect">
-            <a:avLst/>
-          </a:prstGeom>
-          <a:noFill/>
-          <a:ln/>
-        </p:spPr>
-        <p:txBody>
-          <a:bodyPr wrap="square" lIns="0" tIns="0" rIns="0" bIns="0" rtlCol="0" anchor="ctr"/>
-          <a:lstStyle/>
-          <a:p>
-            <a:pPr indent="0" marL="0">
-              <a:buNone/>
-            </a:pPr>
-            <a:r>
-              <a:rPr lang="en-US" sz="1050" dirty="0">
+          <p:cNvPr id="9" name="Text 7"/>
+          <p:cNvSpPr/>
+          <p:nvPr/>
+        </p:nvSpPr>
+        <p:spPr>
+          <a:xfrm>
+            <a:off x="4709160" y="1444752"/>
+            <a:ext cx="3931920" cy="1097280"/>
+          </a:xfrm>
+          <a:prstGeom prst="rect">
+            <a:avLst/>
+          </a:prstGeom>
+          <a:noFill/>
+          <a:ln/>
+        </p:spPr>
+        <p:txBody>
+          <a:bodyPr wrap="square" lIns="0" tIns="0" rIns="0" bIns="0" rtlCol="0" anchor="ctr"/>
+          <a:lstStyle/>
+          <a:p>
+            <a:pPr indent="0" marL="0">
+              <a:buNone/>
+            </a:pPr>
+            <a:r>
+              <a:rPr lang="en-US" sz="1000" dirty="0">
                 <a:solidFill>
                   <a:srgbClr val="1A1A2E"/>
                 </a:solidFill>
@@ -9652,38 +9819,16 @@
                 <a:ea typeface="Calibri" pitchFamily="34" charset="-122"/>
                 <a:cs typeface="Calibri" pitchFamily="34" charset="-120"/>
               </a:rPr>
-              <a:t>• Single HTML file (~200 KB)</a:t>
-            </a:r>
-            <a:endParaRPr lang="en-US" sz="1050" dirty="0"/>
-          </a:p>
-        </p:txBody>
-      </p:sp>
-      <p:sp>
-        <p:nvSpPr>
-          <p:cNvPr id="13" name="Text 11"/>
-          <p:cNvSpPr/>
-          <p:nvPr/>
-        </p:nvSpPr>
-        <p:spPr>
-          <a:xfrm>
-            <a:off x="3364992" y="2167128"/>
-            <a:ext cx="2395728" cy="594360"/>
-          </a:xfrm>
-          <a:prstGeom prst="rect">
-            <a:avLst/>
-          </a:prstGeom>
-          <a:noFill/>
-          <a:ln/>
-        </p:spPr>
-        <p:txBody>
-          <a:bodyPr wrap="square" lIns="0" tIns="0" rIns="0" bIns="0" rtlCol="0" anchor="ctr"/>
-          <a:lstStyle/>
-          <a:p>
-            <a:pPr indent="0" marL="0">
-              <a:buNone/>
-            </a:pPr>
-            <a:r>
-              <a:rPr lang="en-US" sz="1050" dirty="0">
+              <a:t>Upload JSON bulan lalu → sistem hitung carry-over streak tiap CSO dari ujung bulan.</a:t>
+            </a:r>
+            <a:endParaRPr lang="en-US" sz="1000" dirty="0"/>
+          </a:p>
+          <a:p>
+            <a:pPr indent="0" marL="0">
+              <a:buNone/>
+            </a:pPr>
+            <a:r>
+              <a:rPr lang="en-US" sz="1000" dirty="0">
                 <a:solidFill>
                   <a:srgbClr val="1A1A2E"/>
                 </a:solidFill>
@@ -9691,38 +9836,16 @@
                 <a:ea typeface="Calibri" pitchFamily="34" charset="-122"/>
                 <a:cs typeface="Calibri" pitchFamily="34" charset="-120"/>
               </a:rPr>
-              <a:t>• NO backend — zero server cost</a:t>
-            </a:r>
-            <a:endParaRPr lang="en-US" sz="1050" dirty="0"/>
-          </a:p>
-        </p:txBody>
-      </p:sp>
-      <p:sp>
-        <p:nvSpPr>
-          <p:cNvPr id="14" name="Text 12"/>
-          <p:cNvSpPr/>
-          <p:nvPr/>
-        </p:nvSpPr>
-        <p:spPr>
-          <a:xfrm>
-            <a:off x="3364992" y="2825496"/>
-            <a:ext cx="2395728" cy="594360"/>
-          </a:xfrm>
-          <a:prstGeom prst="rect">
-            <a:avLst/>
-          </a:prstGeom>
-          <a:noFill/>
-          <a:ln/>
-        </p:spPr>
-        <p:txBody>
-          <a:bodyPr wrap="square" lIns="0" tIns="0" rIns="0" bIns="0" rtlCol="0" anchor="ctr"/>
-          <a:lstStyle/>
-          <a:p>
-            <a:pPr indent="0" marL="0">
-              <a:buNone/>
-            </a:pPr>
-            <a:r>
-              <a:rPr lang="en-US" sz="1050" dirty="0">
+              <a:t>Jika streak = 5 → tgl 1 wajib OFF.</a:t>
+            </a:r>
+            <a:endParaRPr lang="en-US" sz="1000" dirty="0"/>
+          </a:p>
+          <a:p>
+            <a:pPr indent="0" marL="0">
+              <a:buNone/>
+            </a:pPr>
+            <a:r>
+              <a:rPr lang="en-US" sz="1000" dirty="0">
                 <a:solidFill>
                   <a:srgbClr val="1A1A2E"/>
                 </a:solidFill>
@@ -9730,65 +9853,26 @@
                 <a:ea typeface="Calibri" pitchFamily="34" charset="-122"/>
                 <a:cs typeface="Calibri" pitchFamily="34" charset="-120"/>
               </a:rPr>
-              <a:t>• Full privacy: 100% client-side</a:t>
-            </a:r>
-            <a:endParaRPr lang="en-US" sz="1050" dirty="0"/>
-          </a:p>
-        </p:txBody>
-      </p:sp>
-      <p:sp>
-        <p:nvSpPr>
-          <p:cNvPr id="15" name="Text 13"/>
-          <p:cNvSpPr/>
-          <p:nvPr/>
-        </p:nvSpPr>
-        <p:spPr>
-          <a:xfrm>
-            <a:off x="3364992" y="3483864"/>
-            <a:ext cx="2395728" cy="594360"/>
-          </a:xfrm>
-          <a:prstGeom prst="rect">
-            <a:avLst/>
-          </a:prstGeom>
-          <a:noFill/>
-          <a:ln/>
-        </p:spPr>
-        <p:txBody>
-          <a:bodyPr wrap="square" lIns="0" tIns="0" rIns="0" bIns="0" rtlCol="0" anchor="ctr"/>
-          <a:lstStyle/>
-          <a:p>
-            <a:pPr indent="0" marL="0">
-              <a:buNone/>
-            </a:pPr>
-            <a:r>
-              <a:rPr lang="en-US" sz="1050" dirty="0">
-                <a:solidFill>
-                  <a:srgbClr val="1A1A2E"/>
-                </a:solidFill>
-                <a:latin typeface="Calibri" pitchFamily="34" charset="0"/>
-                <a:ea typeface="Calibri" pitchFamily="34" charset="-122"/>
-                <a:cs typeface="Calibri" pitchFamily="34" charset="-120"/>
-              </a:rPr>
-              <a:t>• Browser: Chrome, Firefox, Safari, Edge</a:t>
-            </a:r>
-            <a:endParaRPr lang="en-US" sz="1050" dirty="0"/>
-          </a:p>
-        </p:txBody>
-      </p:sp>
-      <p:sp>
-        <p:nvSpPr>
-          <p:cNvPr id="16" name="Shape 14"/>
-          <p:cNvSpPr/>
-          <p:nvPr/>
-        </p:nvSpPr>
-        <p:spPr>
-          <a:xfrm>
-            <a:off x="6089904" y="1005840"/>
-            <a:ext cx="2651760" cy="3703320"/>
+              <a:t>Jika streak &lt; 5 → boleh kerja tgl 1.</a:t>
+            </a:r>
+            <a:endParaRPr lang="en-US" sz="1000" dirty="0"/>
+          </a:p>
+        </p:txBody>
+      </p:sp>
+      <p:sp>
+        <p:nvSpPr>
+          <p:cNvPr id="10" name="Shape 8"/>
+          <p:cNvSpPr/>
+          <p:nvPr/>
+        </p:nvSpPr>
+        <p:spPr>
+          <a:xfrm>
+            <a:off x="365760" y="2834640"/>
+            <a:ext cx="8412480" cy="1417320"/>
           </a:xfrm>
           <a:prstGeom prst="roundRect">
             <a:avLst>
-              <a:gd name="adj" fmla="val 2759"/>
+              <a:gd name="adj" fmla="val 5161"/>
             </a:avLst>
           </a:prstGeom>
           <a:solidFill>
@@ -9811,14 +9895,14 @@
       </p:sp>
       <p:sp>
         <p:nvSpPr>
-          <p:cNvPr id="17" name="Text 15"/>
-          <p:cNvSpPr/>
-          <p:nvPr/>
-        </p:nvSpPr>
-        <p:spPr>
-          <a:xfrm>
-            <a:off x="6199632" y="1078992"/>
-            <a:ext cx="2432304" cy="347472"/>
+          <p:cNvPr id="11" name="Text 9"/>
+          <p:cNvSpPr/>
+          <p:nvPr/>
+        </p:nvSpPr>
+        <p:spPr>
+          <a:xfrm>
+            <a:off x="502920" y="2907792"/>
+            <a:ext cx="8046720" cy="320040"/>
           </a:xfrm>
           <a:prstGeom prst="rect">
             <a:avLst/>
@@ -9842,7 +9926,7 @@
                 <a:ea typeface="Calibri" pitchFamily="34" charset="-122"/>
                 <a:cs typeface="Calibri" pitchFamily="34" charset="-120"/>
               </a:rPr>
-              <a:t>FEATURES v6</a:t>
+              <a:t>Potensi Violations yang Terdeteksi Lintas Bulan:</a:t>
             </a:r>
             <a:endParaRPr lang="en-US" sz="1100" dirty="0"/>
           </a:p>
@@ -9850,14 +9934,14 @@
       </p:sp>
       <p:sp>
         <p:nvSpPr>
-          <p:cNvPr id="18" name="Text 16"/>
-          <p:cNvSpPr/>
-          <p:nvPr/>
-        </p:nvSpPr>
-        <p:spPr>
-          <a:xfrm>
-            <a:off x="6227064" y="1508760"/>
-            <a:ext cx="2395728" cy="594360"/>
+          <p:cNvPr id="12" name="Text 10"/>
+          <p:cNvSpPr/>
+          <p:nvPr/>
+        </p:nvSpPr>
+        <p:spPr>
+          <a:xfrm>
+            <a:off x="502920" y="3273552"/>
+            <a:ext cx="8046720" cy="274320"/>
           </a:xfrm>
           <a:prstGeom prst="rect">
             <a:avLst/>
@@ -9881,7 +9965,7 @@
                 <a:ea typeface="Calibri" pitchFamily="34" charset="-122"/>
                 <a:cs typeface="Calibri" pitchFamily="34" charset="-120"/>
               </a:rPr>
-              <a:t>• Save/Load Config JSON (full state)</a:t>
+              <a:t>⚠ 5+ hari kerja berturut (R1B) — carry-over + tgl 1 baru</a:t>
             </a:r>
             <a:endParaRPr lang="en-US" sz="1050" dirty="0"/>
           </a:p>
@@ -9889,14 +9973,14 @@
       </p:sp>
       <p:sp>
         <p:nvSpPr>
-          <p:cNvPr id="19" name="Text 17"/>
-          <p:cNvSpPr/>
-          <p:nvPr/>
-        </p:nvSpPr>
-        <p:spPr>
-          <a:xfrm>
-            <a:off x="6227064" y="2167128"/>
-            <a:ext cx="2395728" cy="594360"/>
+          <p:cNvPr id="13" name="Text 11"/>
+          <p:cNvSpPr/>
+          <p:nvPr/>
+        </p:nvSpPr>
+        <p:spPr>
+          <a:xfrm>
+            <a:off x="502920" y="3566160"/>
+            <a:ext cx="8046720" cy="274320"/>
           </a:xfrm>
           <a:prstGeom prst="rect">
             <a:avLst/>
@@ -9920,7 +10004,7 @@
                 <a:ea typeface="Calibri" pitchFamily="34" charset="-122"/>
                 <a:cs typeface="Calibri" pitchFamily="34" charset="-120"/>
               </a:rPr>
-              <a:t>• Load Analisis Config (cross-month)</a:t>
+              <a:t>⚠ 3+ OFF berturut (R3) — ujung bulan lalu + awal bulan baru</a:t>
             </a:r>
             <a:endParaRPr lang="en-US" sz="1050" dirty="0"/>
           </a:p>
@@ -9928,14 +10012,14 @@
       </p:sp>
       <p:sp>
         <p:nvSpPr>
-          <p:cNvPr id="20" name="Text 18"/>
-          <p:cNvSpPr/>
-          <p:nvPr/>
-        </p:nvSpPr>
-        <p:spPr>
-          <a:xfrm>
-            <a:off x="6227064" y="2825496"/>
-            <a:ext cx="2395728" cy="594360"/>
+          <p:cNvPr id="14" name="Text 12"/>
+          <p:cNvSpPr/>
+          <p:nvPr/>
+        </p:nvSpPr>
+        <p:spPr>
+          <a:xfrm>
+            <a:off x="502920" y="3858768"/>
+            <a:ext cx="8046720" cy="274320"/>
           </a:xfrm>
           <a:prstGeom prst="rect">
             <a:avLst/>
@@ -9959,7 +10043,7 @@
                 <a:ea typeface="Calibri" pitchFamily="34" charset="-122"/>
                 <a:cs typeface="Calibri" pitchFamily="34" charset="-120"/>
               </a:rPr>
-              <a:t>• Shift Report bento cards</a:t>
+              <a:t>⚠ Violations bulan lalu — ditampilkan untuk referensi operator</a:t>
             </a:r>
             <a:endParaRPr lang="en-US" sz="1050" dirty="0"/>
           </a:p>
@@ -9967,14 +10051,48 @@
       </p:sp>
       <p:sp>
         <p:nvSpPr>
-          <p:cNvPr id="21" name="Text 19"/>
-          <p:cNvSpPr/>
-          <p:nvPr/>
-        </p:nvSpPr>
-        <p:spPr>
-          <a:xfrm>
-            <a:off x="6227064" y="3483864"/>
-            <a:ext cx="2395728" cy="594360"/>
+          <p:cNvPr id="15" name="Shape 13"/>
+          <p:cNvSpPr/>
+          <p:nvPr/>
+        </p:nvSpPr>
+        <p:spPr>
+          <a:xfrm>
+            <a:off x="365760" y="4389120"/>
+            <a:ext cx="8412480" cy="658368"/>
+          </a:xfrm>
+          <a:prstGeom prst="roundRect">
+            <a:avLst>
+              <a:gd name="adj" fmla="val 11111"/>
+            </a:avLst>
+          </a:prstGeom>
+          <a:solidFill>
+            <a:srgbClr val="1B4332"/>
+          </a:solidFill>
+          <a:ln w="12700">
+            <a:solidFill>
+              <a:srgbClr val="1B4332"/>
+            </a:solidFill>
+            <a:prstDash val="solid"/>
+          </a:ln>
+          <a:effectLst>
+            <a:outerShdw sx="100000" sy="100000" kx="0" ky="0" algn="bl" rotWithShape="0" blurRad="101600" dist="38100" dir="2700000">
+              <a:srgbClr val="000000">
+                <a:alpha val="12000"/>
+              </a:srgbClr>
+            </a:outerShdw>
+          </a:effectLst>
+        </p:spPr>
+      </p:sp>
+      <p:sp>
+        <p:nvSpPr>
+          <p:cNvPr id="16" name="Text 14"/>
+          <p:cNvSpPr/>
+          <p:nvPr/>
+        </p:nvSpPr>
+        <p:spPr>
+          <a:xfrm>
+            <a:off x="502920" y="4407408"/>
+            <a:ext cx="8138160" cy="603504"/>
           </a:xfrm>
           <a:prstGeom prst="rect">
             <a:avLst/>
@@ -9992,13 +10110,13 @@
             <a:r>
               <a:rPr lang="en-US" sz="1050" dirty="0">
                 <a:solidFill>
-                  <a:srgbClr val="1A1A2E"/>
-                </a:solidFill>
-                <a:latin typeface="Calibri" pitchFamily="34" charset="0"/>
-                <a:ea typeface="Calibri" pitchFamily="34" charset="-122"/>
-                <a:cs typeface="Calibri" pitchFamily="34" charset="-120"/>
-              </a:rPr>
-              <a:t>• Search CSO by name (Step 3)</a:t>
+                  <a:srgbClr val="D1FAE5"/>
+                </a:solidFill>
+                <a:latin typeface="Calibri" pitchFamily="34" charset="0"/>
+                <a:ea typeface="Calibri" pitchFamily="34" charset="-122"/>
+                <a:cs typeface="Calibri" pitchFamily="34" charset="-120"/>
+              </a:rPr>
+              <a:t>FLOW: Upload JSON lama → Analisa panel muncul di Step 1 → CSO list di-load → Operator adjust → Generate bulan baru dengan constraint carry-over</a:t>
             </a:r>
             <a:endParaRPr lang="en-US" sz="1050" dirty="0"/>
           </a:p>
@@ -10069,7 +10187,7 @@
                 <a:ea typeface="Cambria" pitchFamily="34" charset="-122"/>
                 <a:cs typeface="Cambria" pitchFamily="34" charset="-120"/>
               </a:rPr>
-              <a:t>Key Innovation: Pace-Based Sort + Request Priority</a:t>
+              <a:t>Technology Stack</a:t>
             </a:r>
             <a:endParaRPr lang="en-US" sz="3000" dirty="0"/>
           </a:p>
@@ -10106,20 +10224,20 @@
         </p:nvSpPr>
         <p:spPr>
           <a:xfrm>
-            <a:off x="320040" y="1005840"/>
-            <a:ext cx="4069080" cy="3703320"/>
+            <a:off x="365760" y="1005840"/>
+            <a:ext cx="2651760" cy="3703320"/>
           </a:xfrm>
           <a:prstGeom prst="roundRect">
             <a:avLst>
-              <a:gd name="adj" fmla="val 1975"/>
+              <a:gd name="adj" fmla="val 2759"/>
             </a:avLst>
           </a:prstGeom>
           <a:solidFill>
-            <a:srgbClr val="F1F5F9"/>
+            <a:srgbClr val="DBEAFE"/>
           </a:solidFill>
           <a:ln w="12700">
             <a:solidFill>
-              <a:srgbClr val="F1F5F9"/>
+              <a:srgbClr val="DBEAFE"/>
             </a:solidFill>
             <a:prstDash val="solid"/>
           </a:ln>
@@ -10140,59 +10258,215 @@
         </p:nvSpPr>
         <p:spPr>
           <a:xfrm>
-            <a:off x="457200" y="1078992"/>
-            <a:ext cx="3794760" cy="365760"/>
-          </a:xfrm>
-          <a:prstGeom prst="rect">
-            <a:avLst/>
-          </a:prstGeom>
-          <a:noFill/>
-          <a:ln/>
-        </p:spPr>
-        <p:txBody>
-          <a:bodyPr wrap="square" lIns="0" tIns="0" rIns="0" bIns="0" rtlCol="0" anchor="ctr"/>
-          <a:lstStyle/>
-          <a:p>
-            <a:pPr indent="0" marL="0">
-              <a:buNone/>
-            </a:pPr>
-            <a:r>
-              <a:rPr lang="en-US" sz="1300" b="1" dirty="0">
-                <a:solidFill>
-                  <a:srgbClr val="1B4332"/>
-                </a:solidFill>
-                <a:latin typeface="Cambria" pitchFamily="34" charset="0"/>
-                <a:ea typeface="Cambria" pitchFamily="34" charset="-122"/>
-                <a:cs typeface="Cambria" pitchFamily="34" charset="-120"/>
-              </a:rPr>
-              <a:t>🏃 Pace-Based Sort</a:t>
-            </a:r>
-            <a:endParaRPr lang="en-US" sz="1300" dirty="0"/>
-          </a:p>
-        </p:txBody>
-      </p:sp>
-      <p:sp>
-        <p:nvSpPr>
-          <p:cNvPr id="6" name="Shape 4"/>
-          <p:cNvSpPr/>
-          <p:nvPr/>
-        </p:nvSpPr>
-        <p:spPr>
-          <a:xfrm>
-            <a:off x="457200" y="1508760"/>
-            <a:ext cx="3794760" cy="1051560"/>
+            <a:off x="475488" y="1078992"/>
+            <a:ext cx="2432304" cy="347472"/>
+          </a:xfrm>
+          <a:prstGeom prst="rect">
+            <a:avLst/>
+          </a:prstGeom>
+          <a:noFill/>
+          <a:ln/>
+        </p:spPr>
+        <p:txBody>
+          <a:bodyPr wrap="square" lIns="0" tIns="0" rIns="0" bIns="0" rtlCol="0" anchor="ctr"/>
+          <a:lstStyle/>
+          <a:p>
+            <a:pPr indent="0" marL="0">
+              <a:buNone/>
+            </a:pPr>
+            <a:r>
+              <a:rPr lang="en-US" sz="1100" b="1" dirty="0">
+                <a:solidFill>
+                  <a:srgbClr val="2563EB"/>
+                </a:solidFill>
+                <a:latin typeface="Calibri" pitchFamily="34" charset="0"/>
+                <a:ea typeface="Calibri" pitchFamily="34" charset="-122"/>
+                <a:cs typeface="Calibri" pitchFamily="34" charset="-120"/>
+              </a:rPr>
+              <a:t>ARCHITECTURE</a:t>
+            </a:r>
+            <a:endParaRPr lang="en-US" sz="1100" dirty="0"/>
+          </a:p>
+        </p:txBody>
+      </p:sp>
+      <p:sp>
+        <p:nvSpPr>
+          <p:cNvPr id="6" name="Text 4"/>
+          <p:cNvSpPr/>
+          <p:nvPr/>
+        </p:nvSpPr>
+        <p:spPr>
+          <a:xfrm>
+            <a:off x="502920" y="1508760"/>
+            <a:ext cx="2395728" cy="594360"/>
+          </a:xfrm>
+          <a:prstGeom prst="rect">
+            <a:avLst/>
+          </a:prstGeom>
+          <a:noFill/>
+          <a:ln/>
+        </p:spPr>
+        <p:txBody>
+          <a:bodyPr wrap="square" lIns="0" tIns="0" rIns="0" bIns="0" rtlCol="0" anchor="ctr"/>
+          <a:lstStyle/>
+          <a:p>
+            <a:pPr indent="0" marL="0">
+              <a:buNone/>
+            </a:pPr>
+            <a:r>
+              <a:rPr lang="en-US" sz="1050" dirty="0">
+                <a:solidFill>
+                  <a:srgbClr val="1A1A2E"/>
+                </a:solidFill>
+                <a:latin typeface="Calibri" pitchFamily="34" charset="0"/>
+                <a:ea typeface="Calibri" pitchFamily="34" charset="-122"/>
+                <a:cs typeface="Calibri" pitchFamily="34" charset="-120"/>
+              </a:rPr>
+              <a:t>• UI Layer: HTML5 + CSS3 (custom design)</a:t>
+            </a:r>
+            <a:endParaRPr lang="en-US" sz="1050" dirty="0"/>
+          </a:p>
+        </p:txBody>
+      </p:sp>
+      <p:sp>
+        <p:nvSpPr>
+          <p:cNvPr id="7" name="Text 5"/>
+          <p:cNvSpPr/>
+          <p:nvPr/>
+        </p:nvSpPr>
+        <p:spPr>
+          <a:xfrm>
+            <a:off x="502920" y="2167128"/>
+            <a:ext cx="2395728" cy="594360"/>
+          </a:xfrm>
+          <a:prstGeom prst="rect">
+            <a:avLst/>
+          </a:prstGeom>
+          <a:noFill/>
+          <a:ln/>
+        </p:spPr>
+        <p:txBody>
+          <a:bodyPr wrap="square" lIns="0" tIns="0" rIns="0" bIns="0" rtlCol="0" anchor="ctr"/>
+          <a:lstStyle/>
+          <a:p>
+            <a:pPr indent="0" marL="0">
+              <a:buNone/>
+            </a:pPr>
+            <a:r>
+              <a:rPr lang="en-US" sz="1050" dirty="0">
+                <a:solidFill>
+                  <a:srgbClr val="1A1A2E"/>
+                </a:solidFill>
+                <a:latin typeface="Calibri" pitchFamily="34" charset="0"/>
+                <a:ea typeface="Calibri" pitchFamily="34" charset="-122"/>
+                <a:cs typeface="Calibri" pitchFamily="34" charset="-120"/>
+              </a:rPr>
+              <a:t>• Algorithm: Vanilla JavaScript (ES6+)</a:t>
+            </a:r>
+            <a:endParaRPr lang="en-US" sz="1050" dirty="0"/>
+          </a:p>
+        </p:txBody>
+      </p:sp>
+      <p:sp>
+        <p:nvSpPr>
+          <p:cNvPr id="8" name="Text 6"/>
+          <p:cNvSpPr/>
+          <p:nvPr/>
+        </p:nvSpPr>
+        <p:spPr>
+          <a:xfrm>
+            <a:off x="502920" y="2825496"/>
+            <a:ext cx="2395728" cy="594360"/>
+          </a:xfrm>
+          <a:prstGeom prst="rect">
+            <a:avLst/>
+          </a:prstGeom>
+          <a:noFill/>
+          <a:ln/>
+        </p:spPr>
+        <p:txBody>
+          <a:bodyPr wrap="square" lIns="0" tIns="0" rIns="0" bIns="0" rtlCol="0" anchor="ctr"/>
+          <a:lstStyle/>
+          <a:p>
+            <a:pPr indent="0" marL="0">
+              <a:buNone/>
+            </a:pPr>
+            <a:r>
+              <a:rPr lang="en-US" sz="1050" dirty="0">
+                <a:solidFill>
+                  <a:srgbClr val="1A1A2E"/>
+                </a:solidFill>
+                <a:latin typeface="Calibri" pitchFamily="34" charset="0"/>
+                <a:ea typeface="Calibri" pitchFamily="34" charset="-122"/>
+                <a:cs typeface="Calibri" pitchFamily="34" charset="-120"/>
+              </a:rPr>
+              <a:t>• Data I/O: JSON config + CSV export</a:t>
+            </a:r>
+            <a:endParaRPr lang="en-US" sz="1050" dirty="0"/>
+          </a:p>
+        </p:txBody>
+      </p:sp>
+      <p:sp>
+        <p:nvSpPr>
+          <p:cNvPr id="9" name="Text 7"/>
+          <p:cNvSpPr/>
+          <p:nvPr/>
+        </p:nvSpPr>
+        <p:spPr>
+          <a:xfrm>
+            <a:off x="502920" y="3483864"/>
+            <a:ext cx="2395728" cy="594360"/>
+          </a:xfrm>
+          <a:prstGeom prst="rect">
+            <a:avLst/>
+          </a:prstGeom>
+          <a:noFill/>
+          <a:ln/>
+        </p:spPr>
+        <p:txBody>
+          <a:bodyPr wrap="square" lIns="0" tIns="0" rIns="0" bIns="0" rtlCol="0" anchor="ctr"/>
+          <a:lstStyle/>
+          <a:p>
+            <a:pPr indent="0" marL="0">
+              <a:buNone/>
+            </a:pPr>
+            <a:r>
+              <a:rPr lang="en-US" sz="1050" dirty="0">
+                <a:solidFill>
+                  <a:srgbClr val="1A1A2E"/>
+                </a:solidFill>
+                <a:latin typeface="Calibri" pitchFamily="34" charset="0"/>
+                <a:ea typeface="Calibri" pitchFamily="34" charset="-122"/>
+                <a:cs typeface="Calibri" pitchFamily="34" charset="-120"/>
+              </a:rPr>
+              <a:t>• Excel: SheetJS (import/export)</a:t>
+            </a:r>
+            <a:endParaRPr lang="en-US" sz="1050" dirty="0"/>
+          </a:p>
+        </p:txBody>
+      </p:sp>
+      <p:sp>
+        <p:nvSpPr>
+          <p:cNvPr id="10" name="Shape 8"/>
+          <p:cNvSpPr/>
+          <p:nvPr/>
+        </p:nvSpPr>
+        <p:spPr>
+          <a:xfrm>
+            <a:off x="3227832" y="1005840"/>
+            <a:ext cx="2651760" cy="3703320"/>
           </a:xfrm>
           <a:prstGeom prst="roundRect">
             <a:avLst>
-              <a:gd name="adj" fmla="val 6957"/>
+              <a:gd name="adj" fmla="val 2759"/>
             </a:avLst>
           </a:prstGeom>
           <a:solidFill>
-            <a:srgbClr val="FEE2E2"/>
+            <a:srgbClr val="40916C"/>
           </a:solidFill>
           <a:ln w="12700">
             <a:solidFill>
-              <a:srgbClr val="FEE2E2"/>
+              <a:srgbClr val="40916C"/>
             </a:solidFill>
             <a:prstDash val="solid"/>
           </a:ln>
@@ -10207,69 +10481,69 @@
       </p:sp>
       <p:sp>
         <p:nvSpPr>
-          <p:cNvPr id="7" name="Text 5"/>
-          <p:cNvSpPr/>
-          <p:nvPr/>
-        </p:nvSpPr>
-        <p:spPr>
-          <a:xfrm>
-            <a:off x="594360" y="1554480"/>
-            <a:ext cx="3520440" cy="256032"/>
-          </a:xfrm>
-          <a:prstGeom prst="rect">
-            <a:avLst/>
-          </a:prstGeom>
-          <a:noFill/>
-          <a:ln/>
-        </p:spPr>
-        <p:txBody>
-          <a:bodyPr wrap="square" lIns="0" tIns="0" rIns="0" bIns="0" rtlCol="0" anchor="ctr"/>
-          <a:lstStyle/>
-          <a:p>
-            <a:pPr indent="0" marL="0">
-              <a:buNone/>
-            </a:pPr>
-            <a:r>
-              <a:rPr lang="en-US" sz="1000" b="1" dirty="0">
-                <a:solidFill>
-                  <a:srgbClr val="DC2626"/>
-                </a:solidFill>
-                <a:latin typeface="Calibri" pitchFamily="34" charset="0"/>
-                <a:ea typeface="Calibri" pitchFamily="34" charset="-122"/>
-                <a:cs typeface="Calibri" pitchFamily="34" charset="-120"/>
-              </a:rPr>
-              <a:t>PROBLEM</a:t>
-            </a:r>
-            <a:endParaRPr lang="en-US" sz="1000" dirty="0"/>
-          </a:p>
-        </p:txBody>
-      </p:sp>
-      <p:sp>
-        <p:nvSpPr>
-          <p:cNvPr id="8" name="Text 6"/>
-          <p:cNvSpPr/>
-          <p:nvPr/>
-        </p:nvSpPr>
-        <p:spPr>
-          <a:xfrm>
-            <a:off x="594360" y="1828800"/>
-            <a:ext cx="3520440" cy="658368"/>
-          </a:xfrm>
-          <a:prstGeom prst="rect">
-            <a:avLst/>
-          </a:prstGeom>
-          <a:noFill/>
-          <a:ln/>
-        </p:spPr>
-        <p:txBody>
-          <a:bodyPr wrap="square" lIns="0" tIns="0" rIns="0" bIns="0" rtlCol="0" anchor="ctr"/>
-          <a:lstStyle/>
-          <a:p>
-            <a:pPr indent="0" marL="0">
-              <a:buNone/>
-            </a:pPr>
-            <a:r>
-              <a:rPr lang="en-US" sz="950" dirty="0">
+          <p:cNvPr id="11" name="Text 9"/>
+          <p:cNvSpPr/>
+          <p:nvPr/>
+        </p:nvSpPr>
+        <p:spPr>
+          <a:xfrm>
+            <a:off x="3337560" y="1078992"/>
+            <a:ext cx="2432304" cy="347472"/>
+          </a:xfrm>
+          <a:prstGeom prst="rect">
+            <a:avLst/>
+          </a:prstGeom>
+          <a:noFill/>
+          <a:ln/>
+        </p:spPr>
+        <p:txBody>
+          <a:bodyPr wrap="square" lIns="0" tIns="0" rIns="0" bIns="0" rtlCol="0" anchor="ctr"/>
+          <a:lstStyle/>
+          <a:p>
+            <a:pPr indent="0" marL="0">
+              <a:buNone/>
+            </a:pPr>
+            <a:r>
+              <a:rPr lang="en-US" sz="1100" b="1" dirty="0">
+                <a:solidFill>
+                  <a:srgbClr val="1B4332"/>
+                </a:solidFill>
+                <a:latin typeface="Calibri" pitchFamily="34" charset="0"/>
+                <a:ea typeface="Calibri" pitchFamily="34" charset="-122"/>
+                <a:cs typeface="Calibri" pitchFamily="34" charset="-120"/>
+              </a:rPr>
+              <a:t>DEPLOYMENT</a:t>
+            </a:r>
+            <a:endParaRPr lang="en-US" sz="1100" dirty="0"/>
+          </a:p>
+        </p:txBody>
+      </p:sp>
+      <p:sp>
+        <p:nvSpPr>
+          <p:cNvPr id="12" name="Text 10"/>
+          <p:cNvSpPr/>
+          <p:nvPr/>
+        </p:nvSpPr>
+        <p:spPr>
+          <a:xfrm>
+            <a:off x="3364992" y="1508760"/>
+            <a:ext cx="2395728" cy="594360"/>
+          </a:xfrm>
+          <a:prstGeom prst="rect">
+            <a:avLst/>
+          </a:prstGeom>
+          <a:noFill/>
+          <a:ln/>
+        </p:spPr>
+        <p:txBody>
+          <a:bodyPr wrap="square" lIns="0" tIns="0" rIns="0" bIns="0" rtlCol="0" anchor="ctr"/>
+          <a:lstStyle/>
+          <a:p>
+            <a:pPr indent="0" marL="0">
+              <a:buNone/>
+            </a:pPr>
+            <a:r>
+              <a:rPr lang="en-US" sz="1050" dirty="0">
                 <a:solidFill>
                   <a:srgbClr val="1A1A2E"/>
                 </a:solidFill>
@@ -10277,16 +10551,38 @@
                 <a:ea typeface="Calibri" pitchFamily="34" charset="-122"/>
                 <a:cs typeface="Calibri" pitchFamily="34" charset="-120"/>
               </a:rPr>
-              <a:t>Random sort → OFF menumpuk di akhir bulan</a:t>
-            </a:r>
-            <a:endParaRPr lang="en-US" sz="950" dirty="0"/>
-          </a:p>
-          <a:p>
-            <a:pPr indent="0" marL="0">
-              <a:buNone/>
-            </a:pPr>
-            <a:r>
-              <a:rPr lang="en-US" sz="950" dirty="0">
+              <a:t>• Single HTML file (~200 KB)</a:t>
+            </a:r>
+            <a:endParaRPr lang="en-US" sz="1050" dirty="0"/>
+          </a:p>
+        </p:txBody>
+      </p:sp>
+      <p:sp>
+        <p:nvSpPr>
+          <p:cNvPr id="13" name="Text 11"/>
+          <p:cNvSpPr/>
+          <p:nvPr/>
+        </p:nvSpPr>
+        <p:spPr>
+          <a:xfrm>
+            <a:off x="3364992" y="2167128"/>
+            <a:ext cx="2395728" cy="594360"/>
+          </a:xfrm>
+          <a:prstGeom prst="rect">
+            <a:avLst/>
+          </a:prstGeom>
+          <a:noFill/>
+          <a:ln/>
+        </p:spPr>
+        <p:txBody>
+          <a:bodyPr wrap="square" lIns="0" tIns="0" rIns="0" bIns="0" rtlCol="0" anchor="ctr"/>
+          <a:lstStyle/>
+          <a:p>
+            <a:pPr indent="0" marL="0">
+              <a:buNone/>
+            </a:pPr>
+            <a:r>
+              <a:rPr lang="en-US" sz="1050" dirty="0">
                 <a:solidFill>
                   <a:srgbClr val="1A1A2E"/>
                 </a:solidFill>
@@ -10294,34 +10590,112 @@
                 <a:ea typeface="Calibri" pitchFamily="34" charset="-122"/>
                 <a:cs typeface="Calibri" pitchFamily="34" charset="-120"/>
               </a:rPr>
-              <a:t>Phase 3 butuh 10+ cycle untuk konvergen</a:t>
-            </a:r>
-            <a:endParaRPr lang="en-US" sz="950" dirty="0"/>
-          </a:p>
-        </p:txBody>
-      </p:sp>
-      <p:sp>
-        <p:nvSpPr>
-          <p:cNvPr id="9" name="Shape 7"/>
-          <p:cNvSpPr/>
-          <p:nvPr/>
-        </p:nvSpPr>
-        <p:spPr>
-          <a:xfrm>
-            <a:off x="457200" y="2651760"/>
-            <a:ext cx="3794760" cy="1234440"/>
+              <a:t>• NO backend — zero server cost</a:t>
+            </a:r>
+            <a:endParaRPr lang="en-US" sz="1050" dirty="0"/>
+          </a:p>
+        </p:txBody>
+      </p:sp>
+      <p:sp>
+        <p:nvSpPr>
+          <p:cNvPr id="14" name="Text 12"/>
+          <p:cNvSpPr/>
+          <p:nvPr/>
+        </p:nvSpPr>
+        <p:spPr>
+          <a:xfrm>
+            <a:off x="3364992" y="2825496"/>
+            <a:ext cx="2395728" cy="594360"/>
+          </a:xfrm>
+          <a:prstGeom prst="rect">
+            <a:avLst/>
+          </a:prstGeom>
+          <a:noFill/>
+          <a:ln/>
+        </p:spPr>
+        <p:txBody>
+          <a:bodyPr wrap="square" lIns="0" tIns="0" rIns="0" bIns="0" rtlCol="0" anchor="ctr"/>
+          <a:lstStyle/>
+          <a:p>
+            <a:pPr indent="0" marL="0">
+              <a:buNone/>
+            </a:pPr>
+            <a:r>
+              <a:rPr lang="en-US" sz="1050" dirty="0">
+                <a:solidFill>
+                  <a:srgbClr val="1A1A2E"/>
+                </a:solidFill>
+                <a:latin typeface="Calibri" pitchFamily="34" charset="0"/>
+                <a:ea typeface="Calibri" pitchFamily="34" charset="-122"/>
+                <a:cs typeface="Calibri" pitchFamily="34" charset="-120"/>
+              </a:rPr>
+              <a:t>• Full privacy: 100% client-side</a:t>
+            </a:r>
+            <a:endParaRPr lang="en-US" sz="1050" dirty="0"/>
+          </a:p>
+        </p:txBody>
+      </p:sp>
+      <p:sp>
+        <p:nvSpPr>
+          <p:cNvPr id="15" name="Text 13"/>
+          <p:cNvSpPr/>
+          <p:nvPr/>
+        </p:nvSpPr>
+        <p:spPr>
+          <a:xfrm>
+            <a:off x="3364992" y="3483864"/>
+            <a:ext cx="2395728" cy="594360"/>
+          </a:xfrm>
+          <a:prstGeom prst="rect">
+            <a:avLst/>
+          </a:prstGeom>
+          <a:noFill/>
+          <a:ln/>
+        </p:spPr>
+        <p:txBody>
+          <a:bodyPr wrap="square" lIns="0" tIns="0" rIns="0" bIns="0" rtlCol="0" anchor="ctr"/>
+          <a:lstStyle/>
+          <a:p>
+            <a:pPr indent="0" marL="0">
+              <a:buNone/>
+            </a:pPr>
+            <a:r>
+              <a:rPr lang="en-US" sz="1050" dirty="0">
+                <a:solidFill>
+                  <a:srgbClr val="1A1A2E"/>
+                </a:solidFill>
+                <a:latin typeface="Calibri" pitchFamily="34" charset="0"/>
+                <a:ea typeface="Calibri" pitchFamily="34" charset="-122"/>
+                <a:cs typeface="Calibri" pitchFamily="34" charset="-120"/>
+              </a:rPr>
+              <a:t>• Browser: Chrome, Firefox, Safari, Edge</a:t>
+            </a:r>
+            <a:endParaRPr lang="en-US" sz="1050" dirty="0"/>
+          </a:p>
+        </p:txBody>
+      </p:sp>
+      <p:sp>
+        <p:nvSpPr>
+          <p:cNvPr id="16" name="Shape 14"/>
+          <p:cNvSpPr/>
+          <p:nvPr/>
+        </p:nvSpPr>
+        <p:spPr>
+          <a:xfrm>
+            <a:off x="6089904" y="1005840"/>
+            <a:ext cx="2651760" cy="3703320"/>
           </a:xfrm>
           <a:prstGeom prst="roundRect">
             <a:avLst>
-              <a:gd name="adj" fmla="val 5926"/>
+              <a:gd name="adj" fmla="val 2759"/>
             </a:avLst>
           </a:prstGeom>
           <a:solidFill>
-            <a:srgbClr val="DCFCE7"/>
+            <a:srgbClr val="FEF9C3"/>
           </a:solidFill>
           <a:ln w="12700">
             <a:solidFill>
-              <a:srgbClr val="DCFCE7"/>
+              <a:srgbClr val="FEF9C3"/>
             </a:solidFill>
             <a:prstDash val="solid"/>
           </a:ln>
@@ -10336,69 +10710,69 @@
       </p:sp>
       <p:sp>
         <p:nvSpPr>
-          <p:cNvPr id="10" name="Text 8"/>
-          <p:cNvSpPr/>
-          <p:nvPr/>
-        </p:nvSpPr>
-        <p:spPr>
-          <a:xfrm>
-            <a:off x="594360" y="2715768"/>
-            <a:ext cx="3520440" cy="256032"/>
-          </a:xfrm>
-          <a:prstGeom prst="rect">
-            <a:avLst/>
-          </a:prstGeom>
-          <a:noFill/>
-          <a:ln/>
-        </p:spPr>
-        <p:txBody>
-          <a:bodyPr wrap="square" lIns="0" tIns="0" rIns="0" bIns="0" rtlCol="0" anchor="ctr"/>
-          <a:lstStyle/>
-          <a:p>
-            <a:pPr indent="0" marL="0">
-              <a:buNone/>
-            </a:pPr>
-            <a:r>
-              <a:rPr lang="en-US" sz="1000" b="1" dirty="0">
-                <a:solidFill>
-                  <a:srgbClr val="2D6A4F"/>
-                </a:solidFill>
-                <a:latin typeface="Calibri" pitchFamily="34" charset="0"/>
-                <a:ea typeface="Calibri" pitchFamily="34" charset="-122"/>
-                <a:cs typeface="Calibri" pitchFamily="34" charset="-120"/>
-              </a:rPr>
-              <a:t>SOLUTION</a:t>
-            </a:r>
-            <a:endParaRPr lang="en-US" sz="1000" dirty="0"/>
-          </a:p>
-        </p:txBody>
-      </p:sp>
-      <p:sp>
-        <p:nvSpPr>
-          <p:cNvPr id="11" name="Text 9"/>
-          <p:cNvSpPr/>
-          <p:nvPr/>
-        </p:nvSpPr>
-        <p:spPr>
-          <a:xfrm>
-            <a:off x="594360" y="2990088"/>
-            <a:ext cx="3520440" cy="777240"/>
-          </a:xfrm>
-          <a:prstGeom prst="rect">
-            <a:avLst/>
-          </a:prstGeom>
-          <a:noFill/>
-          <a:ln/>
-        </p:spPr>
-        <p:txBody>
-          <a:bodyPr wrap="square" lIns="0" tIns="0" rIns="0" bIns="0" rtlCol="0" anchor="ctr"/>
-          <a:lstStyle/>
-          <a:p>
-            <a:pPr indent="0" marL="0">
-              <a:buNone/>
-            </a:pPr>
-            <a:r>
-              <a:rPr lang="en-US" sz="950" dirty="0">
+          <p:cNvPr id="17" name="Text 15"/>
+          <p:cNvSpPr/>
+          <p:nvPr/>
+        </p:nvSpPr>
+        <p:spPr>
+          <a:xfrm>
+            <a:off x="6199632" y="1078992"/>
+            <a:ext cx="2432304" cy="347472"/>
+          </a:xfrm>
+          <a:prstGeom prst="rect">
+            <a:avLst/>
+          </a:prstGeom>
+          <a:noFill/>
+          <a:ln/>
+        </p:spPr>
+        <p:txBody>
+          <a:bodyPr wrap="square" lIns="0" tIns="0" rIns="0" bIns="0" rtlCol="0" anchor="ctr"/>
+          <a:lstStyle/>
+          <a:p>
+            <a:pPr indent="0" marL="0">
+              <a:buNone/>
+            </a:pPr>
+            <a:r>
+              <a:rPr lang="en-US" sz="1100" b="1" dirty="0">
+                <a:solidFill>
+                  <a:srgbClr val="CA8A04"/>
+                </a:solidFill>
+                <a:latin typeface="Calibri" pitchFamily="34" charset="0"/>
+                <a:ea typeface="Calibri" pitchFamily="34" charset="-122"/>
+                <a:cs typeface="Calibri" pitchFamily="34" charset="-120"/>
+              </a:rPr>
+              <a:t>FEATURES v6</a:t>
+            </a:r>
+            <a:endParaRPr lang="en-US" sz="1100" dirty="0"/>
+          </a:p>
+        </p:txBody>
+      </p:sp>
+      <p:sp>
+        <p:nvSpPr>
+          <p:cNvPr id="18" name="Text 16"/>
+          <p:cNvSpPr/>
+          <p:nvPr/>
+        </p:nvSpPr>
+        <p:spPr>
+          <a:xfrm>
+            <a:off x="6227064" y="1508760"/>
+            <a:ext cx="2395728" cy="594360"/>
+          </a:xfrm>
+          <a:prstGeom prst="rect">
+            <a:avLst/>
+          </a:prstGeom>
+          <a:noFill/>
+          <a:ln/>
+        </p:spPr>
+        <p:txBody>
+          <a:bodyPr wrap="square" lIns="0" tIns="0" rIns="0" bIns="0" rtlCol="0" anchor="ctr"/>
+          <a:lstStyle/>
+          <a:p>
+            <a:pPr indent="0" marL="0">
+              <a:buNone/>
+            </a:pPr>
+            <a:r>
+              <a:rPr lang="en-US" sz="1050" dirty="0">
                 <a:solidFill>
                   <a:srgbClr val="1A1A2E"/>
                 </a:solidFill>
@@ -10406,16 +10780,38 @@
                 <a:ea typeface="Calibri" pitchFamily="34" charset="-122"/>
                 <a:cs typeface="Calibri" pitchFamily="34" charset="-120"/>
               </a:rPr>
-              <a:t>OFF Pace = actual rate − target rate</a:t>
-            </a:r>
-            <a:endParaRPr lang="en-US" sz="950" dirty="0"/>
-          </a:p>
-          <a:p>
-            <a:pPr indent="0" marL="0">
-              <a:buNone/>
-            </a:pPr>
-            <a:r>
-              <a:rPr lang="en-US" sz="950" dirty="0">
+              <a:t>• Save/Load Config JSON (full state)</a:t>
+            </a:r>
+            <a:endParaRPr lang="en-US" sz="1050" dirty="0"/>
+          </a:p>
+        </p:txBody>
+      </p:sp>
+      <p:sp>
+        <p:nvSpPr>
+          <p:cNvPr id="19" name="Text 17"/>
+          <p:cNvSpPr/>
+          <p:nvPr/>
+        </p:nvSpPr>
+        <p:spPr>
+          <a:xfrm>
+            <a:off x="6227064" y="2167128"/>
+            <a:ext cx="2395728" cy="594360"/>
+          </a:xfrm>
+          <a:prstGeom prst="rect">
+            <a:avLst/>
+          </a:prstGeom>
+          <a:noFill/>
+          <a:ln/>
+        </p:spPr>
+        <p:txBody>
+          <a:bodyPr wrap="square" lIns="0" tIns="0" rIns="0" bIns="0" rtlCol="0" anchor="ctr"/>
+          <a:lstStyle/>
+          <a:p>
+            <a:pPr indent="0" marL="0">
+              <a:buNone/>
+            </a:pPr>
+            <a:r>
+              <a:rPr lang="en-US" sz="1050" dirty="0">
                 <a:solidFill>
                   <a:srgbClr val="1A1A2E"/>
                 </a:solidFill>
@@ -10423,16 +10819,38 @@
                 <a:ea typeface="Calibri" pitchFamily="34" charset="-122"/>
                 <a:cs typeface="Calibri" pitchFamily="34" charset="-120"/>
               </a:rPr>
-              <a:t>Negative pace → priority OFF dari hari 1</a:t>
-            </a:r>
-            <a:endParaRPr lang="en-US" sz="950" dirty="0"/>
-          </a:p>
-          <a:p>
-            <a:pPr indent="0" marL="0">
-              <a:buNone/>
-            </a:pPr>
-            <a:r>
-              <a:rPr lang="en-US" sz="950" dirty="0">
+              <a:t>• Load Analisis Config (cross-month)</a:t>
+            </a:r>
+            <a:endParaRPr lang="en-US" sz="1050" dirty="0"/>
+          </a:p>
+        </p:txBody>
+      </p:sp>
+      <p:sp>
+        <p:nvSpPr>
+          <p:cNvPr id="20" name="Text 18"/>
+          <p:cNvSpPr/>
+          <p:nvPr/>
+        </p:nvSpPr>
+        <p:spPr>
+          <a:xfrm>
+            <a:off x="6227064" y="2825496"/>
+            <a:ext cx="2395728" cy="594360"/>
+          </a:xfrm>
+          <a:prstGeom prst="rect">
+            <a:avLst/>
+          </a:prstGeom>
+          <a:noFill/>
+          <a:ln/>
+        </p:spPr>
+        <p:txBody>
+          <a:bodyPr wrap="square" lIns="0" tIns="0" rIns="0" bIns="0" rtlCol="0" anchor="ctr"/>
+          <a:lstStyle/>
+          <a:p>
+            <a:pPr indent="0" marL="0">
+              <a:buNone/>
+            </a:pPr>
+            <a:r>
+              <a:rPr lang="en-US" sz="1050" dirty="0">
                 <a:solidFill>
                   <a:srgbClr val="1A1A2E"/>
                 </a:solidFill>
@@ -10440,257 +10858,38 @@
                 <a:ea typeface="Calibri" pitchFamily="34" charset="-122"/>
                 <a:cs typeface="Calibri" pitchFamily="34" charset="-120"/>
               </a:rPr>
-              <a:t>Positive pace → priority fill shifts</a:t>
-            </a:r>
-            <a:endParaRPr lang="en-US" sz="950" dirty="0"/>
-          </a:p>
-        </p:txBody>
-      </p:sp>
-      <p:sp>
-        <p:nvSpPr>
-          <p:cNvPr id="12" name="Shape 10"/>
-          <p:cNvSpPr/>
-          <p:nvPr/>
-        </p:nvSpPr>
-        <p:spPr>
-          <a:xfrm>
-            <a:off x="457200" y="3977640"/>
-            <a:ext cx="3794760" cy="594360"/>
-          </a:xfrm>
-          <a:prstGeom prst="roundRect">
-            <a:avLst>
-              <a:gd name="adj" fmla="val 12308"/>
-            </a:avLst>
-          </a:prstGeom>
-          <a:solidFill>
-            <a:srgbClr val="2D6A4F"/>
-          </a:solidFill>
-          <a:ln w="12700">
-            <a:solidFill>
-              <a:srgbClr val="2D6A4F"/>
-            </a:solidFill>
-            <a:prstDash val="solid"/>
-          </a:ln>
-          <a:effectLst>
-            <a:outerShdw sx="100000" sy="100000" kx="0" ky="0" algn="bl" rotWithShape="0" blurRad="101600" dist="38100" dir="2700000">
-              <a:srgbClr val="000000">
-                <a:alpha val="12000"/>
-              </a:srgbClr>
-            </a:outerShdw>
-          </a:effectLst>
-        </p:spPr>
-      </p:sp>
-      <p:sp>
-        <p:nvSpPr>
-          <p:cNvPr id="13" name="Text 11"/>
-          <p:cNvSpPr/>
-          <p:nvPr/>
-        </p:nvSpPr>
-        <p:spPr>
-          <a:xfrm>
-            <a:off x="594360" y="4005072"/>
-            <a:ext cx="3520440" cy="548640"/>
-          </a:xfrm>
-          <a:prstGeom prst="rect">
-            <a:avLst/>
-          </a:prstGeom>
-          <a:noFill/>
-          <a:ln/>
-        </p:spPr>
-        <p:txBody>
-          <a:bodyPr wrap="square" lIns="0" tIns="0" rIns="0" bIns="0" rtlCol="0" anchor="ctr"/>
-          <a:lstStyle/>
-          <a:p>
-            <a:pPr indent="0" marL="0">
-              <a:buNone/>
-            </a:pPr>
-            <a:r>
-              <a:rPr lang="en-US" sz="950" b="1" dirty="0">
-                <a:solidFill>
-                  <a:srgbClr val="FFFFFF"/>
-                </a:solidFill>
-                <a:latin typeface="Calibri" pitchFamily="34" charset="0"/>
-                <a:ea typeface="Calibri" pitchFamily="34" charset="-122"/>
-                <a:cs typeface="Calibri" pitchFamily="34" charset="-120"/>
-              </a:rPr>
-              <a:t>RESULT: Spread &lt; 1  •  Phase 3 cuma 3× cycle  •  80-90% waktu lebih cepat</a:t>
-            </a:r>
-            <a:endParaRPr lang="en-US" sz="950" dirty="0"/>
-          </a:p>
-        </p:txBody>
-      </p:sp>
-      <p:sp>
-        <p:nvSpPr>
-          <p:cNvPr id="14" name="Shape 12"/>
-          <p:cNvSpPr/>
-          <p:nvPr/>
-        </p:nvSpPr>
-        <p:spPr>
-          <a:xfrm>
-            <a:off x="4754880" y="1005840"/>
-            <a:ext cx="4069080" cy="3703320"/>
-          </a:xfrm>
-          <a:prstGeom prst="roundRect">
-            <a:avLst>
-              <a:gd name="adj" fmla="val 1975"/>
-            </a:avLst>
-          </a:prstGeom>
-          <a:solidFill>
-            <a:srgbClr val="F1F5F9"/>
-          </a:solidFill>
-          <a:ln w="12700">
-            <a:solidFill>
-              <a:srgbClr val="F1F5F9"/>
-            </a:solidFill>
-            <a:prstDash val="solid"/>
-          </a:ln>
-          <a:effectLst>
-            <a:outerShdw sx="100000" sy="100000" kx="0" ky="0" algn="bl" rotWithShape="0" blurRad="101600" dist="38100" dir="2700000">
-              <a:srgbClr val="000000">
-                <a:alpha val="12000"/>
-              </a:srgbClr>
-            </a:outerShdw>
-          </a:effectLst>
-        </p:spPr>
-      </p:sp>
-      <p:sp>
-        <p:nvSpPr>
-          <p:cNvPr id="15" name="Text 13"/>
-          <p:cNvSpPr/>
-          <p:nvPr/>
-        </p:nvSpPr>
-        <p:spPr>
-          <a:xfrm>
-            <a:off x="4892040" y="1078992"/>
-            <a:ext cx="3794760" cy="365760"/>
-          </a:xfrm>
-          <a:prstGeom prst="rect">
-            <a:avLst/>
-          </a:prstGeom>
-          <a:noFill/>
-          <a:ln/>
-        </p:spPr>
-        <p:txBody>
-          <a:bodyPr wrap="square" lIns="0" tIns="0" rIns="0" bIns="0" rtlCol="0" anchor="ctr"/>
-          <a:lstStyle/>
-          <a:p>
-            <a:pPr indent="0" marL="0">
-              <a:buNone/>
-            </a:pPr>
-            <a:r>
-              <a:rPr lang="en-US" sz="1300" b="1" dirty="0">
-                <a:solidFill>
-                  <a:srgbClr val="1B4332"/>
-                </a:solidFill>
-                <a:latin typeface="Cambria" pitchFamily="34" charset="0"/>
-                <a:ea typeface="Cambria" pitchFamily="34" charset="-122"/>
-                <a:cs typeface="Cambria" pitchFamily="34" charset="-120"/>
-              </a:rPr>
-              <a:t>🎯 Request Priority System</a:t>
-            </a:r>
-            <a:endParaRPr lang="en-US" sz="1300" dirty="0"/>
-          </a:p>
-        </p:txBody>
-      </p:sp>
-      <p:sp>
-        <p:nvSpPr>
-          <p:cNvPr id="16" name="Shape 14"/>
-          <p:cNvSpPr/>
-          <p:nvPr/>
-        </p:nvSpPr>
-        <p:spPr>
-          <a:xfrm>
-            <a:off x="4892040" y="1508760"/>
-            <a:ext cx="3794760" cy="1051560"/>
-          </a:xfrm>
-          <a:prstGeom prst="roundRect">
-            <a:avLst>
-              <a:gd name="adj" fmla="val 6957"/>
-            </a:avLst>
-          </a:prstGeom>
-          <a:solidFill>
-            <a:srgbClr val="FEE2E2"/>
-          </a:solidFill>
-          <a:ln w="12700">
-            <a:solidFill>
-              <a:srgbClr val="FEE2E2"/>
-            </a:solidFill>
-            <a:prstDash val="solid"/>
-          </a:ln>
-          <a:effectLst>
-            <a:outerShdw sx="100000" sy="100000" kx="0" ky="0" algn="bl" rotWithShape="0" blurRad="101600" dist="38100" dir="2700000">
-              <a:srgbClr val="000000">
-                <a:alpha val="12000"/>
-              </a:srgbClr>
-            </a:outerShdw>
-          </a:effectLst>
-        </p:spPr>
-      </p:sp>
-      <p:sp>
-        <p:nvSpPr>
-          <p:cNvPr id="17" name="Text 15"/>
-          <p:cNvSpPr/>
-          <p:nvPr/>
-        </p:nvSpPr>
-        <p:spPr>
-          <a:xfrm>
-            <a:off x="5029200" y="1554480"/>
-            <a:ext cx="3520440" cy="256032"/>
-          </a:xfrm>
-          <a:prstGeom prst="rect">
-            <a:avLst/>
-          </a:prstGeom>
-          <a:noFill/>
-          <a:ln/>
-        </p:spPr>
-        <p:txBody>
-          <a:bodyPr wrap="square" lIns="0" tIns="0" rIns="0" bIns="0" rtlCol="0" anchor="ctr"/>
-          <a:lstStyle/>
-          <a:p>
-            <a:pPr indent="0" marL="0">
-              <a:buNone/>
-            </a:pPr>
-            <a:r>
-              <a:rPr lang="en-US" sz="1000" b="1" dirty="0">
-                <a:solidFill>
-                  <a:srgbClr val="DC2626"/>
-                </a:solidFill>
-                <a:latin typeface="Calibri" pitchFamily="34" charset="0"/>
-                <a:ea typeface="Calibri" pitchFamily="34" charset="-122"/>
-                <a:cs typeface="Calibri" pitchFamily="34" charset="-120"/>
-              </a:rPr>
-              <a:t>TIER 1 — ACC (Fixed)</a:t>
-            </a:r>
-            <a:endParaRPr lang="en-US" sz="1000" dirty="0"/>
-          </a:p>
-        </p:txBody>
-      </p:sp>
-      <p:sp>
-        <p:nvSpPr>
-          <p:cNvPr id="18" name="Text 16"/>
-          <p:cNvSpPr/>
-          <p:nvPr/>
-        </p:nvSpPr>
-        <p:spPr>
-          <a:xfrm>
-            <a:off x="5029200" y="1828800"/>
-            <a:ext cx="3520440" cy="658368"/>
-          </a:xfrm>
-          <a:prstGeom prst="rect">
-            <a:avLst/>
-          </a:prstGeom>
-          <a:noFill/>
-          <a:ln/>
-        </p:spPr>
-        <p:txBody>
-          <a:bodyPr wrap="square" lIns="0" tIns="0" rIns="0" bIns="0" rtlCol="0" anchor="ctr"/>
-          <a:lstStyle/>
-          <a:p>
-            <a:pPr indent="0" marL="0">
-              <a:buNone/>
-            </a:pPr>
-            <a:r>
-              <a:rPr lang="en-US" sz="950" dirty="0">
+              <a:t>• Export Excel formatted (3 sheets)</a:t>
+            </a:r>
+            <a:endParaRPr lang="en-US" sz="1050" dirty="0"/>
+          </a:p>
+        </p:txBody>
+      </p:sp>
+      <p:sp>
+        <p:nvSpPr>
+          <p:cNvPr id="21" name="Text 19"/>
+          <p:cNvSpPr/>
+          <p:nvPr/>
+        </p:nvSpPr>
+        <p:spPr>
+          <a:xfrm>
+            <a:off x="6227064" y="3483864"/>
+            <a:ext cx="2395728" cy="594360"/>
+          </a:xfrm>
+          <a:prstGeom prst="rect">
+            <a:avLst/>
+          </a:prstGeom>
+          <a:noFill/>
+          <a:ln/>
+        </p:spPr>
+        <p:txBody>
+          <a:bodyPr wrap="square" lIns="0" tIns="0" rIns="0" bIns="0" rtlCol="0" anchor="ctr"/>
+          <a:lstStyle/>
+          <a:p>
+            <a:pPr indent="0" marL="0">
+              <a:buNone/>
+            </a:pPr>
+            <a:r>
+              <a:rPr lang="en-US" sz="1050" dirty="0">
                 <a:solidFill>
                   <a:srgbClr val="1A1A2E"/>
                 </a:solidFill>
@@ -10698,245 +10897,9 @@
                 <a:ea typeface="Calibri" pitchFamily="34" charset="-122"/>
                 <a:cs typeface="Calibri" pitchFamily="34" charset="-120"/>
               </a:rPr>
-              <a:t>Operator confirm → 100% honored</a:t>
-            </a:r>
-            <a:endParaRPr lang="en-US" sz="950" dirty="0"/>
-          </a:p>
-          <a:p>
-            <a:pPr indent="0" marL="0">
-              <a:buNone/>
-            </a:pPr>
-            <a:r>
-              <a:rPr lang="en-US" sz="950" dirty="0">
-                <a:solidFill>
-                  <a:srgbClr val="1A1A2E"/>
-                </a:solidFill>
-                <a:latin typeface="Calibri" pitchFamily="34" charset="0"/>
-                <a:ea typeface="Calibri" pitchFamily="34" charset="-122"/>
-                <a:cs typeface="Calibri" pitchFamily="34" charset="-120"/>
-              </a:rPr>
-              <a:t>Tidak bisa digeser atau di-random</a:t>
-            </a:r>
-            <a:endParaRPr lang="en-US" sz="950" dirty="0"/>
-          </a:p>
-        </p:txBody>
-      </p:sp>
-      <p:sp>
-        <p:nvSpPr>
-          <p:cNvPr id="19" name="Shape 17"/>
-          <p:cNvSpPr/>
-          <p:nvPr/>
-        </p:nvSpPr>
-        <p:spPr>
-          <a:xfrm>
-            <a:off x="4892040" y="2651760"/>
-            <a:ext cx="3794760" cy="1234440"/>
-          </a:xfrm>
-          <a:prstGeom prst="roundRect">
-            <a:avLst>
-              <a:gd name="adj" fmla="val 5926"/>
-            </a:avLst>
-          </a:prstGeom>
-          <a:solidFill>
-            <a:srgbClr val="FED7AA"/>
-          </a:solidFill>
-          <a:ln w="12700">
-            <a:solidFill>
-              <a:srgbClr val="FED7AA"/>
-            </a:solidFill>
-            <a:prstDash val="solid"/>
-          </a:ln>
-          <a:effectLst>
-            <a:outerShdw sx="100000" sy="100000" kx="0" ky="0" algn="bl" rotWithShape="0" blurRad="101600" dist="38100" dir="2700000">
-              <a:srgbClr val="000000">
-                <a:alpha val="12000"/>
-              </a:srgbClr>
-            </a:outerShdw>
-          </a:effectLst>
-        </p:spPr>
-      </p:sp>
-      <p:sp>
-        <p:nvSpPr>
-          <p:cNvPr id="20" name="Text 18"/>
-          <p:cNvSpPr/>
-          <p:nvPr/>
-        </p:nvSpPr>
-        <p:spPr>
-          <a:xfrm>
-            <a:off x="5029200" y="2715768"/>
-            <a:ext cx="3520440" cy="256032"/>
-          </a:xfrm>
-          <a:prstGeom prst="rect">
-            <a:avLst/>
-          </a:prstGeom>
-          <a:noFill/>
-          <a:ln/>
-        </p:spPr>
-        <p:txBody>
-          <a:bodyPr wrap="square" lIns="0" tIns="0" rIns="0" bIns="0" rtlCol="0" anchor="ctr"/>
-          <a:lstStyle/>
-          <a:p>
-            <a:pPr indent="0" marL="0">
-              <a:buNone/>
-            </a:pPr>
-            <a:r>
-              <a:rPr lang="en-US" sz="1000" b="1" dirty="0">
-                <a:solidFill>
-                  <a:srgbClr val="EA580C"/>
-                </a:solidFill>
-                <a:latin typeface="Calibri" pitchFamily="34" charset="0"/>
-                <a:ea typeface="Calibri" pitchFamily="34" charset="-122"/>
-                <a:cs typeface="Calibri" pitchFamily="34" charset="-120"/>
-              </a:rPr>
-              <a:t>TIER 2 — Pending (Smart)</a:t>
-            </a:r>
-            <a:endParaRPr lang="en-US" sz="1000" dirty="0"/>
-          </a:p>
-        </p:txBody>
-      </p:sp>
-      <p:sp>
-        <p:nvSpPr>
-          <p:cNvPr id="21" name="Text 19"/>
-          <p:cNvSpPr/>
-          <p:nvPr/>
-        </p:nvSpPr>
-        <p:spPr>
-          <a:xfrm>
-            <a:off x="5029200" y="2990088"/>
-            <a:ext cx="3520440" cy="777240"/>
-          </a:xfrm>
-          <a:prstGeom prst="rect">
-            <a:avLst/>
-          </a:prstGeom>
-          <a:noFill/>
-          <a:ln/>
-        </p:spPr>
-        <p:txBody>
-          <a:bodyPr wrap="square" lIns="0" tIns="0" rIns="0" bIns="0" rtlCol="0" anchor="ctr"/>
-          <a:lstStyle/>
-          <a:p>
-            <a:pPr indent="0" marL="0">
-              <a:buNone/>
-            </a:pPr>
-            <a:r>
-              <a:rPr lang="en-US" sz="950" dirty="0">
-                <a:solidFill>
-                  <a:srgbClr val="1A1A2E"/>
-                </a:solidFill>
-                <a:latin typeface="Calibri" pitchFamily="34" charset="0"/>
-                <a:ea typeface="Calibri" pitchFamily="34" charset="-122"/>
-                <a:cs typeface="Calibri" pitchFamily="34" charset="-120"/>
-              </a:rPr>
-              <a:t>Priority acc jika slot ada</a:t>
-            </a:r>
-            <a:endParaRPr lang="en-US" sz="950" dirty="0"/>
-          </a:p>
-          <a:p>
-            <a:pPr indent="0" marL="0">
-              <a:buNone/>
-            </a:pPr>
-            <a:r>
-              <a:rPr lang="en-US" sz="950" dirty="0">
-                <a:solidFill>
-                  <a:srgbClr val="1A1A2E"/>
-                </a:solidFill>
-                <a:latin typeface="Calibri" pitchFamily="34" charset="0"/>
-                <a:ea typeface="Calibri" pitchFamily="34" charset="-122"/>
-                <a:cs typeface="Calibri" pitchFamily="34" charset="-120"/>
-              </a:rPr>
-              <a:t>Jika penuh → random antar peminta</a:t>
-            </a:r>
-            <a:endParaRPr lang="en-US" sz="950" dirty="0"/>
-          </a:p>
-          <a:p>
-            <a:pPr indent="0" marL="0">
-              <a:buNone/>
-            </a:pPr>
-            <a:r>
-              <a:rPr lang="en-US" sz="950" dirty="0">
-                <a:solidFill>
-                  <a:srgbClr val="1A1A2E"/>
-                </a:solidFill>
-                <a:latin typeface="Calibri" pitchFamily="34" charset="0"/>
-                <a:ea typeface="Calibri" pitchFamily="34" charset="-122"/>
-                <a:cs typeface="Calibri" pitchFamily="34" charset="-120"/>
-              </a:rPr>
-              <a:t>Yang kalah: relokasi ke hari lain otomatis</a:t>
-            </a:r>
-            <a:endParaRPr lang="en-US" sz="950" dirty="0"/>
-          </a:p>
-        </p:txBody>
-      </p:sp>
-      <p:sp>
-        <p:nvSpPr>
-          <p:cNvPr id="22" name="Shape 20"/>
-          <p:cNvSpPr/>
-          <p:nvPr/>
-        </p:nvSpPr>
-        <p:spPr>
-          <a:xfrm>
-            <a:off x="4892040" y="3977640"/>
-            <a:ext cx="3794760" cy="594360"/>
-          </a:xfrm>
-          <a:prstGeom prst="roundRect">
-            <a:avLst>
-              <a:gd name="adj" fmla="val 12308"/>
-            </a:avLst>
-          </a:prstGeom>
-          <a:solidFill>
-            <a:srgbClr val="2D6A4F"/>
-          </a:solidFill>
-          <a:ln w="12700">
-            <a:solidFill>
-              <a:srgbClr val="2D6A4F"/>
-            </a:solidFill>
-            <a:prstDash val="solid"/>
-          </a:ln>
-          <a:effectLst>
-            <a:outerShdw sx="100000" sy="100000" kx="0" ky="0" algn="bl" rotWithShape="0" blurRad="101600" dist="38100" dir="2700000">
-              <a:srgbClr val="000000">
-                <a:alpha val="12000"/>
-              </a:srgbClr>
-            </a:outerShdw>
-          </a:effectLst>
-        </p:spPr>
-      </p:sp>
-      <p:sp>
-        <p:nvSpPr>
-          <p:cNvPr id="23" name="Text 21"/>
-          <p:cNvSpPr/>
-          <p:nvPr/>
-        </p:nvSpPr>
-        <p:spPr>
-          <a:xfrm>
-            <a:off x="5029200" y="4005072"/>
-            <a:ext cx="3520440" cy="548640"/>
-          </a:xfrm>
-          <a:prstGeom prst="rect">
-            <a:avLst/>
-          </a:prstGeom>
-          <a:noFill/>
-          <a:ln/>
-        </p:spPr>
-        <p:txBody>
-          <a:bodyPr wrap="square" lIns="0" tIns="0" rIns="0" bIns="0" rtlCol="0" anchor="ctr"/>
-          <a:lstStyle/>
-          <a:p>
-            <a:pPr indent="0" marL="0">
-              <a:buNone/>
-            </a:pPr>
-            <a:r>
-              <a:rPr lang="en-US" sz="950" b="1" dirty="0">
-                <a:solidFill>
-                  <a:srgbClr val="FFFFFF"/>
-                </a:solidFill>
-                <a:latin typeface="Calibri" pitchFamily="34" charset="0"/>
-                <a:ea typeface="Calibri" pitchFamily="34" charset="-122"/>
-                <a:cs typeface="Calibri" pitchFamily="34" charset="-120"/>
-              </a:rPr>
-              <a:t>RESULT: Fair  •  ACC 100%  •  Pending best-effort  •  No conflict</a:t>
-            </a:r>
-            <a:endParaRPr lang="en-US" sz="950" dirty="0"/>
+              <a:t>• Request priority tier (ACC/Pending)</a:t>
+            </a:r>
+            <a:endParaRPr lang="en-US" sz="1050" dirty="0"/>
           </a:p>
         </p:txBody>
       </p:sp>
@@ -11005,7 +10968,7 @@
                 <a:ea typeface="Cambria" pitchFamily="34" charset="-122"/>
                 <a:cs typeface="Cambria" pitchFamily="34" charset="-120"/>
               </a:rPr>
-              <a:t>Conclusion: 3 Pillars</a:t>
+              <a:t>Key Innovation: Pace-Based Sort + Request Priority</a:t>
             </a:r>
             <a:endParaRPr lang="en-US" sz="3000" dirty="0"/>
           </a:p>
@@ -11042,12 +11005,360 @@
         </p:nvSpPr>
         <p:spPr>
           <a:xfrm>
-            <a:off x="365760" y="1005840"/>
-            <a:ext cx="2651760" cy="3291840"/>
+            <a:off x="320040" y="1005840"/>
+            <a:ext cx="4069080" cy="3703320"/>
           </a:xfrm>
           <a:prstGeom prst="roundRect">
             <a:avLst>
-              <a:gd name="adj" fmla="val 2759"/>
+              <a:gd name="adj" fmla="val 1975"/>
+            </a:avLst>
+          </a:prstGeom>
+          <a:solidFill>
+            <a:srgbClr val="F1F5F9"/>
+          </a:solidFill>
+          <a:ln w="12700">
+            <a:solidFill>
+              <a:srgbClr val="F1F5F9"/>
+            </a:solidFill>
+            <a:prstDash val="solid"/>
+          </a:ln>
+          <a:effectLst>
+            <a:outerShdw sx="100000" sy="100000" kx="0" ky="0" algn="bl" rotWithShape="0" blurRad="101600" dist="38100" dir="2700000">
+              <a:srgbClr val="000000">
+                <a:alpha val="12000"/>
+              </a:srgbClr>
+            </a:outerShdw>
+          </a:effectLst>
+        </p:spPr>
+      </p:sp>
+      <p:sp>
+        <p:nvSpPr>
+          <p:cNvPr id="5" name="Text 3"/>
+          <p:cNvSpPr/>
+          <p:nvPr/>
+        </p:nvSpPr>
+        <p:spPr>
+          <a:xfrm>
+            <a:off x="457200" y="1078992"/>
+            <a:ext cx="3794760" cy="365760"/>
+          </a:xfrm>
+          <a:prstGeom prst="rect">
+            <a:avLst/>
+          </a:prstGeom>
+          <a:noFill/>
+          <a:ln/>
+        </p:spPr>
+        <p:txBody>
+          <a:bodyPr wrap="square" lIns="0" tIns="0" rIns="0" bIns="0" rtlCol="0" anchor="ctr"/>
+          <a:lstStyle/>
+          <a:p>
+            <a:pPr indent="0" marL="0">
+              <a:buNone/>
+            </a:pPr>
+            <a:r>
+              <a:rPr lang="en-US" sz="1300" b="1" dirty="0">
+                <a:solidFill>
+                  <a:srgbClr val="1B4332"/>
+                </a:solidFill>
+                <a:latin typeface="Cambria" pitchFamily="34" charset="0"/>
+                <a:ea typeface="Cambria" pitchFamily="34" charset="-122"/>
+                <a:cs typeface="Cambria" pitchFamily="34" charset="-120"/>
+              </a:rPr>
+              <a:t>🏃 Pace-Based Sort</a:t>
+            </a:r>
+            <a:endParaRPr lang="en-US" sz="1300" dirty="0"/>
+          </a:p>
+        </p:txBody>
+      </p:sp>
+      <p:sp>
+        <p:nvSpPr>
+          <p:cNvPr id="6" name="Shape 4"/>
+          <p:cNvSpPr/>
+          <p:nvPr/>
+        </p:nvSpPr>
+        <p:spPr>
+          <a:xfrm>
+            <a:off x="457200" y="1508760"/>
+            <a:ext cx="3794760" cy="1051560"/>
+          </a:xfrm>
+          <a:prstGeom prst="roundRect">
+            <a:avLst>
+              <a:gd name="adj" fmla="val 6957"/>
+            </a:avLst>
+          </a:prstGeom>
+          <a:solidFill>
+            <a:srgbClr val="FEE2E2"/>
+          </a:solidFill>
+          <a:ln w="12700">
+            <a:solidFill>
+              <a:srgbClr val="FEE2E2"/>
+            </a:solidFill>
+            <a:prstDash val="solid"/>
+          </a:ln>
+          <a:effectLst>
+            <a:outerShdw sx="100000" sy="100000" kx="0" ky="0" algn="bl" rotWithShape="0" blurRad="101600" dist="38100" dir="2700000">
+              <a:srgbClr val="000000">
+                <a:alpha val="12000"/>
+              </a:srgbClr>
+            </a:outerShdw>
+          </a:effectLst>
+        </p:spPr>
+      </p:sp>
+      <p:sp>
+        <p:nvSpPr>
+          <p:cNvPr id="7" name="Text 5"/>
+          <p:cNvSpPr/>
+          <p:nvPr/>
+        </p:nvSpPr>
+        <p:spPr>
+          <a:xfrm>
+            <a:off x="594360" y="1554480"/>
+            <a:ext cx="3520440" cy="256032"/>
+          </a:xfrm>
+          <a:prstGeom prst="rect">
+            <a:avLst/>
+          </a:prstGeom>
+          <a:noFill/>
+          <a:ln/>
+        </p:spPr>
+        <p:txBody>
+          <a:bodyPr wrap="square" lIns="0" tIns="0" rIns="0" bIns="0" rtlCol="0" anchor="ctr"/>
+          <a:lstStyle/>
+          <a:p>
+            <a:pPr indent="0" marL="0">
+              <a:buNone/>
+            </a:pPr>
+            <a:r>
+              <a:rPr lang="en-US" sz="1000" b="1" dirty="0">
+                <a:solidFill>
+                  <a:srgbClr val="DC2626"/>
+                </a:solidFill>
+                <a:latin typeface="Calibri" pitchFamily="34" charset="0"/>
+                <a:ea typeface="Calibri" pitchFamily="34" charset="-122"/>
+                <a:cs typeface="Calibri" pitchFamily="34" charset="-120"/>
+              </a:rPr>
+              <a:t>PROBLEM</a:t>
+            </a:r>
+            <a:endParaRPr lang="en-US" sz="1000" dirty="0"/>
+          </a:p>
+        </p:txBody>
+      </p:sp>
+      <p:sp>
+        <p:nvSpPr>
+          <p:cNvPr id="8" name="Text 6"/>
+          <p:cNvSpPr/>
+          <p:nvPr/>
+        </p:nvSpPr>
+        <p:spPr>
+          <a:xfrm>
+            <a:off x="594360" y="1828800"/>
+            <a:ext cx="3520440" cy="658368"/>
+          </a:xfrm>
+          <a:prstGeom prst="rect">
+            <a:avLst/>
+          </a:prstGeom>
+          <a:noFill/>
+          <a:ln/>
+        </p:spPr>
+        <p:txBody>
+          <a:bodyPr wrap="square" lIns="0" tIns="0" rIns="0" bIns="0" rtlCol="0" anchor="ctr"/>
+          <a:lstStyle/>
+          <a:p>
+            <a:pPr indent="0" marL="0">
+              <a:buNone/>
+            </a:pPr>
+            <a:r>
+              <a:rPr lang="en-US" sz="950" dirty="0">
+                <a:solidFill>
+                  <a:srgbClr val="1A1A2E"/>
+                </a:solidFill>
+                <a:latin typeface="Calibri" pitchFamily="34" charset="0"/>
+                <a:ea typeface="Calibri" pitchFamily="34" charset="-122"/>
+                <a:cs typeface="Calibri" pitchFamily="34" charset="-120"/>
+              </a:rPr>
+              <a:t>Random sort → OFF menumpuk di akhir bulan</a:t>
+            </a:r>
+            <a:endParaRPr lang="en-US" sz="950" dirty="0"/>
+          </a:p>
+          <a:p>
+            <a:pPr indent="0" marL="0">
+              <a:buNone/>
+            </a:pPr>
+            <a:r>
+              <a:rPr lang="en-US" sz="950" dirty="0">
+                <a:solidFill>
+                  <a:srgbClr val="1A1A2E"/>
+                </a:solidFill>
+                <a:latin typeface="Calibri" pitchFamily="34" charset="0"/>
+                <a:ea typeface="Calibri" pitchFamily="34" charset="-122"/>
+                <a:cs typeface="Calibri" pitchFamily="34" charset="-120"/>
+              </a:rPr>
+              <a:t>Phase 3 butuh 10+ cycle untuk konvergen</a:t>
+            </a:r>
+            <a:endParaRPr lang="en-US" sz="950" dirty="0"/>
+          </a:p>
+        </p:txBody>
+      </p:sp>
+      <p:sp>
+        <p:nvSpPr>
+          <p:cNvPr id="9" name="Shape 7"/>
+          <p:cNvSpPr/>
+          <p:nvPr/>
+        </p:nvSpPr>
+        <p:spPr>
+          <a:xfrm>
+            <a:off x="457200" y="2651760"/>
+            <a:ext cx="3794760" cy="1234440"/>
+          </a:xfrm>
+          <a:prstGeom prst="roundRect">
+            <a:avLst>
+              <a:gd name="adj" fmla="val 5926"/>
+            </a:avLst>
+          </a:prstGeom>
+          <a:solidFill>
+            <a:srgbClr val="DCFCE7"/>
+          </a:solidFill>
+          <a:ln w="12700">
+            <a:solidFill>
+              <a:srgbClr val="DCFCE7"/>
+            </a:solidFill>
+            <a:prstDash val="solid"/>
+          </a:ln>
+          <a:effectLst>
+            <a:outerShdw sx="100000" sy="100000" kx="0" ky="0" algn="bl" rotWithShape="0" blurRad="101600" dist="38100" dir="2700000">
+              <a:srgbClr val="000000">
+                <a:alpha val="12000"/>
+              </a:srgbClr>
+            </a:outerShdw>
+          </a:effectLst>
+        </p:spPr>
+      </p:sp>
+      <p:sp>
+        <p:nvSpPr>
+          <p:cNvPr id="10" name="Text 8"/>
+          <p:cNvSpPr/>
+          <p:nvPr/>
+        </p:nvSpPr>
+        <p:spPr>
+          <a:xfrm>
+            <a:off x="594360" y="2715768"/>
+            <a:ext cx="3520440" cy="256032"/>
+          </a:xfrm>
+          <a:prstGeom prst="rect">
+            <a:avLst/>
+          </a:prstGeom>
+          <a:noFill/>
+          <a:ln/>
+        </p:spPr>
+        <p:txBody>
+          <a:bodyPr wrap="square" lIns="0" tIns="0" rIns="0" bIns="0" rtlCol="0" anchor="ctr"/>
+          <a:lstStyle/>
+          <a:p>
+            <a:pPr indent="0" marL="0">
+              <a:buNone/>
+            </a:pPr>
+            <a:r>
+              <a:rPr lang="en-US" sz="1000" b="1" dirty="0">
+                <a:solidFill>
+                  <a:srgbClr val="2D6A4F"/>
+                </a:solidFill>
+                <a:latin typeface="Calibri" pitchFamily="34" charset="0"/>
+                <a:ea typeface="Calibri" pitchFamily="34" charset="-122"/>
+                <a:cs typeface="Calibri" pitchFamily="34" charset="-120"/>
+              </a:rPr>
+              <a:t>SOLUTION</a:t>
+            </a:r>
+            <a:endParaRPr lang="en-US" sz="1000" dirty="0"/>
+          </a:p>
+        </p:txBody>
+      </p:sp>
+      <p:sp>
+        <p:nvSpPr>
+          <p:cNvPr id="11" name="Text 9"/>
+          <p:cNvSpPr/>
+          <p:nvPr/>
+        </p:nvSpPr>
+        <p:spPr>
+          <a:xfrm>
+            <a:off x="594360" y="2990088"/>
+            <a:ext cx="3520440" cy="777240"/>
+          </a:xfrm>
+          <a:prstGeom prst="rect">
+            <a:avLst/>
+          </a:prstGeom>
+          <a:noFill/>
+          <a:ln/>
+        </p:spPr>
+        <p:txBody>
+          <a:bodyPr wrap="square" lIns="0" tIns="0" rIns="0" bIns="0" rtlCol="0" anchor="ctr"/>
+          <a:lstStyle/>
+          <a:p>
+            <a:pPr indent="0" marL="0">
+              <a:buNone/>
+            </a:pPr>
+            <a:r>
+              <a:rPr lang="en-US" sz="950" dirty="0">
+                <a:solidFill>
+                  <a:srgbClr val="1A1A2E"/>
+                </a:solidFill>
+                <a:latin typeface="Calibri" pitchFamily="34" charset="0"/>
+                <a:ea typeface="Calibri" pitchFamily="34" charset="-122"/>
+                <a:cs typeface="Calibri" pitchFamily="34" charset="-120"/>
+              </a:rPr>
+              <a:t>OFF Pace = actual rate − target rate</a:t>
+            </a:r>
+            <a:endParaRPr lang="en-US" sz="950" dirty="0"/>
+          </a:p>
+          <a:p>
+            <a:pPr indent="0" marL="0">
+              <a:buNone/>
+            </a:pPr>
+            <a:r>
+              <a:rPr lang="en-US" sz="950" dirty="0">
+                <a:solidFill>
+                  <a:srgbClr val="1A1A2E"/>
+                </a:solidFill>
+                <a:latin typeface="Calibri" pitchFamily="34" charset="0"/>
+                <a:ea typeface="Calibri" pitchFamily="34" charset="-122"/>
+                <a:cs typeface="Calibri" pitchFamily="34" charset="-120"/>
+              </a:rPr>
+              <a:t>Negative pace → priority OFF dari hari 1</a:t>
+            </a:r>
+            <a:endParaRPr lang="en-US" sz="950" dirty="0"/>
+          </a:p>
+          <a:p>
+            <a:pPr indent="0" marL="0">
+              <a:buNone/>
+            </a:pPr>
+            <a:r>
+              <a:rPr lang="en-US" sz="950" dirty="0">
+                <a:solidFill>
+                  <a:srgbClr val="1A1A2E"/>
+                </a:solidFill>
+                <a:latin typeface="Calibri" pitchFamily="34" charset="0"/>
+                <a:ea typeface="Calibri" pitchFamily="34" charset="-122"/>
+                <a:cs typeface="Calibri" pitchFamily="34" charset="-120"/>
+              </a:rPr>
+              <a:t>Positive pace → priority fill shifts</a:t>
+            </a:r>
+            <a:endParaRPr lang="en-US" sz="950" dirty="0"/>
+          </a:p>
+        </p:txBody>
+      </p:sp>
+      <p:sp>
+        <p:nvSpPr>
+          <p:cNvPr id="12" name="Shape 10"/>
+          <p:cNvSpPr/>
+          <p:nvPr/>
+        </p:nvSpPr>
+        <p:spPr>
+          <a:xfrm>
+            <a:off x="457200" y="3977640"/>
+            <a:ext cx="3794760" cy="594360"/>
+          </a:xfrm>
+          <a:prstGeom prst="roundRect">
+            <a:avLst>
+              <a:gd name="adj" fmla="val 12308"/>
             </a:avLst>
           </a:prstGeom>
           <a:solidFill>
@@ -11070,218 +11381,65 @@
       </p:sp>
       <p:sp>
         <p:nvSpPr>
-          <p:cNvPr id="5" name="Text 3"/>
-          <p:cNvSpPr/>
-          <p:nvPr/>
-        </p:nvSpPr>
-        <p:spPr>
-          <a:xfrm>
-            <a:off x="365760" y="1051560"/>
-            <a:ext cx="2651760" cy="594360"/>
-          </a:xfrm>
-          <a:prstGeom prst="rect">
-            <a:avLst/>
-          </a:prstGeom>
-          <a:noFill/>
-          <a:ln/>
-        </p:spPr>
-        <p:txBody>
-          <a:bodyPr wrap="square" lIns="0" tIns="0" rIns="0" bIns="0" rtlCol="0" anchor="ctr"/>
-          <a:lstStyle/>
-          <a:p>
-            <a:pPr algn="ctr" indent="0" marL="0">
-              <a:buNone/>
-            </a:pPr>
-            <a:r>
-              <a:rPr lang="en-US" sz="2800" dirty="0">
-                <a:solidFill>
-                  <a:srgbClr val="000000"/>
-                </a:solidFill>
-              </a:rPr>
-              <a:t>⚙</a:t>
-            </a:r>
-            <a:endParaRPr lang="en-US" sz="2800" dirty="0"/>
-          </a:p>
-        </p:txBody>
-      </p:sp>
-      <p:sp>
-        <p:nvSpPr>
-          <p:cNvPr id="6" name="Text 4"/>
-          <p:cNvSpPr/>
-          <p:nvPr/>
-        </p:nvSpPr>
-        <p:spPr>
-          <a:xfrm>
-            <a:off x="457200" y="1709928"/>
-            <a:ext cx="2468880" cy="411480"/>
-          </a:xfrm>
-          <a:prstGeom prst="rect">
-            <a:avLst/>
-          </a:prstGeom>
-          <a:noFill/>
-          <a:ln/>
-        </p:spPr>
-        <p:txBody>
-          <a:bodyPr wrap="square" lIns="0" tIns="0" rIns="0" bIns="0" rtlCol="0" anchor="ctr"/>
-          <a:lstStyle/>
-          <a:p>
-            <a:pPr algn="ctr" indent="0" marL="0">
-              <a:buNone/>
-            </a:pPr>
-            <a:r>
-              <a:rPr lang="en-US" sz="1300" b="1" dirty="0">
+          <p:cNvPr id="13" name="Text 11"/>
+          <p:cNvSpPr/>
+          <p:nvPr/>
+        </p:nvSpPr>
+        <p:spPr>
+          <a:xfrm>
+            <a:off x="594360" y="4005072"/>
+            <a:ext cx="3520440" cy="548640"/>
+          </a:xfrm>
+          <a:prstGeom prst="rect">
+            <a:avLst/>
+          </a:prstGeom>
+          <a:noFill/>
+          <a:ln/>
+        </p:spPr>
+        <p:txBody>
+          <a:bodyPr wrap="square" lIns="0" tIns="0" rIns="0" bIns="0" rtlCol="0" anchor="ctr"/>
+          <a:lstStyle/>
+          <a:p>
+            <a:pPr indent="0" marL="0">
+              <a:buNone/>
+            </a:pPr>
+            <a:r>
+              <a:rPr lang="en-US" sz="950" b="1" dirty="0">
                 <a:solidFill>
                   <a:srgbClr val="FFFFFF"/>
                 </a:solidFill>
-                <a:latin typeface="Cambria" pitchFamily="34" charset="0"/>
-                <a:ea typeface="Cambria" pitchFamily="34" charset="-122"/>
-                <a:cs typeface="Cambria" pitchFamily="34" charset="-120"/>
-              </a:rPr>
-              <a:t>SOLID AUTOMATION</a:t>
-            </a:r>
-            <a:endParaRPr lang="en-US" sz="1300" dirty="0"/>
-          </a:p>
-        </p:txBody>
-      </p:sp>
-      <p:sp>
-        <p:nvSpPr>
-          <p:cNvPr id="7" name="Text 5"/>
-          <p:cNvSpPr/>
-          <p:nvPr/>
-        </p:nvSpPr>
-        <p:spPr>
-          <a:xfrm>
-            <a:off x="548640" y="2212848"/>
-            <a:ext cx="2286000" cy="502920"/>
-          </a:xfrm>
-          <a:prstGeom prst="rect">
-            <a:avLst/>
-          </a:prstGeom>
-          <a:noFill/>
-          <a:ln/>
-        </p:spPr>
-        <p:txBody>
-          <a:bodyPr wrap="square" lIns="0" tIns="0" rIns="0" bIns="0" rtlCol="0" anchor="ctr"/>
-          <a:lstStyle/>
-          <a:p>
-            <a:pPr indent="0" marL="0">
-              <a:buNone/>
-            </a:pPr>
-            <a:r>
-              <a:rPr lang="en-US" sz="1050" dirty="0">
-                <a:solidFill>
-                  <a:srgbClr val="D1FAE5"/>
-                </a:solidFill>
-                <a:latin typeface="Calibri" pitchFamily="34" charset="0"/>
-                <a:ea typeface="Calibri" pitchFamily="34" charset="-122"/>
-                <a:cs typeface="Calibri" pitchFamily="34" charset="-120"/>
-              </a:rPr>
-              <a:t>✓ Deterministic solver (bukan AI)</a:t>
-            </a:r>
-            <a:endParaRPr lang="en-US" sz="1050" dirty="0"/>
-          </a:p>
-        </p:txBody>
-      </p:sp>
-      <p:sp>
-        <p:nvSpPr>
-          <p:cNvPr id="8" name="Text 6"/>
-          <p:cNvSpPr/>
-          <p:nvPr/>
-        </p:nvSpPr>
-        <p:spPr>
-          <a:xfrm>
-            <a:off x="548640" y="2761488"/>
-            <a:ext cx="2286000" cy="502920"/>
-          </a:xfrm>
-          <a:prstGeom prst="rect">
-            <a:avLst/>
-          </a:prstGeom>
-          <a:noFill/>
-          <a:ln/>
-        </p:spPr>
-        <p:txBody>
-          <a:bodyPr wrap="square" lIns="0" tIns="0" rIns="0" bIns="0" rtlCol="0" anchor="ctr"/>
-          <a:lstStyle/>
-          <a:p>
-            <a:pPr indent="0" marL="0">
-              <a:buNone/>
-            </a:pPr>
-            <a:r>
-              <a:rPr lang="en-US" sz="1050" dirty="0">
-                <a:solidFill>
-                  <a:srgbClr val="D1FAE5"/>
-                </a:solidFill>
-                <a:latin typeface="Calibri" pitchFamily="34" charset="0"/>
-                <a:ea typeface="Calibri" pitchFamily="34" charset="-122"/>
-                <a:cs typeface="Calibri" pitchFamily="34" charset="-120"/>
-              </a:rPr>
-              <a:t>✓ Repeatable, explainable, auditable</a:t>
-            </a:r>
-            <a:endParaRPr lang="en-US" sz="1050" dirty="0"/>
-          </a:p>
-        </p:txBody>
-      </p:sp>
-      <p:sp>
-        <p:nvSpPr>
-          <p:cNvPr id="9" name="Text 7"/>
-          <p:cNvSpPr/>
-          <p:nvPr/>
-        </p:nvSpPr>
-        <p:spPr>
-          <a:xfrm>
-            <a:off x="548640" y="3310128"/>
-            <a:ext cx="2286000" cy="502920"/>
-          </a:xfrm>
-          <a:prstGeom prst="rect">
-            <a:avLst/>
-          </a:prstGeom>
-          <a:noFill/>
-          <a:ln/>
-        </p:spPr>
-        <p:txBody>
-          <a:bodyPr wrap="square" lIns="0" tIns="0" rIns="0" bIns="0" rtlCol="0" anchor="ctr"/>
-          <a:lstStyle/>
-          <a:p>
-            <a:pPr indent="0" marL="0">
-              <a:buNone/>
-            </a:pPr>
-            <a:r>
-              <a:rPr lang="en-US" sz="1050" dirty="0">
-                <a:solidFill>
-                  <a:srgbClr val="D1FAE5"/>
-                </a:solidFill>
-                <a:latin typeface="Calibri" pitchFamily="34" charset="0"/>
-                <a:ea typeface="Calibri" pitchFamily="34" charset="-122"/>
-                <a:cs typeface="Calibri" pitchFamily="34" charset="-120"/>
-              </a:rPr>
-              <a:t>✓ 4-Phase constraint engine</a:t>
-            </a:r>
-            <a:endParaRPr lang="en-US" sz="1050" dirty="0"/>
-          </a:p>
-        </p:txBody>
-      </p:sp>
-      <p:sp>
-        <p:nvSpPr>
-          <p:cNvPr id="10" name="Shape 8"/>
-          <p:cNvSpPr/>
-          <p:nvPr/>
-        </p:nvSpPr>
-        <p:spPr>
-          <a:xfrm>
-            <a:off x="3227832" y="1005840"/>
-            <a:ext cx="2651760" cy="3291840"/>
+                <a:latin typeface="Calibri" pitchFamily="34" charset="0"/>
+                <a:ea typeface="Calibri" pitchFamily="34" charset="-122"/>
+                <a:cs typeface="Calibri" pitchFamily="34" charset="-120"/>
+              </a:rPr>
+              <a:t>RESULT: Spread &lt; 1  •  Phase 3 cuma 3× cycle  •  80-90% waktu lebih cepat</a:t>
+            </a:r>
+            <a:endParaRPr lang="en-US" sz="950" dirty="0"/>
+          </a:p>
+        </p:txBody>
+      </p:sp>
+      <p:sp>
+        <p:nvSpPr>
+          <p:cNvPr id="14" name="Shape 12"/>
+          <p:cNvSpPr/>
+          <p:nvPr/>
+        </p:nvSpPr>
+        <p:spPr>
+          <a:xfrm>
+            <a:off x="4754880" y="1005840"/>
+            <a:ext cx="4069080" cy="3703320"/>
           </a:xfrm>
           <a:prstGeom prst="roundRect">
             <a:avLst>
-              <a:gd name="adj" fmla="val 2759"/>
+              <a:gd name="adj" fmla="val 1975"/>
             </a:avLst>
           </a:prstGeom>
           <a:solidFill>
-            <a:srgbClr val="2563EB"/>
+            <a:srgbClr val="F1F5F9"/>
           </a:solidFill>
           <a:ln w="12700">
             <a:solidFill>
-              <a:srgbClr val="2563EB"/>
+              <a:srgbClr val="F1F5F9"/>
             </a:solidFill>
             <a:prstDash val="solid"/>
           </a:ln>
@@ -11296,74 +11454,38 @@
       </p:sp>
       <p:sp>
         <p:nvSpPr>
-          <p:cNvPr id="11" name="Text 9"/>
-          <p:cNvSpPr/>
-          <p:nvPr/>
-        </p:nvSpPr>
-        <p:spPr>
-          <a:xfrm>
-            <a:off x="3227832" y="1051560"/>
-            <a:ext cx="2651760" cy="594360"/>
-          </a:xfrm>
-          <a:prstGeom prst="rect">
-            <a:avLst/>
-          </a:prstGeom>
-          <a:noFill/>
-          <a:ln/>
-        </p:spPr>
-        <p:txBody>
-          <a:bodyPr wrap="square" lIns="0" tIns="0" rIns="0" bIns="0" rtlCol="0" anchor="ctr"/>
-          <a:lstStyle/>
-          <a:p>
-            <a:pPr algn="ctr" indent="0" marL="0">
-              <a:buNone/>
-            </a:pPr>
-            <a:r>
-              <a:rPr lang="en-US" sz="2800" dirty="0">
-                <a:solidFill>
-                  <a:srgbClr val="000000"/>
-                </a:solidFill>
-              </a:rPr>
-              <a:t>📋</a:t>
-            </a:r>
-            <a:endParaRPr lang="en-US" sz="2800" dirty="0"/>
-          </a:p>
-        </p:txBody>
-      </p:sp>
-      <p:sp>
-        <p:nvSpPr>
-          <p:cNvPr id="12" name="Text 10"/>
-          <p:cNvSpPr/>
-          <p:nvPr/>
-        </p:nvSpPr>
-        <p:spPr>
-          <a:xfrm>
-            <a:off x="3319272" y="1709928"/>
-            <a:ext cx="2468880" cy="411480"/>
-          </a:xfrm>
-          <a:prstGeom prst="rect">
-            <a:avLst/>
-          </a:prstGeom>
-          <a:noFill/>
-          <a:ln/>
-        </p:spPr>
-        <p:txBody>
-          <a:bodyPr wrap="square" lIns="0" tIns="0" rIns="0" bIns="0" rtlCol="0" anchor="ctr"/>
-          <a:lstStyle/>
-          <a:p>
-            <a:pPr algn="ctr" indent="0" marL="0">
+          <p:cNvPr id="15" name="Text 13"/>
+          <p:cNvSpPr/>
+          <p:nvPr/>
+        </p:nvSpPr>
+        <p:spPr>
+          <a:xfrm>
+            <a:off x="4892040" y="1078992"/>
+            <a:ext cx="3794760" cy="365760"/>
+          </a:xfrm>
+          <a:prstGeom prst="rect">
+            <a:avLst/>
+          </a:prstGeom>
+          <a:noFill/>
+          <a:ln/>
+        </p:spPr>
+        <p:txBody>
+          <a:bodyPr wrap="square" lIns="0" tIns="0" rIns="0" bIns="0" rtlCol="0" anchor="ctr"/>
+          <a:lstStyle/>
+          <a:p>
+            <a:pPr indent="0" marL="0">
               <a:buNone/>
             </a:pPr>
             <a:r>
               <a:rPr lang="en-US" sz="1300" b="1" dirty="0">
                 <a:solidFill>
-                  <a:srgbClr val="FFFFFF"/>
+                  <a:srgbClr val="1B4332"/>
                 </a:solidFill>
                 <a:latin typeface="Cambria" pitchFamily="34" charset="0"/>
                 <a:ea typeface="Cambria" pitchFamily="34" charset="-122"/>
                 <a:cs typeface="Cambria" pitchFamily="34" charset="-120"/>
               </a:rPr>
-              <a:t>RULE-DRIVEN DESIGN</a:t>
+              <a:t>🎯 Request Priority System</a:t>
             </a:r>
             <a:endParaRPr lang="en-US" sz="1300" dirty="0"/>
           </a:p>
@@ -11371,143 +11493,26 @@
       </p:sp>
       <p:sp>
         <p:nvSpPr>
-          <p:cNvPr id="13" name="Text 11"/>
-          <p:cNvSpPr/>
-          <p:nvPr/>
-        </p:nvSpPr>
-        <p:spPr>
-          <a:xfrm>
-            <a:off x="3410712" y="2212848"/>
-            <a:ext cx="2286000" cy="502920"/>
-          </a:xfrm>
-          <a:prstGeom prst="rect">
-            <a:avLst/>
-          </a:prstGeom>
-          <a:noFill/>
-          <a:ln/>
-        </p:spPr>
-        <p:txBody>
-          <a:bodyPr wrap="square" lIns="0" tIns="0" rIns="0" bIns="0" rtlCol="0" anchor="ctr"/>
-          <a:lstStyle/>
-          <a:p>
-            <a:pPr indent="0" marL="0">
-              <a:buNone/>
-            </a:pPr>
-            <a:r>
-              <a:rPr lang="en-US" sz="1050" dirty="0">
-                <a:solidFill>
-                  <a:srgbClr val="D1FAE5"/>
-                </a:solidFill>
-                <a:latin typeface="Calibri" pitchFamily="34" charset="0"/>
-                <a:ea typeface="Calibri" pitchFamily="34" charset="-122"/>
-                <a:cs typeface="Calibri" pitchFamily="34" charset="-120"/>
-              </a:rPr>
-              <a:t>✓ 14 business rules terintegrasi</a:t>
-            </a:r>
-            <a:endParaRPr lang="en-US" sz="1050" dirty="0"/>
-          </a:p>
-        </p:txBody>
-      </p:sp>
-      <p:sp>
-        <p:nvSpPr>
-          <p:cNvPr id="14" name="Text 12"/>
-          <p:cNvSpPr/>
-          <p:nvPr/>
-        </p:nvSpPr>
-        <p:spPr>
-          <a:xfrm>
-            <a:off x="3410712" y="2761488"/>
-            <a:ext cx="2286000" cy="502920"/>
-          </a:xfrm>
-          <a:prstGeom prst="rect">
-            <a:avLst/>
-          </a:prstGeom>
-          <a:noFill/>
-          <a:ln/>
-        </p:spPr>
-        <p:txBody>
-          <a:bodyPr wrap="square" lIns="0" tIns="0" rIns="0" bIns="0" rtlCol="0" anchor="ctr"/>
-          <a:lstStyle/>
-          <a:p>
-            <a:pPr indent="0" marL="0">
-              <a:buNone/>
-            </a:pPr>
-            <a:r>
-              <a:rPr lang="en-US" sz="1050" dirty="0">
-                <a:solidFill>
-                  <a:srgbClr val="D1FAE5"/>
-                </a:solidFill>
-                <a:latin typeface="Calibri" pitchFamily="34" charset="0"/>
-                <a:ea typeface="Calibri" pitchFamily="34" charset="-122"/>
-                <a:cs typeface="Calibri" pitchFamily="34" charset="-120"/>
-              </a:rPr>
-              <a:t>✓ Cross-month carry-over detection</a:t>
-            </a:r>
-            <a:endParaRPr lang="en-US" sz="1050" dirty="0"/>
-          </a:p>
-        </p:txBody>
-      </p:sp>
-      <p:sp>
-        <p:nvSpPr>
-          <p:cNvPr id="15" name="Text 13"/>
-          <p:cNvSpPr/>
-          <p:nvPr/>
-        </p:nvSpPr>
-        <p:spPr>
-          <a:xfrm>
-            <a:off x="3410712" y="3310128"/>
-            <a:ext cx="2286000" cy="502920"/>
-          </a:xfrm>
-          <a:prstGeom prst="rect">
-            <a:avLst/>
-          </a:prstGeom>
-          <a:noFill/>
-          <a:ln/>
-        </p:spPr>
-        <p:txBody>
-          <a:bodyPr wrap="square" lIns="0" tIns="0" rIns="0" bIns="0" rtlCol="0" anchor="ctr"/>
-          <a:lstStyle/>
-          <a:p>
-            <a:pPr indent="0" marL="0">
-              <a:buNone/>
-            </a:pPr>
-            <a:r>
-              <a:rPr lang="en-US" sz="1050" dirty="0">
-                <a:solidFill>
-                  <a:srgbClr val="D1FAE5"/>
-                </a:solidFill>
-                <a:latin typeface="Calibri" pitchFamily="34" charset="0"/>
-                <a:ea typeface="Calibri" pitchFamily="34" charset="-122"/>
-                <a:cs typeface="Calibri" pitchFamily="34" charset="-120"/>
-              </a:rPr>
-              <a:t>✓ Config save/load JSON</a:t>
-            </a:r>
-            <a:endParaRPr lang="en-US" sz="1050" dirty="0"/>
-          </a:p>
-        </p:txBody>
-      </p:sp>
-      <p:sp>
-        <p:nvSpPr>
           <p:cNvPr id="16" name="Shape 14"/>
           <p:cNvSpPr/>
           <p:nvPr/>
         </p:nvSpPr>
         <p:spPr>
           <a:xfrm>
-            <a:off x="6089904" y="1005840"/>
-            <a:ext cx="2651760" cy="3291840"/>
+            <a:off x="4892040" y="1508760"/>
+            <a:ext cx="3794760" cy="1051560"/>
           </a:xfrm>
           <a:prstGeom prst="roundRect">
             <a:avLst>
-              <a:gd name="adj" fmla="val 2759"/>
+              <a:gd name="adj" fmla="val 6957"/>
             </a:avLst>
           </a:prstGeom>
           <a:solidFill>
-            <a:srgbClr val="EA580C"/>
+            <a:srgbClr val="FEE2E2"/>
           </a:solidFill>
           <a:ln w="12700">
             <a:solidFill>
-              <a:srgbClr val="EA580C"/>
+              <a:srgbClr val="FEE2E2"/>
             </a:solidFill>
             <a:prstDash val="solid"/>
           </a:ln>
@@ -11528,31 +11533,34 @@
         </p:nvSpPr>
         <p:spPr>
           <a:xfrm>
-            <a:off x="6089904" y="1051560"/>
-            <a:ext cx="2651760" cy="594360"/>
-          </a:xfrm>
-          <a:prstGeom prst="rect">
-            <a:avLst/>
-          </a:prstGeom>
-          <a:noFill/>
-          <a:ln/>
-        </p:spPr>
-        <p:txBody>
-          <a:bodyPr wrap="square" lIns="0" tIns="0" rIns="0" bIns="0" rtlCol="0" anchor="ctr"/>
-          <a:lstStyle/>
-          <a:p>
-            <a:pPr algn="ctr" indent="0" marL="0">
-              <a:buNone/>
-            </a:pPr>
-            <a:r>
-              <a:rPr lang="en-US" sz="2800" dirty="0">
-                <a:solidFill>
-                  <a:srgbClr val="000000"/>
-                </a:solidFill>
-              </a:rPr>
-              <a:t>⚡</a:t>
-            </a:r>
-            <a:endParaRPr lang="en-US" sz="2800" dirty="0"/>
+            <a:off x="5029200" y="1554480"/>
+            <a:ext cx="3520440" cy="256032"/>
+          </a:xfrm>
+          <a:prstGeom prst="rect">
+            <a:avLst/>
+          </a:prstGeom>
+          <a:noFill/>
+          <a:ln/>
+        </p:spPr>
+        <p:txBody>
+          <a:bodyPr wrap="square" lIns="0" tIns="0" rIns="0" bIns="0" rtlCol="0" anchor="ctr"/>
+          <a:lstStyle/>
+          <a:p>
+            <a:pPr indent="0" marL="0">
+              <a:buNone/>
+            </a:pPr>
+            <a:r>
+              <a:rPr lang="en-US" sz="1000" b="1" dirty="0">
+                <a:solidFill>
+                  <a:srgbClr val="DC2626"/>
+                </a:solidFill>
+                <a:latin typeface="Calibri" pitchFamily="34" charset="0"/>
+                <a:ea typeface="Calibri" pitchFamily="34" charset="-122"/>
+                <a:cs typeface="Calibri" pitchFamily="34" charset="-120"/>
+              </a:rPr>
+              <a:t>TIER 1 — ACC (Fixed)</a:t>
+            </a:r>
+            <a:endParaRPr lang="en-US" sz="1000" dirty="0"/>
           </a:p>
         </p:txBody>
       </p:sp>
@@ -11564,176 +11572,76 @@
         </p:nvSpPr>
         <p:spPr>
           <a:xfrm>
-            <a:off x="6181344" y="1709928"/>
-            <a:ext cx="2468880" cy="411480"/>
-          </a:xfrm>
-          <a:prstGeom prst="rect">
-            <a:avLst/>
-          </a:prstGeom>
-          <a:noFill/>
-          <a:ln/>
-        </p:spPr>
-        <p:txBody>
-          <a:bodyPr wrap="square" lIns="0" tIns="0" rIns="0" bIns="0" rtlCol="0" anchor="ctr"/>
-          <a:lstStyle/>
-          <a:p>
-            <a:pPr algn="ctr" indent="0" marL="0">
-              <a:buNone/>
-            </a:pPr>
-            <a:r>
-              <a:rPr lang="en-US" sz="1300" b="1" dirty="0">
-                <a:solidFill>
-                  <a:srgbClr val="FFFFFF"/>
-                </a:solidFill>
-                <a:latin typeface="Cambria" pitchFamily="34" charset="0"/>
-                <a:ea typeface="Cambria" pitchFamily="34" charset="-122"/>
-                <a:cs typeface="Cambria" pitchFamily="34" charset="-120"/>
-              </a:rPr>
-              <a:t>FAST &amp; FAIR</a:t>
-            </a:r>
-            <a:endParaRPr lang="en-US" sz="1300" dirty="0"/>
-          </a:p>
-        </p:txBody>
-      </p:sp>
-      <p:sp>
-        <p:nvSpPr>
-          <p:cNvPr id="19" name="Text 17"/>
-          <p:cNvSpPr/>
-          <p:nvPr/>
-        </p:nvSpPr>
-        <p:spPr>
-          <a:xfrm>
-            <a:off x="6272784" y="2212848"/>
-            <a:ext cx="2286000" cy="502920"/>
-          </a:xfrm>
-          <a:prstGeom prst="rect">
-            <a:avLst/>
-          </a:prstGeom>
-          <a:noFill/>
-          <a:ln/>
-        </p:spPr>
-        <p:txBody>
-          <a:bodyPr wrap="square" lIns="0" tIns="0" rIns="0" bIns="0" rtlCol="0" anchor="ctr"/>
-          <a:lstStyle/>
-          <a:p>
-            <a:pPr indent="0" marL="0">
-              <a:buNone/>
-            </a:pPr>
-            <a:r>
-              <a:rPr lang="en-US" sz="1050" dirty="0">
-                <a:solidFill>
-                  <a:srgbClr val="D1FAE5"/>
-                </a:solidFill>
-                <a:latin typeface="Calibri" pitchFamily="34" charset="0"/>
-                <a:ea typeface="Calibri" pitchFamily="34" charset="-122"/>
-                <a:cs typeface="Calibri" pitchFamily="34" charset="-120"/>
-              </a:rPr>
-              <a:t>✓ &lt; 5 detik vs 4-8 jam manual</a:t>
-            </a:r>
-            <a:endParaRPr lang="en-US" sz="1050" dirty="0"/>
-          </a:p>
-        </p:txBody>
-      </p:sp>
-      <p:sp>
-        <p:nvSpPr>
-          <p:cNvPr id="20" name="Text 18"/>
-          <p:cNvSpPr/>
-          <p:nvPr/>
-        </p:nvSpPr>
-        <p:spPr>
-          <a:xfrm>
-            <a:off x="6272784" y="2761488"/>
-            <a:ext cx="2286000" cy="502920"/>
-          </a:xfrm>
-          <a:prstGeom prst="rect">
-            <a:avLst/>
-          </a:prstGeom>
-          <a:noFill/>
-          <a:ln/>
-        </p:spPr>
-        <p:txBody>
-          <a:bodyPr wrap="square" lIns="0" tIns="0" rIns="0" bIns="0" rtlCol="0" anchor="ctr"/>
-          <a:lstStyle/>
-          <a:p>
-            <a:pPr indent="0" marL="0">
-              <a:buNone/>
-            </a:pPr>
-            <a:r>
-              <a:rPr lang="en-US" sz="1050" dirty="0">
-                <a:solidFill>
-                  <a:srgbClr val="D1FAE5"/>
-                </a:solidFill>
-                <a:latin typeface="Calibri" pitchFamily="34" charset="0"/>
-                <a:ea typeface="Calibri" pitchFamily="34" charset="-122"/>
-                <a:cs typeface="Calibri" pitchFamily="34" charset="-120"/>
-              </a:rPr>
-              <a:t>✓ Mathematically balanced</a:t>
-            </a:r>
-            <a:endParaRPr lang="en-US" sz="1050" dirty="0"/>
-          </a:p>
-        </p:txBody>
-      </p:sp>
-      <p:sp>
-        <p:nvSpPr>
-          <p:cNvPr id="21" name="Text 19"/>
-          <p:cNvSpPr/>
-          <p:nvPr/>
-        </p:nvSpPr>
-        <p:spPr>
-          <a:xfrm>
-            <a:off x="6272784" y="3310128"/>
-            <a:ext cx="2286000" cy="502920"/>
-          </a:xfrm>
-          <a:prstGeom prst="rect">
-            <a:avLst/>
-          </a:prstGeom>
-          <a:noFill/>
-          <a:ln/>
-        </p:spPr>
-        <p:txBody>
-          <a:bodyPr wrap="square" lIns="0" tIns="0" rIns="0" bIns="0" rtlCol="0" anchor="ctr"/>
-          <a:lstStyle/>
-          <a:p>
-            <a:pPr indent="0" marL="0">
-              <a:buNone/>
-            </a:pPr>
-            <a:r>
-              <a:rPr lang="en-US" sz="1050" dirty="0">
-                <a:solidFill>
-                  <a:srgbClr val="D1FAE5"/>
-                </a:solidFill>
-                <a:latin typeface="Calibri" pitchFamily="34" charset="0"/>
-                <a:ea typeface="Calibri" pitchFamily="34" charset="-122"/>
-                <a:cs typeface="Calibri" pitchFamily="34" charset="-120"/>
-              </a:rPr>
-              <a:t>✓ Request priority tier system</a:t>
-            </a:r>
-            <a:endParaRPr lang="en-US" sz="1050" dirty="0"/>
-          </a:p>
-        </p:txBody>
-      </p:sp>
-      <p:sp>
-        <p:nvSpPr>
-          <p:cNvPr id="22" name="Shape 20"/>
-          <p:cNvSpPr/>
-          <p:nvPr/>
-        </p:nvSpPr>
-        <p:spPr>
-          <a:xfrm>
-            <a:off x="365760" y="4407408"/>
-            <a:ext cx="8412480" cy="594360"/>
+            <a:off x="5029200" y="1828800"/>
+            <a:ext cx="3520440" cy="658368"/>
+          </a:xfrm>
+          <a:prstGeom prst="rect">
+            <a:avLst/>
+          </a:prstGeom>
+          <a:noFill/>
+          <a:ln/>
+        </p:spPr>
+        <p:txBody>
+          <a:bodyPr wrap="square" lIns="0" tIns="0" rIns="0" bIns="0" rtlCol="0" anchor="ctr"/>
+          <a:lstStyle/>
+          <a:p>
+            <a:pPr indent="0" marL="0">
+              <a:buNone/>
+            </a:pPr>
+            <a:r>
+              <a:rPr lang="en-US" sz="950" dirty="0">
+                <a:solidFill>
+                  <a:srgbClr val="1A1A2E"/>
+                </a:solidFill>
+                <a:latin typeface="Calibri" pitchFamily="34" charset="0"/>
+                <a:ea typeface="Calibri" pitchFamily="34" charset="-122"/>
+                <a:cs typeface="Calibri" pitchFamily="34" charset="-120"/>
+              </a:rPr>
+              <a:t>Operator confirm → 100% honored</a:t>
+            </a:r>
+            <a:endParaRPr lang="en-US" sz="950" dirty="0"/>
+          </a:p>
+          <a:p>
+            <a:pPr indent="0" marL="0">
+              <a:buNone/>
+            </a:pPr>
+            <a:r>
+              <a:rPr lang="en-US" sz="950" dirty="0">
+                <a:solidFill>
+                  <a:srgbClr val="1A1A2E"/>
+                </a:solidFill>
+                <a:latin typeface="Calibri" pitchFamily="34" charset="0"/>
+                <a:ea typeface="Calibri" pitchFamily="34" charset="-122"/>
+                <a:cs typeface="Calibri" pitchFamily="34" charset="-120"/>
+              </a:rPr>
+              <a:t>Tidak bisa digeser atau di-random</a:t>
+            </a:r>
+            <a:endParaRPr lang="en-US" sz="950" dirty="0"/>
+          </a:p>
+        </p:txBody>
+      </p:sp>
+      <p:sp>
+        <p:nvSpPr>
+          <p:cNvPr id="19" name="Shape 17"/>
+          <p:cNvSpPr/>
+          <p:nvPr/>
+        </p:nvSpPr>
+        <p:spPr>
+          <a:xfrm>
+            <a:off x="4892040" y="2651760"/>
+            <a:ext cx="3794760" cy="1234440"/>
           </a:xfrm>
           <a:prstGeom prst="roundRect">
             <a:avLst>
-              <a:gd name="adj" fmla="val 12308"/>
+              <a:gd name="adj" fmla="val 5926"/>
             </a:avLst>
           </a:prstGeom>
           <a:solidFill>
-            <a:srgbClr val="1B4332"/>
+            <a:srgbClr val="FED7AA"/>
           </a:solidFill>
           <a:ln w="12700">
             <a:solidFill>
-              <a:srgbClr val="1B4332"/>
+              <a:srgbClr val="FED7AA"/>
             </a:solidFill>
             <a:prstDash val="solid"/>
           </a:ln>
@@ -11748,40 +11656,186 @@
       </p:sp>
       <p:sp>
         <p:nvSpPr>
+          <p:cNvPr id="20" name="Text 18"/>
+          <p:cNvSpPr/>
+          <p:nvPr/>
+        </p:nvSpPr>
+        <p:spPr>
+          <a:xfrm>
+            <a:off x="5029200" y="2715768"/>
+            <a:ext cx="3520440" cy="256032"/>
+          </a:xfrm>
+          <a:prstGeom prst="rect">
+            <a:avLst/>
+          </a:prstGeom>
+          <a:noFill/>
+          <a:ln/>
+        </p:spPr>
+        <p:txBody>
+          <a:bodyPr wrap="square" lIns="0" tIns="0" rIns="0" bIns="0" rtlCol="0" anchor="ctr"/>
+          <a:lstStyle/>
+          <a:p>
+            <a:pPr indent="0" marL="0">
+              <a:buNone/>
+            </a:pPr>
+            <a:r>
+              <a:rPr lang="en-US" sz="1000" b="1" dirty="0">
+                <a:solidFill>
+                  <a:srgbClr val="EA580C"/>
+                </a:solidFill>
+                <a:latin typeface="Calibri" pitchFamily="34" charset="0"/>
+                <a:ea typeface="Calibri" pitchFamily="34" charset="-122"/>
+                <a:cs typeface="Calibri" pitchFamily="34" charset="-120"/>
+              </a:rPr>
+              <a:t>TIER 2 — Pending (Smart)</a:t>
+            </a:r>
+            <a:endParaRPr lang="en-US" sz="1000" dirty="0"/>
+          </a:p>
+        </p:txBody>
+      </p:sp>
+      <p:sp>
+        <p:nvSpPr>
+          <p:cNvPr id="21" name="Text 19"/>
+          <p:cNvSpPr/>
+          <p:nvPr/>
+        </p:nvSpPr>
+        <p:spPr>
+          <a:xfrm>
+            <a:off x="5029200" y="2990088"/>
+            <a:ext cx="3520440" cy="777240"/>
+          </a:xfrm>
+          <a:prstGeom prst="rect">
+            <a:avLst/>
+          </a:prstGeom>
+          <a:noFill/>
+          <a:ln/>
+        </p:spPr>
+        <p:txBody>
+          <a:bodyPr wrap="square" lIns="0" tIns="0" rIns="0" bIns="0" rtlCol="0" anchor="ctr"/>
+          <a:lstStyle/>
+          <a:p>
+            <a:pPr indent="0" marL="0">
+              <a:buNone/>
+            </a:pPr>
+            <a:r>
+              <a:rPr lang="en-US" sz="950" dirty="0">
+                <a:solidFill>
+                  <a:srgbClr val="1A1A2E"/>
+                </a:solidFill>
+                <a:latin typeface="Calibri" pitchFamily="34" charset="0"/>
+                <a:ea typeface="Calibri" pitchFamily="34" charset="-122"/>
+                <a:cs typeface="Calibri" pitchFamily="34" charset="-120"/>
+              </a:rPr>
+              <a:t>Priority acc jika slot ada</a:t>
+            </a:r>
+            <a:endParaRPr lang="en-US" sz="950" dirty="0"/>
+          </a:p>
+          <a:p>
+            <a:pPr indent="0" marL="0">
+              <a:buNone/>
+            </a:pPr>
+            <a:r>
+              <a:rPr lang="en-US" sz="950" dirty="0">
+                <a:solidFill>
+                  <a:srgbClr val="1A1A2E"/>
+                </a:solidFill>
+                <a:latin typeface="Calibri" pitchFamily="34" charset="0"/>
+                <a:ea typeface="Calibri" pitchFamily="34" charset="-122"/>
+                <a:cs typeface="Calibri" pitchFamily="34" charset="-120"/>
+              </a:rPr>
+              <a:t>Jika penuh → random antar peminta</a:t>
+            </a:r>
+            <a:endParaRPr lang="en-US" sz="950" dirty="0"/>
+          </a:p>
+          <a:p>
+            <a:pPr indent="0" marL="0">
+              <a:buNone/>
+            </a:pPr>
+            <a:r>
+              <a:rPr lang="en-US" sz="950" dirty="0">
+                <a:solidFill>
+                  <a:srgbClr val="1A1A2E"/>
+                </a:solidFill>
+                <a:latin typeface="Calibri" pitchFamily="34" charset="0"/>
+                <a:ea typeface="Calibri" pitchFamily="34" charset="-122"/>
+                <a:cs typeface="Calibri" pitchFamily="34" charset="-120"/>
+              </a:rPr>
+              <a:t>Yang kalah: relokasi ke hari lain otomatis</a:t>
+            </a:r>
+            <a:endParaRPr lang="en-US" sz="950" dirty="0"/>
+          </a:p>
+        </p:txBody>
+      </p:sp>
+      <p:sp>
+        <p:nvSpPr>
+          <p:cNvPr id="22" name="Shape 20"/>
+          <p:cNvSpPr/>
+          <p:nvPr/>
+        </p:nvSpPr>
+        <p:spPr>
+          <a:xfrm>
+            <a:off x="4892040" y="3977640"/>
+            <a:ext cx="3794760" cy="594360"/>
+          </a:xfrm>
+          <a:prstGeom prst="roundRect">
+            <a:avLst>
+              <a:gd name="adj" fmla="val 12308"/>
+            </a:avLst>
+          </a:prstGeom>
+          <a:solidFill>
+            <a:srgbClr val="2D6A4F"/>
+          </a:solidFill>
+          <a:ln w="12700">
+            <a:solidFill>
+              <a:srgbClr val="2D6A4F"/>
+            </a:solidFill>
+            <a:prstDash val="solid"/>
+          </a:ln>
+          <a:effectLst>
+            <a:outerShdw sx="100000" sy="100000" kx="0" ky="0" algn="bl" rotWithShape="0" blurRad="101600" dist="38100" dir="2700000">
+              <a:srgbClr val="000000">
+                <a:alpha val="12000"/>
+              </a:srgbClr>
+            </a:outerShdw>
+          </a:effectLst>
+        </p:spPr>
+      </p:sp>
+      <p:sp>
+        <p:nvSpPr>
           <p:cNvPr id="23" name="Text 21"/>
           <p:cNvSpPr/>
           <p:nvPr/>
         </p:nvSpPr>
         <p:spPr>
           <a:xfrm>
-            <a:off x="502920" y="4425696"/>
-            <a:ext cx="8229600" cy="566928"/>
-          </a:xfrm>
-          <a:prstGeom prst="rect">
-            <a:avLst/>
-          </a:prstGeom>
-          <a:noFill/>
-          <a:ln/>
-        </p:spPr>
-        <p:txBody>
-          <a:bodyPr wrap="square" lIns="0" tIns="0" rIns="0" bIns="0" rtlCol="0" anchor="ctr"/>
-          <a:lstStyle/>
-          <a:p>
-            <a:pPr algn="ctr" indent="0" marL="0">
-              <a:buNone/>
-            </a:pPr>
-            <a:r>
-              <a:rPr lang="en-US" sz="1200" i="1" dirty="0">
-                <a:solidFill>
-                  <a:srgbClr val="F4D03F"/>
-                </a:solidFill>
-                <a:latin typeface="Cambria" pitchFamily="34" charset="0"/>
-                <a:ea typeface="Cambria" pitchFamily="34" charset="-122"/>
-                <a:cs typeface="Cambria" pitchFamily="34" charset="-120"/>
-              </a:rPr>
-              <a:t>"Penjadwalan yang adil, transparan, dan konsisten — dari bulan ke bulan — tanpa human error"</a:t>
-            </a:r>
-            <a:endParaRPr lang="en-US" sz="1200" dirty="0"/>
+            <a:off x="5029200" y="4005072"/>
+            <a:ext cx="3520440" cy="548640"/>
+          </a:xfrm>
+          <a:prstGeom prst="rect">
+            <a:avLst/>
+          </a:prstGeom>
+          <a:noFill/>
+          <a:ln/>
+        </p:spPr>
+        <p:txBody>
+          <a:bodyPr wrap="square" lIns="0" tIns="0" rIns="0" bIns="0" rtlCol="0" anchor="ctr"/>
+          <a:lstStyle/>
+          <a:p>
+            <a:pPr indent="0" marL="0">
+              <a:buNone/>
+            </a:pPr>
+            <a:r>
+              <a:rPr lang="en-US" sz="950" b="1" dirty="0">
+                <a:solidFill>
+                  <a:srgbClr val="FFFFFF"/>
+                </a:solidFill>
+                <a:latin typeface="Calibri" pitchFamily="34" charset="0"/>
+                <a:ea typeface="Calibri" pitchFamily="34" charset="-122"/>
+                <a:cs typeface="Calibri" pitchFamily="34" charset="-120"/>
+              </a:rPr>
+              <a:t>RESULT: Fair  •  ACC 100%  •  Pending best-effort  •  No conflict</a:t>
+            </a:r>
+            <a:endParaRPr lang="en-US" sz="950" dirty="0"/>
           </a:p>
         </p:txBody>
       </p:sp>
@@ -11799,7 +11853,7 @@
     <p:bg>
       <p:bgPr>
         <a:solidFill>
-          <a:srgbClr val="1B4332"/>
+          <a:srgbClr val="F8F9FA"/>
         </a:solidFill>
       </p:bgPr>
     </p:bg>
@@ -11825,137 +11879,82 @@
         </p:nvSpPr>
         <p:spPr>
           <a:xfrm>
-            <a:off x="548640" y="1371600"/>
-            <a:ext cx="8046720" cy="1097280"/>
-          </a:xfrm>
-          <a:prstGeom prst="rect">
-            <a:avLst/>
-          </a:prstGeom>
-          <a:noFill/>
-          <a:ln/>
-        </p:spPr>
-        <p:txBody>
-          <a:bodyPr wrap="square" rtlCol="0" anchor="ctr"/>
+            <a:off x="365760" y="164592"/>
+            <a:ext cx="8412480" cy="658368"/>
+          </a:xfrm>
+          <a:prstGeom prst="rect">
+            <a:avLst/>
+          </a:prstGeom>
+          <a:noFill/>
+          <a:ln/>
+        </p:spPr>
+        <p:txBody>
+          <a:bodyPr wrap="square" lIns="0" tIns="0" rIns="0" bIns="0" rtlCol="0" anchor="ctr"/>
           <a:lstStyle/>
           <a:p>
             <a:pPr algn="ctr" indent="0" marL="0">
               <a:buNone/>
             </a:pPr>
             <a:r>
-              <a:rPr lang="en-US" sz="4600" b="1" dirty="0">
-                <a:solidFill>
-                  <a:srgbClr val="FFFFFF"/>
+              <a:rPr lang="en-US" sz="3000" b="1" dirty="0">
+                <a:solidFill>
+                  <a:srgbClr val="1B4332"/>
                 </a:solidFill>
                 <a:latin typeface="Cambria" pitchFamily="34" charset="0"/>
                 <a:ea typeface="Cambria" pitchFamily="34" charset="-122"/>
                 <a:cs typeface="Cambria" pitchFamily="34" charset="-120"/>
               </a:rPr>
-              <a:t>CSO BCA Syariah Scheduler</a:t>
-            </a:r>
-            <a:endParaRPr lang="en-US" sz="4600" dirty="0"/>
-          </a:p>
-        </p:txBody>
-      </p:sp>
-      <p:sp>
-        <p:nvSpPr>
-          <p:cNvPr id="3" name="Text 1"/>
-          <p:cNvSpPr/>
-          <p:nvPr/>
-        </p:nvSpPr>
-        <p:spPr>
-          <a:xfrm>
-            <a:off x="548640" y="2651760"/>
-            <a:ext cx="8046720" cy="502920"/>
-          </a:xfrm>
-          <a:prstGeom prst="rect">
-            <a:avLst/>
-          </a:prstGeom>
-          <a:noFill/>
-          <a:ln/>
-        </p:spPr>
-        <p:txBody>
-          <a:bodyPr wrap="square" rtlCol="0" anchor="ctr"/>
-          <a:lstStyle/>
-          <a:p>
-            <a:pPr algn="ctr" indent="0" marL="0">
-              <a:buNone/>
-            </a:pPr>
-            <a:r>
-              <a:rPr lang="en-US" sz="2200" dirty="0">
-                <a:solidFill>
-                  <a:srgbClr val="F4D03F"/>
-                </a:solidFill>
-                <a:latin typeface="Calibri" pitchFamily="34" charset="0"/>
-                <a:ea typeface="Calibri" pitchFamily="34" charset="-122"/>
-                <a:cs typeface="Calibri" pitchFamily="34" charset="-120"/>
-              </a:rPr>
-              <a:t>Ready for Production ✓</a:t>
-            </a:r>
-            <a:endParaRPr lang="en-US" sz="2200" dirty="0"/>
-          </a:p>
-        </p:txBody>
-      </p:sp>
-      <p:sp>
-        <p:nvSpPr>
-          <p:cNvPr id="4" name="Text 2"/>
-          <p:cNvSpPr/>
-          <p:nvPr/>
-        </p:nvSpPr>
-        <p:spPr>
-          <a:xfrm>
-            <a:off x="548640" y="3246120"/>
-            <a:ext cx="8046720" cy="411480"/>
-          </a:xfrm>
-          <a:prstGeom prst="rect">
-            <a:avLst/>
-          </a:prstGeom>
-          <a:noFill/>
-          <a:ln/>
-        </p:spPr>
-        <p:txBody>
-          <a:bodyPr wrap="square" rtlCol="0" anchor="ctr"/>
-          <a:lstStyle/>
-          <a:p>
-            <a:pPr algn="ctr" indent="0" marL="0">
-              <a:buNone/>
-            </a:pPr>
-            <a:r>
-              <a:rPr lang="en-US" sz="1600" dirty="0">
-                <a:solidFill>
-                  <a:srgbClr val="F4D03F"/>
-                </a:solidFill>
-                <a:latin typeface="Calibri" pitchFamily="34" charset="0"/>
-                <a:ea typeface="Calibri" pitchFamily="34" charset="-122"/>
-                <a:cs typeface="Calibri" pitchFamily="34" charset="-120"/>
-              </a:rPr>
-              <a:t>Rules-Driven  •  Fair  •  Fast  •  Transparent  •  Cross-Month Ready</a:t>
-            </a:r>
-            <a:endParaRPr lang="en-US" sz="1600" dirty="0"/>
-          </a:p>
-        </p:txBody>
-      </p:sp>
-      <p:sp>
-        <p:nvSpPr>
-          <p:cNvPr id="5" name="Shape 3"/>
-          <p:cNvSpPr/>
-          <p:nvPr/>
-        </p:nvSpPr>
-        <p:spPr>
-          <a:xfrm>
-            <a:off x="2926080" y="4069080"/>
-            <a:ext cx="3291840" cy="502920"/>
+              <a:t>Conclusion: 3 Pillars</a:t>
+            </a:r>
+            <a:endParaRPr lang="en-US" sz="3000" dirty="0"/>
+          </a:p>
+        </p:txBody>
+      </p:sp>
+      <p:sp>
+        <p:nvSpPr>
+          <p:cNvPr id="3" name="Shape 1"/>
+          <p:cNvSpPr/>
+          <p:nvPr/>
+        </p:nvSpPr>
+        <p:spPr>
+          <a:xfrm>
+            <a:off x="365760" y="896112"/>
+            <a:ext cx="8412480" cy="0"/>
+          </a:xfrm>
+          <a:prstGeom prst="line">
+            <a:avLst/>
+          </a:prstGeom>
+          <a:noFill/>
+          <a:ln w="31750">
+            <a:solidFill>
+              <a:srgbClr val="F4D03F"/>
+            </a:solidFill>
+            <a:prstDash val="solid"/>
+          </a:ln>
+        </p:spPr>
+      </p:sp>
+      <p:sp>
+        <p:nvSpPr>
+          <p:cNvPr id="4" name="Shape 2"/>
+          <p:cNvSpPr/>
+          <p:nvPr/>
+        </p:nvSpPr>
+        <p:spPr>
+          <a:xfrm>
+            <a:off x="365760" y="1005840"/>
+            <a:ext cx="2651760" cy="3291840"/>
           </a:xfrm>
           <a:prstGeom prst="roundRect">
             <a:avLst>
-              <a:gd name="adj" fmla="val 14545"/>
+              <a:gd name="adj" fmla="val 2759"/>
             </a:avLst>
           </a:prstGeom>
           <a:solidFill>
-            <a:srgbClr val="40916C"/>
+            <a:srgbClr val="2D6A4F"/>
           </a:solidFill>
           <a:ln w="12700">
             <a:solidFill>
-              <a:srgbClr val="40916C"/>
+              <a:srgbClr val="2D6A4F"/>
             </a:solidFill>
             <a:prstDash val="solid"/>
           </a:ln>
@@ -11970,14 +11969,50 @@
       </p:sp>
       <p:sp>
         <p:nvSpPr>
+          <p:cNvPr id="5" name="Text 3"/>
+          <p:cNvSpPr/>
+          <p:nvPr/>
+        </p:nvSpPr>
+        <p:spPr>
+          <a:xfrm>
+            <a:off x="365760" y="1051560"/>
+            <a:ext cx="2651760" cy="594360"/>
+          </a:xfrm>
+          <a:prstGeom prst="rect">
+            <a:avLst/>
+          </a:prstGeom>
+          <a:noFill/>
+          <a:ln/>
+        </p:spPr>
+        <p:txBody>
+          <a:bodyPr wrap="square" lIns="0" tIns="0" rIns="0" bIns="0" rtlCol="0" anchor="ctr"/>
+          <a:lstStyle/>
+          <a:p>
+            <a:pPr algn="ctr" indent="0" marL="0">
+              <a:buNone/>
+            </a:pPr>
+            <a:r>
+              <a:rPr lang="en-US" sz="2800" dirty="0">
+                <a:solidFill>
+                  <a:srgbClr val="000000"/>
+                </a:solidFill>
+              </a:rPr>
+              <a:t>⚙</a:t>
+            </a:r>
+            <a:endParaRPr lang="en-US" sz="2800" dirty="0"/>
+          </a:p>
+        </p:txBody>
+      </p:sp>
+      <p:sp>
+        <p:nvSpPr>
           <p:cNvPr id="6" name="Text 4"/>
           <p:cNvSpPr/>
           <p:nvPr/>
         </p:nvSpPr>
         <p:spPr>
           <a:xfrm>
-            <a:off x="2926080" y="4069080"/>
-            <a:ext cx="3291840" cy="502920"/>
+            <a:off x="457200" y="1709928"/>
+            <a:ext cx="2468880" cy="411480"/>
           </a:xfrm>
           <a:prstGeom prst="rect">
             <a:avLst/>
@@ -11993,17 +12028,659 @@
               <a:buNone/>
             </a:pPr>
             <a:r>
-              <a:rPr lang="en-US" sz="1000" b="1" dirty="0">
+              <a:rPr lang="en-US" sz="1300" b="1" dirty="0">
                 <a:solidFill>
                   <a:srgbClr val="FFFFFF"/>
                 </a:solidFill>
-                <a:latin typeface="Calibri" pitchFamily="34" charset="0"/>
-                <a:ea typeface="Calibri" pitchFamily="34" charset="-122"/>
-                <a:cs typeface="Calibri" pitchFamily="34" charset="-120"/>
-              </a:rPr>
-              <a:t>v6  •  14 Rules  •  Config JSON  •  Carry-Over Analysis</a:t>
-            </a:r>
-            <a:endParaRPr lang="en-US" sz="1000" dirty="0"/>
+                <a:latin typeface="Cambria" pitchFamily="34" charset="0"/>
+                <a:ea typeface="Cambria" pitchFamily="34" charset="-122"/>
+                <a:cs typeface="Cambria" pitchFamily="34" charset="-120"/>
+              </a:rPr>
+              <a:t>SOLID AUTOMATION</a:t>
+            </a:r>
+            <a:endParaRPr lang="en-US" sz="1300" dirty="0"/>
+          </a:p>
+        </p:txBody>
+      </p:sp>
+      <p:sp>
+        <p:nvSpPr>
+          <p:cNvPr id="7" name="Text 5"/>
+          <p:cNvSpPr/>
+          <p:nvPr/>
+        </p:nvSpPr>
+        <p:spPr>
+          <a:xfrm>
+            <a:off x="548640" y="2212848"/>
+            <a:ext cx="2286000" cy="502920"/>
+          </a:xfrm>
+          <a:prstGeom prst="rect">
+            <a:avLst/>
+          </a:prstGeom>
+          <a:noFill/>
+          <a:ln/>
+        </p:spPr>
+        <p:txBody>
+          <a:bodyPr wrap="square" lIns="0" tIns="0" rIns="0" bIns="0" rtlCol="0" anchor="ctr"/>
+          <a:lstStyle/>
+          <a:p>
+            <a:pPr indent="0" marL="0">
+              <a:buNone/>
+            </a:pPr>
+            <a:r>
+              <a:rPr lang="en-US" sz="1050" dirty="0">
+                <a:solidFill>
+                  <a:srgbClr val="D1FAE5"/>
+                </a:solidFill>
+                <a:latin typeface="Calibri" pitchFamily="34" charset="0"/>
+                <a:ea typeface="Calibri" pitchFamily="34" charset="-122"/>
+                <a:cs typeface="Calibri" pitchFamily="34" charset="-120"/>
+              </a:rPr>
+              <a:t>✓ Deterministic solver (bukan AI)</a:t>
+            </a:r>
+            <a:endParaRPr lang="en-US" sz="1050" dirty="0"/>
+          </a:p>
+        </p:txBody>
+      </p:sp>
+      <p:sp>
+        <p:nvSpPr>
+          <p:cNvPr id="8" name="Text 6"/>
+          <p:cNvSpPr/>
+          <p:nvPr/>
+        </p:nvSpPr>
+        <p:spPr>
+          <a:xfrm>
+            <a:off x="548640" y="2761488"/>
+            <a:ext cx="2286000" cy="502920"/>
+          </a:xfrm>
+          <a:prstGeom prst="rect">
+            <a:avLst/>
+          </a:prstGeom>
+          <a:noFill/>
+          <a:ln/>
+        </p:spPr>
+        <p:txBody>
+          <a:bodyPr wrap="square" lIns="0" tIns="0" rIns="0" bIns="0" rtlCol="0" anchor="ctr"/>
+          <a:lstStyle/>
+          <a:p>
+            <a:pPr indent="0" marL="0">
+              <a:buNone/>
+            </a:pPr>
+            <a:r>
+              <a:rPr lang="en-US" sz="1050" dirty="0">
+                <a:solidFill>
+                  <a:srgbClr val="D1FAE5"/>
+                </a:solidFill>
+                <a:latin typeface="Calibri" pitchFamily="34" charset="0"/>
+                <a:ea typeface="Calibri" pitchFamily="34" charset="-122"/>
+                <a:cs typeface="Calibri" pitchFamily="34" charset="-120"/>
+              </a:rPr>
+              <a:t>✓ Repeatable, explainable, auditable</a:t>
+            </a:r>
+            <a:endParaRPr lang="en-US" sz="1050" dirty="0"/>
+          </a:p>
+        </p:txBody>
+      </p:sp>
+      <p:sp>
+        <p:nvSpPr>
+          <p:cNvPr id="9" name="Text 7"/>
+          <p:cNvSpPr/>
+          <p:nvPr/>
+        </p:nvSpPr>
+        <p:spPr>
+          <a:xfrm>
+            <a:off x="548640" y="3310128"/>
+            <a:ext cx="2286000" cy="502920"/>
+          </a:xfrm>
+          <a:prstGeom prst="rect">
+            <a:avLst/>
+          </a:prstGeom>
+          <a:noFill/>
+          <a:ln/>
+        </p:spPr>
+        <p:txBody>
+          <a:bodyPr wrap="square" lIns="0" tIns="0" rIns="0" bIns="0" rtlCol="0" anchor="ctr"/>
+          <a:lstStyle/>
+          <a:p>
+            <a:pPr indent="0" marL="0">
+              <a:buNone/>
+            </a:pPr>
+            <a:r>
+              <a:rPr lang="en-US" sz="1050" dirty="0">
+                <a:solidFill>
+                  <a:srgbClr val="D1FAE5"/>
+                </a:solidFill>
+                <a:latin typeface="Calibri" pitchFamily="34" charset="0"/>
+                <a:ea typeface="Calibri" pitchFamily="34" charset="-122"/>
+                <a:cs typeface="Calibri" pitchFamily="34" charset="-120"/>
+              </a:rPr>
+              <a:t>✓ 4-Phase constraint engine</a:t>
+            </a:r>
+            <a:endParaRPr lang="en-US" sz="1050" dirty="0"/>
+          </a:p>
+        </p:txBody>
+      </p:sp>
+      <p:sp>
+        <p:nvSpPr>
+          <p:cNvPr id="10" name="Shape 8"/>
+          <p:cNvSpPr/>
+          <p:nvPr/>
+        </p:nvSpPr>
+        <p:spPr>
+          <a:xfrm>
+            <a:off x="3227832" y="1005840"/>
+            <a:ext cx="2651760" cy="3291840"/>
+          </a:xfrm>
+          <a:prstGeom prst="roundRect">
+            <a:avLst>
+              <a:gd name="adj" fmla="val 2759"/>
+            </a:avLst>
+          </a:prstGeom>
+          <a:solidFill>
+            <a:srgbClr val="2563EB"/>
+          </a:solidFill>
+          <a:ln w="12700">
+            <a:solidFill>
+              <a:srgbClr val="2563EB"/>
+            </a:solidFill>
+            <a:prstDash val="solid"/>
+          </a:ln>
+          <a:effectLst>
+            <a:outerShdw sx="100000" sy="100000" kx="0" ky="0" algn="bl" rotWithShape="0" blurRad="101600" dist="38100" dir="2700000">
+              <a:srgbClr val="000000">
+                <a:alpha val="12000"/>
+              </a:srgbClr>
+            </a:outerShdw>
+          </a:effectLst>
+        </p:spPr>
+      </p:sp>
+      <p:sp>
+        <p:nvSpPr>
+          <p:cNvPr id="11" name="Text 9"/>
+          <p:cNvSpPr/>
+          <p:nvPr/>
+        </p:nvSpPr>
+        <p:spPr>
+          <a:xfrm>
+            <a:off x="3227832" y="1051560"/>
+            <a:ext cx="2651760" cy="594360"/>
+          </a:xfrm>
+          <a:prstGeom prst="rect">
+            <a:avLst/>
+          </a:prstGeom>
+          <a:noFill/>
+          <a:ln/>
+        </p:spPr>
+        <p:txBody>
+          <a:bodyPr wrap="square" lIns="0" tIns="0" rIns="0" bIns="0" rtlCol="0" anchor="ctr"/>
+          <a:lstStyle/>
+          <a:p>
+            <a:pPr algn="ctr" indent="0" marL="0">
+              <a:buNone/>
+            </a:pPr>
+            <a:r>
+              <a:rPr lang="en-US" sz="2800" dirty="0">
+                <a:solidFill>
+                  <a:srgbClr val="000000"/>
+                </a:solidFill>
+              </a:rPr>
+              <a:t>📋</a:t>
+            </a:r>
+            <a:endParaRPr lang="en-US" sz="2800" dirty="0"/>
+          </a:p>
+        </p:txBody>
+      </p:sp>
+      <p:sp>
+        <p:nvSpPr>
+          <p:cNvPr id="12" name="Text 10"/>
+          <p:cNvSpPr/>
+          <p:nvPr/>
+        </p:nvSpPr>
+        <p:spPr>
+          <a:xfrm>
+            <a:off x="3319272" y="1709928"/>
+            <a:ext cx="2468880" cy="411480"/>
+          </a:xfrm>
+          <a:prstGeom prst="rect">
+            <a:avLst/>
+          </a:prstGeom>
+          <a:noFill/>
+          <a:ln/>
+        </p:spPr>
+        <p:txBody>
+          <a:bodyPr wrap="square" lIns="0" tIns="0" rIns="0" bIns="0" rtlCol="0" anchor="ctr"/>
+          <a:lstStyle/>
+          <a:p>
+            <a:pPr algn="ctr" indent="0" marL="0">
+              <a:buNone/>
+            </a:pPr>
+            <a:r>
+              <a:rPr lang="en-US" sz="1300" b="1" dirty="0">
+                <a:solidFill>
+                  <a:srgbClr val="FFFFFF"/>
+                </a:solidFill>
+                <a:latin typeface="Cambria" pitchFamily="34" charset="0"/>
+                <a:ea typeface="Cambria" pitchFamily="34" charset="-122"/>
+                <a:cs typeface="Cambria" pitchFamily="34" charset="-120"/>
+              </a:rPr>
+              <a:t>RULE-DRIVEN DESIGN</a:t>
+            </a:r>
+            <a:endParaRPr lang="en-US" sz="1300" dirty="0"/>
+          </a:p>
+        </p:txBody>
+      </p:sp>
+      <p:sp>
+        <p:nvSpPr>
+          <p:cNvPr id="13" name="Text 11"/>
+          <p:cNvSpPr/>
+          <p:nvPr/>
+        </p:nvSpPr>
+        <p:spPr>
+          <a:xfrm>
+            <a:off x="3410712" y="2212848"/>
+            <a:ext cx="2286000" cy="502920"/>
+          </a:xfrm>
+          <a:prstGeom prst="rect">
+            <a:avLst/>
+          </a:prstGeom>
+          <a:noFill/>
+          <a:ln/>
+        </p:spPr>
+        <p:txBody>
+          <a:bodyPr wrap="square" lIns="0" tIns="0" rIns="0" bIns="0" rtlCol="0" anchor="ctr"/>
+          <a:lstStyle/>
+          <a:p>
+            <a:pPr indent="0" marL="0">
+              <a:buNone/>
+            </a:pPr>
+            <a:r>
+              <a:rPr lang="en-US" sz="1050" dirty="0">
+                <a:solidFill>
+                  <a:srgbClr val="D1FAE5"/>
+                </a:solidFill>
+                <a:latin typeface="Calibri" pitchFamily="34" charset="0"/>
+                <a:ea typeface="Calibri" pitchFamily="34" charset="-122"/>
+                <a:cs typeface="Calibri" pitchFamily="34" charset="-120"/>
+              </a:rPr>
+              <a:t>✓ 14 business rules terintegrasi</a:t>
+            </a:r>
+            <a:endParaRPr lang="en-US" sz="1050" dirty="0"/>
+          </a:p>
+        </p:txBody>
+      </p:sp>
+      <p:sp>
+        <p:nvSpPr>
+          <p:cNvPr id="14" name="Text 12"/>
+          <p:cNvSpPr/>
+          <p:nvPr/>
+        </p:nvSpPr>
+        <p:spPr>
+          <a:xfrm>
+            <a:off x="3410712" y="2761488"/>
+            <a:ext cx="2286000" cy="502920"/>
+          </a:xfrm>
+          <a:prstGeom prst="rect">
+            <a:avLst/>
+          </a:prstGeom>
+          <a:noFill/>
+          <a:ln/>
+        </p:spPr>
+        <p:txBody>
+          <a:bodyPr wrap="square" lIns="0" tIns="0" rIns="0" bIns="0" rtlCol="0" anchor="ctr"/>
+          <a:lstStyle/>
+          <a:p>
+            <a:pPr indent="0" marL="0">
+              <a:buNone/>
+            </a:pPr>
+            <a:r>
+              <a:rPr lang="en-US" sz="1050" dirty="0">
+                <a:solidFill>
+                  <a:srgbClr val="D1FAE5"/>
+                </a:solidFill>
+                <a:latin typeface="Calibri" pitchFamily="34" charset="0"/>
+                <a:ea typeface="Calibri" pitchFamily="34" charset="-122"/>
+                <a:cs typeface="Calibri" pitchFamily="34" charset="-120"/>
+              </a:rPr>
+              <a:t>✓ Cross-month carry-over detection</a:t>
+            </a:r>
+            <a:endParaRPr lang="en-US" sz="1050" dirty="0"/>
+          </a:p>
+        </p:txBody>
+      </p:sp>
+      <p:sp>
+        <p:nvSpPr>
+          <p:cNvPr id="15" name="Text 13"/>
+          <p:cNvSpPr/>
+          <p:nvPr/>
+        </p:nvSpPr>
+        <p:spPr>
+          <a:xfrm>
+            <a:off x="3410712" y="3310128"/>
+            <a:ext cx="2286000" cy="502920"/>
+          </a:xfrm>
+          <a:prstGeom prst="rect">
+            <a:avLst/>
+          </a:prstGeom>
+          <a:noFill/>
+          <a:ln/>
+        </p:spPr>
+        <p:txBody>
+          <a:bodyPr wrap="square" lIns="0" tIns="0" rIns="0" bIns="0" rtlCol="0" anchor="ctr"/>
+          <a:lstStyle/>
+          <a:p>
+            <a:pPr indent="0" marL="0">
+              <a:buNone/>
+            </a:pPr>
+            <a:r>
+              <a:rPr lang="en-US" sz="1050" dirty="0">
+                <a:solidFill>
+                  <a:srgbClr val="D1FAE5"/>
+                </a:solidFill>
+                <a:latin typeface="Calibri" pitchFamily="34" charset="0"/>
+                <a:ea typeface="Calibri" pitchFamily="34" charset="-122"/>
+                <a:cs typeface="Calibri" pitchFamily="34" charset="-120"/>
+              </a:rPr>
+              <a:t>✓ Config save/load JSON</a:t>
+            </a:r>
+            <a:endParaRPr lang="en-US" sz="1050" dirty="0"/>
+          </a:p>
+        </p:txBody>
+      </p:sp>
+      <p:sp>
+        <p:nvSpPr>
+          <p:cNvPr id="16" name="Shape 14"/>
+          <p:cNvSpPr/>
+          <p:nvPr/>
+        </p:nvSpPr>
+        <p:spPr>
+          <a:xfrm>
+            <a:off x="6089904" y="1005840"/>
+            <a:ext cx="2651760" cy="3291840"/>
+          </a:xfrm>
+          <a:prstGeom prst="roundRect">
+            <a:avLst>
+              <a:gd name="adj" fmla="val 2759"/>
+            </a:avLst>
+          </a:prstGeom>
+          <a:solidFill>
+            <a:srgbClr val="EA580C"/>
+          </a:solidFill>
+          <a:ln w="12700">
+            <a:solidFill>
+              <a:srgbClr val="EA580C"/>
+            </a:solidFill>
+            <a:prstDash val="solid"/>
+          </a:ln>
+          <a:effectLst>
+            <a:outerShdw sx="100000" sy="100000" kx="0" ky="0" algn="bl" rotWithShape="0" blurRad="101600" dist="38100" dir="2700000">
+              <a:srgbClr val="000000">
+                <a:alpha val="12000"/>
+              </a:srgbClr>
+            </a:outerShdw>
+          </a:effectLst>
+        </p:spPr>
+      </p:sp>
+      <p:sp>
+        <p:nvSpPr>
+          <p:cNvPr id="17" name="Text 15"/>
+          <p:cNvSpPr/>
+          <p:nvPr/>
+        </p:nvSpPr>
+        <p:spPr>
+          <a:xfrm>
+            <a:off x="6089904" y="1051560"/>
+            <a:ext cx="2651760" cy="594360"/>
+          </a:xfrm>
+          <a:prstGeom prst="rect">
+            <a:avLst/>
+          </a:prstGeom>
+          <a:noFill/>
+          <a:ln/>
+        </p:spPr>
+        <p:txBody>
+          <a:bodyPr wrap="square" lIns="0" tIns="0" rIns="0" bIns="0" rtlCol="0" anchor="ctr"/>
+          <a:lstStyle/>
+          <a:p>
+            <a:pPr algn="ctr" indent="0" marL="0">
+              <a:buNone/>
+            </a:pPr>
+            <a:r>
+              <a:rPr lang="en-US" sz="2800" dirty="0">
+                <a:solidFill>
+                  <a:srgbClr val="000000"/>
+                </a:solidFill>
+              </a:rPr>
+              <a:t>⚡</a:t>
+            </a:r>
+            <a:endParaRPr lang="en-US" sz="2800" dirty="0"/>
+          </a:p>
+        </p:txBody>
+      </p:sp>
+      <p:sp>
+        <p:nvSpPr>
+          <p:cNvPr id="18" name="Text 16"/>
+          <p:cNvSpPr/>
+          <p:nvPr/>
+        </p:nvSpPr>
+        <p:spPr>
+          <a:xfrm>
+            <a:off x="6181344" y="1709928"/>
+            <a:ext cx="2468880" cy="411480"/>
+          </a:xfrm>
+          <a:prstGeom prst="rect">
+            <a:avLst/>
+          </a:prstGeom>
+          <a:noFill/>
+          <a:ln/>
+        </p:spPr>
+        <p:txBody>
+          <a:bodyPr wrap="square" lIns="0" tIns="0" rIns="0" bIns="0" rtlCol="0" anchor="ctr"/>
+          <a:lstStyle/>
+          <a:p>
+            <a:pPr algn="ctr" indent="0" marL="0">
+              <a:buNone/>
+            </a:pPr>
+            <a:r>
+              <a:rPr lang="en-US" sz="1300" b="1" dirty="0">
+                <a:solidFill>
+                  <a:srgbClr val="FFFFFF"/>
+                </a:solidFill>
+                <a:latin typeface="Cambria" pitchFamily="34" charset="0"/>
+                <a:ea typeface="Cambria" pitchFamily="34" charset="-122"/>
+                <a:cs typeface="Cambria" pitchFamily="34" charset="-120"/>
+              </a:rPr>
+              <a:t>FAST &amp; FAIR</a:t>
+            </a:r>
+            <a:endParaRPr lang="en-US" sz="1300" dirty="0"/>
+          </a:p>
+        </p:txBody>
+      </p:sp>
+      <p:sp>
+        <p:nvSpPr>
+          <p:cNvPr id="19" name="Text 17"/>
+          <p:cNvSpPr/>
+          <p:nvPr/>
+        </p:nvSpPr>
+        <p:spPr>
+          <a:xfrm>
+            <a:off x="6272784" y="2212848"/>
+            <a:ext cx="2286000" cy="502920"/>
+          </a:xfrm>
+          <a:prstGeom prst="rect">
+            <a:avLst/>
+          </a:prstGeom>
+          <a:noFill/>
+          <a:ln/>
+        </p:spPr>
+        <p:txBody>
+          <a:bodyPr wrap="square" lIns="0" tIns="0" rIns="0" bIns="0" rtlCol="0" anchor="ctr"/>
+          <a:lstStyle/>
+          <a:p>
+            <a:pPr indent="0" marL="0">
+              <a:buNone/>
+            </a:pPr>
+            <a:r>
+              <a:rPr lang="en-US" sz="1050" dirty="0">
+                <a:solidFill>
+                  <a:srgbClr val="D1FAE5"/>
+                </a:solidFill>
+                <a:latin typeface="Calibri" pitchFamily="34" charset="0"/>
+                <a:ea typeface="Calibri" pitchFamily="34" charset="-122"/>
+                <a:cs typeface="Calibri" pitchFamily="34" charset="-120"/>
+              </a:rPr>
+              <a:t>✓ &lt; 5 detik vs 4-8 jam manual</a:t>
+            </a:r>
+            <a:endParaRPr lang="en-US" sz="1050" dirty="0"/>
+          </a:p>
+        </p:txBody>
+      </p:sp>
+      <p:sp>
+        <p:nvSpPr>
+          <p:cNvPr id="20" name="Text 18"/>
+          <p:cNvSpPr/>
+          <p:nvPr/>
+        </p:nvSpPr>
+        <p:spPr>
+          <a:xfrm>
+            <a:off x="6272784" y="2761488"/>
+            <a:ext cx="2286000" cy="502920"/>
+          </a:xfrm>
+          <a:prstGeom prst="rect">
+            <a:avLst/>
+          </a:prstGeom>
+          <a:noFill/>
+          <a:ln/>
+        </p:spPr>
+        <p:txBody>
+          <a:bodyPr wrap="square" lIns="0" tIns="0" rIns="0" bIns="0" rtlCol="0" anchor="ctr"/>
+          <a:lstStyle/>
+          <a:p>
+            <a:pPr indent="0" marL="0">
+              <a:buNone/>
+            </a:pPr>
+            <a:r>
+              <a:rPr lang="en-US" sz="1050" dirty="0">
+                <a:solidFill>
+                  <a:srgbClr val="D1FAE5"/>
+                </a:solidFill>
+                <a:latin typeface="Calibri" pitchFamily="34" charset="0"/>
+                <a:ea typeface="Calibri" pitchFamily="34" charset="-122"/>
+                <a:cs typeface="Calibri" pitchFamily="34" charset="-120"/>
+              </a:rPr>
+              <a:t>✓ Mathematically balanced</a:t>
+            </a:r>
+            <a:endParaRPr lang="en-US" sz="1050" dirty="0"/>
+          </a:p>
+        </p:txBody>
+      </p:sp>
+      <p:sp>
+        <p:nvSpPr>
+          <p:cNvPr id="21" name="Text 19"/>
+          <p:cNvSpPr/>
+          <p:nvPr/>
+        </p:nvSpPr>
+        <p:spPr>
+          <a:xfrm>
+            <a:off x="6272784" y="3310128"/>
+            <a:ext cx="2286000" cy="502920"/>
+          </a:xfrm>
+          <a:prstGeom prst="rect">
+            <a:avLst/>
+          </a:prstGeom>
+          <a:noFill/>
+          <a:ln/>
+        </p:spPr>
+        <p:txBody>
+          <a:bodyPr wrap="square" lIns="0" tIns="0" rIns="0" bIns="0" rtlCol="0" anchor="ctr"/>
+          <a:lstStyle/>
+          <a:p>
+            <a:pPr indent="0" marL="0">
+              <a:buNone/>
+            </a:pPr>
+            <a:r>
+              <a:rPr lang="en-US" sz="1050" dirty="0">
+                <a:solidFill>
+                  <a:srgbClr val="D1FAE5"/>
+                </a:solidFill>
+                <a:latin typeface="Calibri" pitchFamily="34" charset="0"/>
+                <a:ea typeface="Calibri" pitchFamily="34" charset="-122"/>
+                <a:cs typeface="Calibri" pitchFamily="34" charset="-120"/>
+              </a:rPr>
+              <a:t>✓ Request priority tier system</a:t>
+            </a:r>
+            <a:endParaRPr lang="en-US" sz="1050" dirty="0"/>
+          </a:p>
+        </p:txBody>
+      </p:sp>
+      <p:sp>
+        <p:nvSpPr>
+          <p:cNvPr id="22" name="Shape 20"/>
+          <p:cNvSpPr/>
+          <p:nvPr/>
+        </p:nvSpPr>
+        <p:spPr>
+          <a:xfrm>
+            <a:off x="365760" y="4407408"/>
+            <a:ext cx="8412480" cy="594360"/>
+          </a:xfrm>
+          <a:prstGeom prst="roundRect">
+            <a:avLst>
+              <a:gd name="adj" fmla="val 12308"/>
+            </a:avLst>
+          </a:prstGeom>
+          <a:solidFill>
+            <a:srgbClr val="1B4332"/>
+          </a:solidFill>
+          <a:ln w="12700">
+            <a:solidFill>
+              <a:srgbClr val="1B4332"/>
+            </a:solidFill>
+            <a:prstDash val="solid"/>
+          </a:ln>
+          <a:effectLst>
+            <a:outerShdw sx="100000" sy="100000" kx="0" ky="0" algn="bl" rotWithShape="0" blurRad="101600" dist="38100" dir="2700000">
+              <a:srgbClr val="000000">
+                <a:alpha val="12000"/>
+              </a:srgbClr>
+            </a:outerShdw>
+          </a:effectLst>
+        </p:spPr>
+      </p:sp>
+      <p:sp>
+        <p:nvSpPr>
+          <p:cNvPr id="23" name="Text 21"/>
+          <p:cNvSpPr/>
+          <p:nvPr/>
+        </p:nvSpPr>
+        <p:spPr>
+          <a:xfrm>
+            <a:off x="502920" y="4425696"/>
+            <a:ext cx="8229600" cy="566928"/>
+          </a:xfrm>
+          <a:prstGeom prst="rect">
+            <a:avLst/>
+          </a:prstGeom>
+          <a:noFill/>
+          <a:ln/>
+        </p:spPr>
+        <p:txBody>
+          <a:bodyPr wrap="square" lIns="0" tIns="0" rIns="0" bIns="0" rtlCol="0" anchor="ctr"/>
+          <a:lstStyle/>
+          <a:p>
+            <a:pPr algn="ctr" indent="0" marL="0">
+              <a:buNone/>
+            </a:pPr>
+            <a:r>
+              <a:rPr lang="en-US" sz="1200" i="1" dirty="0">
+                <a:solidFill>
+                  <a:srgbClr val="F4D03F"/>
+                </a:solidFill>
+                <a:latin typeface="Cambria" pitchFamily="34" charset="0"/>
+                <a:ea typeface="Cambria" pitchFamily="34" charset="-122"/>
+                <a:cs typeface="Cambria" pitchFamily="34" charset="-120"/>
+              </a:rPr>
+              <a:t>"Penjadwalan yang adil, transparan, dan konsisten — dari bulan ke bulan — tanpa human error"</a:t>
+            </a:r>
+            <a:endParaRPr lang="en-US" sz="1200" dirty="0"/>
           </a:p>
         </p:txBody>
       </p:sp>
@@ -12679,6 +13356,228 @@
               <a:t>GAIN: 16–32× lebih cepat  •  90% error reduction  •  Cross-month analysis  ✓</a:t>
             </a:r>
             <a:endParaRPr lang="en-US" sz="1350" dirty="0"/>
+          </a:p>
+        </p:txBody>
+      </p:sp>
+    </p:spTree>
+  </p:cSld>
+  <p:clrMapOvr>
+    <a:masterClrMapping/>
+  </p:clrMapOvr>
+</p:sld>
+</file>
+
+<file path=ppt/slides/slide20.xml><?xml version="1.0" encoding="utf-8"?>
+<p:sld xmlns:a="http://schemas.openxmlformats.org/drawingml/2006/main" xmlns:r="http://schemas.openxmlformats.org/officeDocument/2006/relationships" xmlns:p="http://schemas.openxmlformats.org/presentationml/2006/main">
+  <p:cSld name="Slide 20">
+    <p:bg>
+      <p:bgPr>
+        <a:solidFill>
+          <a:srgbClr val="1B4332"/>
+        </a:solidFill>
+      </p:bgPr>
+    </p:bg>
+    <p:spTree>
+      <p:nvGrpSpPr>
+        <p:cNvPr id="1" name=""/>
+        <p:cNvGrpSpPr/>
+        <p:nvPr/>
+      </p:nvGrpSpPr>
+      <p:grpSpPr>
+        <a:xfrm>
+          <a:off x="0" y="0"/>
+          <a:ext cx="0" cy="0"/>
+          <a:chOff x="0" y="0"/>
+          <a:chExt cx="0" cy="0"/>
+        </a:xfrm>
+      </p:grpSpPr>
+      <p:sp>
+        <p:nvSpPr>
+          <p:cNvPr id="2" name="Text 0"/>
+          <p:cNvSpPr/>
+          <p:nvPr/>
+        </p:nvSpPr>
+        <p:spPr>
+          <a:xfrm>
+            <a:off x="548640" y="1371600"/>
+            <a:ext cx="8046720" cy="1097280"/>
+          </a:xfrm>
+          <a:prstGeom prst="rect">
+            <a:avLst/>
+          </a:prstGeom>
+          <a:noFill/>
+          <a:ln/>
+        </p:spPr>
+        <p:txBody>
+          <a:bodyPr wrap="square" rtlCol="0" anchor="ctr"/>
+          <a:lstStyle/>
+          <a:p>
+            <a:pPr algn="ctr" indent="0" marL="0">
+              <a:buNone/>
+            </a:pPr>
+            <a:r>
+              <a:rPr lang="en-US" sz="4600" b="1" dirty="0">
+                <a:solidFill>
+                  <a:srgbClr val="FFFFFF"/>
+                </a:solidFill>
+                <a:latin typeface="Cambria" pitchFamily="34" charset="0"/>
+                <a:ea typeface="Cambria" pitchFamily="34" charset="-122"/>
+                <a:cs typeface="Cambria" pitchFamily="34" charset="-120"/>
+              </a:rPr>
+              <a:t>CSO BCA Syariah Scheduler</a:t>
+            </a:r>
+            <a:endParaRPr lang="en-US" sz="4600" dirty="0"/>
+          </a:p>
+        </p:txBody>
+      </p:sp>
+      <p:sp>
+        <p:nvSpPr>
+          <p:cNvPr id="3" name="Text 1"/>
+          <p:cNvSpPr/>
+          <p:nvPr/>
+        </p:nvSpPr>
+        <p:spPr>
+          <a:xfrm>
+            <a:off x="548640" y="2651760"/>
+            <a:ext cx="8046720" cy="502920"/>
+          </a:xfrm>
+          <a:prstGeom prst="rect">
+            <a:avLst/>
+          </a:prstGeom>
+          <a:noFill/>
+          <a:ln/>
+        </p:spPr>
+        <p:txBody>
+          <a:bodyPr wrap="square" rtlCol="0" anchor="ctr"/>
+          <a:lstStyle/>
+          <a:p>
+            <a:pPr algn="ctr" indent="0" marL="0">
+              <a:buNone/>
+            </a:pPr>
+            <a:r>
+              <a:rPr lang="en-US" sz="2200" dirty="0">
+                <a:solidFill>
+                  <a:srgbClr val="F4D03F"/>
+                </a:solidFill>
+                <a:latin typeface="Calibri" pitchFamily="34" charset="0"/>
+                <a:ea typeface="Calibri" pitchFamily="34" charset="-122"/>
+                <a:cs typeface="Calibri" pitchFamily="34" charset="-120"/>
+              </a:rPr>
+              <a:t>Ready for Production ✓</a:t>
+            </a:r>
+            <a:endParaRPr lang="en-US" sz="2200" dirty="0"/>
+          </a:p>
+        </p:txBody>
+      </p:sp>
+      <p:sp>
+        <p:nvSpPr>
+          <p:cNvPr id="4" name="Text 2"/>
+          <p:cNvSpPr/>
+          <p:nvPr/>
+        </p:nvSpPr>
+        <p:spPr>
+          <a:xfrm>
+            <a:off x="548640" y="3246120"/>
+            <a:ext cx="8046720" cy="411480"/>
+          </a:xfrm>
+          <a:prstGeom prst="rect">
+            <a:avLst/>
+          </a:prstGeom>
+          <a:noFill/>
+          <a:ln/>
+        </p:spPr>
+        <p:txBody>
+          <a:bodyPr wrap="square" rtlCol="0" anchor="ctr"/>
+          <a:lstStyle/>
+          <a:p>
+            <a:pPr algn="ctr" indent="0" marL="0">
+              <a:buNone/>
+            </a:pPr>
+            <a:r>
+              <a:rPr lang="en-US" sz="1600" dirty="0">
+                <a:solidFill>
+                  <a:srgbClr val="F4D03F"/>
+                </a:solidFill>
+                <a:latin typeface="Calibri" pitchFamily="34" charset="0"/>
+                <a:ea typeface="Calibri" pitchFamily="34" charset="-122"/>
+                <a:cs typeface="Calibri" pitchFamily="34" charset="-120"/>
+              </a:rPr>
+              <a:t>Rules-Driven  •  Fair  •  Fast  •  Transparent  •  Cross-Month Ready</a:t>
+            </a:r>
+            <a:endParaRPr lang="en-US" sz="1600" dirty="0"/>
+          </a:p>
+        </p:txBody>
+      </p:sp>
+      <p:sp>
+        <p:nvSpPr>
+          <p:cNvPr id="5" name="Shape 3"/>
+          <p:cNvSpPr/>
+          <p:nvPr/>
+        </p:nvSpPr>
+        <p:spPr>
+          <a:xfrm>
+            <a:off x="2926080" y="4069080"/>
+            <a:ext cx="3291840" cy="502920"/>
+          </a:xfrm>
+          <a:prstGeom prst="roundRect">
+            <a:avLst>
+              <a:gd name="adj" fmla="val 14545"/>
+            </a:avLst>
+          </a:prstGeom>
+          <a:solidFill>
+            <a:srgbClr val="40916C"/>
+          </a:solidFill>
+          <a:ln w="12700">
+            <a:solidFill>
+              <a:srgbClr val="40916C"/>
+            </a:solidFill>
+            <a:prstDash val="solid"/>
+          </a:ln>
+          <a:effectLst>
+            <a:outerShdw sx="100000" sy="100000" kx="0" ky="0" algn="bl" rotWithShape="0" blurRad="101600" dist="38100" dir="2700000">
+              <a:srgbClr val="000000">
+                <a:alpha val="12000"/>
+              </a:srgbClr>
+            </a:outerShdw>
+          </a:effectLst>
+        </p:spPr>
+      </p:sp>
+      <p:sp>
+        <p:nvSpPr>
+          <p:cNvPr id="6" name="Text 4"/>
+          <p:cNvSpPr/>
+          <p:nvPr/>
+        </p:nvSpPr>
+        <p:spPr>
+          <a:xfrm>
+            <a:off x="2926080" y="4069080"/>
+            <a:ext cx="3291840" cy="502920"/>
+          </a:xfrm>
+          <a:prstGeom prst="rect">
+            <a:avLst/>
+          </a:prstGeom>
+          <a:noFill/>
+          <a:ln/>
+        </p:spPr>
+        <p:txBody>
+          <a:bodyPr wrap="square" lIns="0" tIns="0" rIns="0" bIns="0" rtlCol="0" anchor="ctr"/>
+          <a:lstStyle/>
+          <a:p>
+            <a:pPr algn="ctr" indent="0" marL="0">
+              <a:buNone/>
+            </a:pPr>
+            <a:r>
+              <a:rPr lang="en-US" sz="1000" b="1" dirty="0">
+                <a:solidFill>
+                  <a:srgbClr val="FFFFFF"/>
+                </a:solidFill>
+                <a:latin typeface="Calibri" pitchFamily="34" charset="0"/>
+                <a:ea typeface="Calibri" pitchFamily="34" charset="-122"/>
+                <a:cs typeface="Calibri" pitchFamily="34" charset="-120"/>
+              </a:rPr>
+              <a:t>v6  •  14 Rules  •  Config JSON  •  Carry-Over Analysis</a:t>
+            </a:r>
+            <a:endParaRPr lang="en-US" sz="1000" dirty="0"/>
           </a:p>
         </p:txBody>
       </p:sp>
